--- a/slides/05-mcp-plugins.pptx
+++ b/slides/05-mcp-plugins.pptx
@@ -2032,145 +2032,9 @@
           <a:chExt cx="0" cy="0"/>
         </a:xfrm>
       </p:grpSpPr>
-      <p:sp>
-        <p:nvSpPr>
-          <p:cNvPr id="2" name="Text 0"/>
-          <p:cNvSpPr/>
-          <p:nvPr/>
-        </p:nvSpPr>
-        <p:spPr>
-          <a:xfrm>
-            <a:off x="5968901" y="0"/>
-            <a:ext cx="3174950" cy="5143500"/>
-          </a:xfrm>
-          <a:prstGeom prst="rect">
-            <a:avLst/>
-          </a:prstGeom>
-          <a:solidFill>
-            <a:srgbClr val="1A7F37"/>
-          </a:solidFill>
-          <a:ln/>
-        </p:spPr>
-        <p:txBody>
-          <a:bodyPr wrap="square" rtlCol="0" anchor="ctr"/>
-          <a:lstStyle/>
-          <a:p>
-            <a:pPr indent="0" marL="0">
-              <a:buNone/>
-            </a:pPr>
-            <a:endParaRPr lang="en-US" dirty="0"/>
-          </a:p>
-        </p:txBody>
-      </p:sp>
-      <p:sp>
-        <p:nvSpPr>
-          <p:cNvPr id="3" name="Text 1"/>
-          <p:cNvSpPr/>
-          <p:nvPr/>
-        </p:nvSpPr>
-        <p:spPr>
-          <a:xfrm>
-            <a:off x="5939692" y="1269950"/>
-            <a:ext cx="2979319" cy="2159050"/>
-          </a:xfrm>
-          <a:prstGeom prst="rect">
-            <a:avLst/>
-          </a:prstGeom>
-          <a:noFill/>
-          <a:ln/>
-        </p:spPr>
-        <p:txBody>
-          <a:bodyPr wrap="square" lIns="0" tIns="0" rIns="0" bIns="0" rtlCol="0" anchor="t"/>
-          <a:lstStyle/>
-          <a:p>
-            <a:pPr algn="ctr" indent="0" marL="0">
-              <a:lnSpc>
-                <a:spcPts val="17000"/>
-              </a:lnSpc>
-              <a:buNone/>
-            </a:pPr>
-            <a:r>
-              <a:rPr lang="en-US" sz="15000" b="1" dirty="0">
-                <a:solidFill>
-                  <a:srgbClr val="2DA44E"/>
-                </a:solidFill>
-                <a:latin typeface="Arial" pitchFamily="34" charset="0"/>
-                <a:ea typeface="Arial" pitchFamily="34" charset="-122"/>
-                <a:cs typeface="Arial" pitchFamily="34" charset="-120"/>
-              </a:rPr>
-              <a:t>05</a:t>
-            </a:r>
-            <a:endParaRPr lang="en-US" sz="15000" dirty="0"/>
-          </a:p>
-        </p:txBody>
-      </p:sp>
-      <p:sp>
-        <p:nvSpPr>
-          <p:cNvPr id="4" name="Text 2"/>
-          <p:cNvSpPr/>
-          <p:nvPr/>
-        </p:nvSpPr>
-        <p:spPr>
-          <a:xfrm>
-            <a:off x="6069330" y="3682901"/>
-            <a:ext cx="2720340" cy="431899"/>
-          </a:xfrm>
-          <a:prstGeom prst="rect">
-            <a:avLst/>
-          </a:prstGeom>
-          <a:noFill/>
-          <a:ln/>
-        </p:spPr>
-        <p:txBody>
-          <a:bodyPr wrap="square" lIns="0" tIns="0" rIns="0" bIns="0" rtlCol="0" anchor="t"/>
-          <a:lstStyle/>
-          <a:p>
-            <a:pPr algn="ctr" indent="0" marL="0">
-              <a:lnSpc>
-                <a:spcPts val="1700"/>
-              </a:lnSpc>
-              <a:buNone/>
-            </a:pPr>
-            <a:r>
-              <a:rPr lang="en-US" sz="1350" dirty="0">
-                <a:solidFill>
-                  <a:srgbClr val="FFFFFF"/>
-                </a:solidFill>
-                <a:latin typeface="Arial" pitchFamily="34" charset="0"/>
-                <a:ea typeface="Arial" pitchFamily="34" charset="-122"/>
-                <a:cs typeface="Arial" pitchFamily="34" charset="-120"/>
-              </a:rPr>
-              <a:t>GITHUB COPILOT APP</a:t>
-            </a:r>
-            <a:endParaRPr lang="en-US" sz="1350" dirty="0"/>
-          </a:p>
-          <a:p>
-            <a:pPr algn="ctr" indent="0" marL="0">
-              <a:lnSpc>
-                <a:spcPts val="1700"/>
-              </a:lnSpc>
-              <a:buNone/>
-            </a:pPr>
-            <a:r>
-              <a:rPr lang="en-US" sz="1350" dirty="0">
-                <a:solidFill>
-                  <a:srgbClr val="FFFFFF"/>
-                </a:solidFill>
-                <a:latin typeface="Arial" pitchFamily="34" charset="0"/>
-                <a:ea typeface="Arial" pitchFamily="34" charset="-122"/>
-                <a:cs typeface="Arial" pitchFamily="34" charset="-120"/>
-              </a:rPr>
-              <a:t>FOR BEGINNERS</a:t>
-            </a:r>
-            <a:endParaRPr lang="en-US" sz="1350" dirty="0"/>
-          </a:p>
-        </p:txBody>
-      </p:sp>
       <p:pic>
         <p:nvPicPr>
-          <p:cNvPr id="5" name="Image 0" descr="/Users/danwahlin/.copilot/session-state/56a7a0da-def8-48d4-b5e8-0ac3878cb8dd/files/slides-build/icons/FaGithub-FFFFFF.png">
-            <a:hlinkClick r:id="rId2" tooltip="https://github.com/github/copilot-app-for-beginners/tree/main/05-mcp-plugins"/>
-          </p:cNvPr>
+          <p:cNvPr id="2" name="Image 0" descr="/Users/danwahlin/.copilot/session-state/56a7a0da-def8-48d4-b5e8-0ac3878cb8dd/files/slides-build/img/grad-title.jpg">    </p:cNvPr>
           <p:cNvPicPr>
             <a:picLocks noChangeAspect="1"/>
           </p:cNvPicPr>
@@ -2184,6 +2048,32 @@
         </p:blipFill>
         <p:spPr>
           <a:xfrm>
+            <a:off x="0" y="0"/>
+            <a:ext cx="9144000" cy="5143500"/>
+          </a:xfrm>
+          <a:prstGeom prst="rect">
+            <a:avLst/>
+          </a:prstGeom>
+        </p:spPr>
+      </p:pic>
+      <p:pic>
+        <p:nvPicPr>
+          <p:cNvPr id="3" name="Image 1" descr="/Users/danwahlin/.copilot/session-state/56a7a0da-def8-48d4-b5e8-0ac3878cb8dd/files/slides-build/icons/FaGithub-1F2328.png">
+            <a:hlinkClick r:id="rId3" tooltip="https://github.com/github/copilot-app-for-beginners/tree/main/05-mcp-plugins"/>
+          </p:cNvPr>
+          <p:cNvPicPr>
+            <a:picLocks noChangeAspect="1"/>
+          </p:cNvPicPr>
+          <p:nvPr/>
+        </p:nvPicPr>
+        <p:blipFill>
+          <a:blip r:embed="rId2"/>
+          <a:stretch>
+            <a:fillRect/>
+          </a:stretch>
+        </p:blipFill>
+        <p:spPr>
+          <a:xfrm>
             <a:off x="8635901" y="203150"/>
             <a:ext cx="304800" cy="304800"/>
           </a:xfrm>
@@ -2194,14 +2084,14 @@
       </p:pic>
       <p:sp>
         <p:nvSpPr>
-          <p:cNvPr id="6" name="Text 3"/>
-          <p:cNvSpPr/>
-          <p:nvPr/>
-        </p:nvSpPr>
-        <p:spPr>
-          <a:xfrm>
-            <a:off x="609600" y="1076325"/>
-            <a:ext cx="5052060" cy="209550"/>
+          <p:cNvPr id="4" name="Text 0"/>
+          <p:cNvSpPr/>
+          <p:nvPr/>
+        </p:nvSpPr>
+        <p:spPr>
+          <a:xfrm>
+            <a:off x="1015901" y="823913"/>
+            <a:ext cx="6088279" cy="209550"/>
           </a:xfrm>
           <a:prstGeom prst="rect">
             <a:avLst/>
@@ -2233,14 +2123,14 @@
       </p:sp>
       <p:sp>
         <p:nvSpPr>
-          <p:cNvPr id="7" name="Text 4"/>
-          <p:cNvSpPr/>
-          <p:nvPr/>
-        </p:nvSpPr>
-        <p:spPr>
-          <a:xfrm>
-            <a:off x="609600" y="1387376"/>
-            <a:ext cx="5052060" cy="1168301"/>
+          <p:cNvPr id="5" name="Text 1"/>
+          <p:cNvSpPr/>
+          <p:nvPr/>
+        </p:nvSpPr>
+        <p:spPr>
+          <a:xfrm>
+            <a:off x="1015901" y="1134963"/>
+            <a:ext cx="6088279" cy="1219200"/>
           </a:xfrm>
           <a:prstGeom prst="rect">
             <a:avLst/>
@@ -2254,7 +2144,7 @@
           <a:p>
             <a:pPr algn="l" indent="0" marL="0">
               <a:lnSpc>
-                <a:spcPts val="4600"/>
+                <a:spcPts val="4800"/>
               </a:lnSpc>
               <a:spcBef>
                 <a:spcPts val="800"/>
@@ -2262,7 +2152,7 @@
               <a:buNone/>
             </a:pPr>
             <a:r>
-              <a:rPr lang="en-US" sz="4000" b="1" dirty="0">
+              <a:rPr lang="en-US" sz="4200" b="1" dirty="0">
                 <a:solidFill>
                   <a:srgbClr val="1F2328"/>
                 </a:solidFill>
@@ -2272,19 +2162,19 @@
               </a:rPr>
               <a:t>MCP Servers and Plugins</a:t>
             </a:r>
-            <a:endParaRPr lang="en-US" sz="4000" dirty="0"/>
-          </a:p>
-        </p:txBody>
-      </p:sp>
-      <p:sp>
-        <p:nvSpPr>
-          <p:cNvPr id="8" name="Text 5"/>
-          <p:cNvSpPr/>
-          <p:nvPr/>
-        </p:nvSpPr>
-        <p:spPr>
-          <a:xfrm>
-            <a:off x="609600" y="2784277"/>
+            <a:endParaRPr lang="en-US" sz="4200" dirty="0"/>
+          </a:p>
+        </p:txBody>
+      </p:sp>
+      <p:sp>
+        <p:nvSpPr>
+          <p:cNvPr id="6" name="Text 2"/>
+          <p:cNvSpPr/>
+          <p:nvPr/>
+        </p:nvSpPr>
+        <p:spPr>
+          <a:xfrm>
+            <a:off x="1015901" y="2582763"/>
             <a:ext cx="609600" cy="63401"/>
           </a:xfrm>
           <a:prstGeom prst="roundRect">
@@ -2310,14 +2200,14 @@
       </p:sp>
       <p:sp>
         <p:nvSpPr>
-          <p:cNvPr id="9" name="Text 6"/>
-          <p:cNvSpPr/>
-          <p:nvPr/>
-        </p:nvSpPr>
-        <p:spPr>
-          <a:xfrm>
-            <a:off x="609600" y="3076277"/>
-            <a:ext cx="5052060" cy="990749"/>
+          <p:cNvPr id="7" name="Text 3"/>
+          <p:cNvSpPr/>
+          <p:nvPr/>
+        </p:nvSpPr>
+        <p:spPr>
+          <a:xfrm>
+            <a:off x="1015901" y="2874764"/>
+            <a:ext cx="6088279" cy="990749"/>
           </a:xfrm>
           <a:prstGeom prst="rect">
             <a:avLst/>
@@ -2352,21 +2242,21 @@
       </p:sp>
       <p:pic>
         <p:nvPicPr>
-          <p:cNvPr id="10" name="Image 1" descr="/Users/danwahlin/.copilot/session-state/56a7a0da-def8-48d4-b5e8-0ac3878cb8dd/files/slides-build/icons/FaGithub-0969DA.png">    </p:cNvPr>
+          <p:cNvPr id="8" name="Image 2" descr="/Users/danwahlin/.copilot/session-state/56a7a0da-def8-48d4-b5e8-0ac3878cb8dd/files/slides-build/icons/FaGithub-0969DA.png">    </p:cNvPr>
           <p:cNvPicPr>
             <a:picLocks noChangeAspect="1"/>
           </p:cNvPicPr>
           <p:nvPr/>
         </p:nvPicPr>
         <p:blipFill>
-          <a:blip r:embed="rId3"/>
+          <a:blip r:embed="rId4"/>
           <a:stretch>
             <a:fillRect/>
           </a:stretch>
         </p:blipFill>
         <p:spPr>
           <a:xfrm>
-            <a:off x="609600" y="4354562"/>
+            <a:off x="1015901" y="4130576"/>
             <a:ext cx="177701" cy="177701"/>
           </a:xfrm>
           <a:prstGeom prst="rect">
@@ -2376,13 +2266,13 @@
       </p:pic>
       <p:sp>
         <p:nvSpPr>
-          <p:cNvPr id="11" name="Text 7"/>
-          <p:cNvSpPr/>
-          <p:nvPr/>
-        </p:nvSpPr>
-        <p:spPr>
-          <a:xfrm>
-            <a:off x="876151" y="4343400"/>
+          <p:cNvPr id="9" name="Text 4"/>
+          <p:cNvSpPr/>
+          <p:nvPr/>
+        </p:nvSpPr>
+        <p:spPr>
+          <a:xfrm>
+            <a:off x="1282452" y="4119414"/>
             <a:ext cx="3373252" cy="200025"/>
           </a:xfrm>
           <a:prstGeom prst="rect">
@@ -2406,7 +2296,7 @@
                 <a:latin typeface="Arial" pitchFamily="34" charset="0"/>
                 <a:ea typeface="Arial" pitchFamily="34" charset="-122"/>
                 <a:cs typeface="Arial" pitchFamily="34" charset="-120"/>
-                <a:hlinkClick r:id="rId4" invalidUrl="" action="" tgtFrame="" tooltip="https://github.com/github/copilot-app-for-beginners/tree/main/05-mcp-plugins" history="1" highlightClick="0" endSnd="0">
+                <a:hlinkClick r:id="rId5" invalidUrl="" action="" tgtFrame="" tooltip="https://github.com/github/copilot-app-for-beginners/tree/main/05-mcp-plugins" history="1" highlightClick="0" endSnd="0">
                   <a:extLst>
                     <a:ext uri="{A12FA001-AC4F-418D-AE19-62706E023703}">
                       <ahyp:hlinkClr xmlns:ahyp="http://schemas.microsoft.com/office/drawing/2018/hyperlinkcolor" val="tx"/>
@@ -2554,82 +2444,9 @@
           </a:p>
         </p:txBody>
       </p:sp>
-      <p:sp>
-        <p:nvSpPr>
-          <p:cNvPr id="5" name="Text 3"/>
-          <p:cNvSpPr/>
-          <p:nvPr/>
-        </p:nvSpPr>
-        <p:spPr>
-          <a:xfrm>
-            <a:off x="7340501" y="177701"/>
-            <a:ext cx="1168301" cy="279350"/>
-          </a:xfrm>
-          <a:prstGeom prst="roundRect">
-            <a:avLst>
-              <a:gd name="adj" fmla="val 22731"/>
-            </a:avLst>
-          </a:prstGeom>
-          <a:solidFill>
-            <a:srgbClr val="1A7F37"/>
-          </a:solidFill>
-          <a:ln/>
-        </p:spPr>
-        <p:txBody>
-          <a:bodyPr wrap="square" rtlCol="0" anchor="ctr"/>
-          <a:lstStyle/>
-          <a:p>
-            <a:pPr indent="0" marL="0">
-              <a:buNone/>
-            </a:pPr>
-            <a:endParaRPr lang="en-US" dirty="0"/>
-          </a:p>
-        </p:txBody>
-      </p:sp>
-      <p:sp>
-        <p:nvSpPr>
-          <p:cNvPr id="6" name="Text 4"/>
-          <p:cNvSpPr/>
-          <p:nvPr/>
-        </p:nvSpPr>
-        <p:spPr>
-          <a:xfrm>
-            <a:off x="7461041" y="231577"/>
-            <a:ext cx="927071" cy="171450"/>
-          </a:xfrm>
-          <a:prstGeom prst="rect">
-            <a:avLst/>
-          </a:prstGeom>
-          <a:noFill/>
-          <a:ln/>
-        </p:spPr>
-        <p:txBody>
-          <a:bodyPr wrap="square" lIns="0" tIns="0" rIns="0" bIns="0" rtlCol="0" anchor="t"/>
-          <a:lstStyle/>
-          <a:p>
-            <a:pPr algn="ctr" indent="0" marL="0">
-              <a:buNone/>
-            </a:pPr>
-            <a:r>
-              <a:rPr lang="en-US" sz="1150" b="1" dirty="0">
-                <a:solidFill>
-                  <a:srgbClr val="FFFFFF"/>
-                </a:solidFill>
-                <a:latin typeface="Arial" pitchFamily="34" charset="0"/>
-                <a:ea typeface="Arial" pitchFamily="34" charset="-122"/>
-                <a:cs typeface="Arial" pitchFamily="34" charset="-120"/>
-              </a:rPr>
-              <a:t>CHAPTER 05</a:t>
-            </a:r>
-            <a:endParaRPr lang="en-US" sz="1150" dirty="0"/>
-          </a:p>
-        </p:txBody>
-      </p:sp>
       <p:pic>
         <p:nvPicPr>
-          <p:cNvPr id="7" name="Image 0" descr="/Users/danwahlin/.copilot/session-state/56a7a0da-def8-48d4-b5e8-0ac3878cb8dd/files/slides-build/icons/FaGithub-1F2328.png">
-            <a:hlinkClick r:id="rId2" tooltip="https://github.com/github/copilot-app-for-beginners/tree/main/05-mcp-plugins"/>
-          </p:cNvPr>
+          <p:cNvPr id="5" name="Image 0" descr="/Users/danwahlin/.copilot/session-state/56a7a0da-def8-48d4-b5e8-0ac3878cb8dd/files/slides-build/img/grad-corner.png">    </p:cNvPr>
           <p:cNvPicPr>
             <a:picLocks noChangeAspect="1"/>
           </p:cNvPicPr>
@@ -2643,6 +2460,103 @@
         </p:blipFill>
         <p:spPr>
           <a:xfrm>
+            <a:off x="6349901" y="0"/>
+            <a:ext cx="2793950" cy="1308050"/>
+          </a:xfrm>
+          <a:prstGeom prst="rect">
+            <a:avLst/>
+          </a:prstGeom>
+        </p:spPr>
+      </p:pic>
+      <p:sp>
+        <p:nvSpPr>
+          <p:cNvPr id="6" name="Text 3"/>
+          <p:cNvSpPr/>
+          <p:nvPr/>
+        </p:nvSpPr>
+        <p:spPr>
+          <a:xfrm>
+            <a:off x="7340501" y="177701"/>
+            <a:ext cx="1168301" cy="279350"/>
+          </a:xfrm>
+          <a:prstGeom prst="roundRect">
+            <a:avLst>
+              <a:gd name="adj" fmla="val 22731"/>
+            </a:avLst>
+          </a:prstGeom>
+          <a:solidFill>
+            <a:srgbClr val="1A7F37"/>
+          </a:solidFill>
+          <a:ln/>
+        </p:spPr>
+        <p:txBody>
+          <a:bodyPr wrap="square" rtlCol="0" anchor="ctr"/>
+          <a:lstStyle/>
+          <a:p>
+            <a:pPr indent="0" marL="0">
+              <a:buNone/>
+            </a:pPr>
+            <a:endParaRPr lang="en-US" dirty="0"/>
+          </a:p>
+        </p:txBody>
+      </p:sp>
+      <p:sp>
+        <p:nvSpPr>
+          <p:cNvPr id="7" name="Text 4"/>
+          <p:cNvSpPr/>
+          <p:nvPr/>
+        </p:nvSpPr>
+        <p:spPr>
+          <a:xfrm>
+            <a:off x="7461041" y="231577"/>
+            <a:ext cx="927071" cy="171450"/>
+          </a:xfrm>
+          <a:prstGeom prst="rect">
+            <a:avLst/>
+          </a:prstGeom>
+          <a:noFill/>
+          <a:ln/>
+        </p:spPr>
+        <p:txBody>
+          <a:bodyPr wrap="square" lIns="0" tIns="0" rIns="0" bIns="0" rtlCol="0" anchor="t"/>
+          <a:lstStyle/>
+          <a:p>
+            <a:pPr algn="ctr" indent="0" marL="0">
+              <a:buNone/>
+            </a:pPr>
+            <a:r>
+              <a:rPr lang="en-US" sz="1150" b="1" dirty="0">
+                <a:solidFill>
+                  <a:srgbClr val="FFFFFF"/>
+                </a:solidFill>
+                <a:latin typeface="Arial" pitchFamily="34" charset="0"/>
+                <a:ea typeface="Arial" pitchFamily="34" charset="-122"/>
+                <a:cs typeface="Arial" pitchFamily="34" charset="-120"/>
+              </a:rPr>
+              <a:t>CHAPTER 05</a:t>
+            </a:r>
+            <a:endParaRPr lang="en-US" sz="1150" dirty="0"/>
+          </a:p>
+        </p:txBody>
+      </p:sp>
+      <p:pic>
+        <p:nvPicPr>
+          <p:cNvPr id="8" name="Image 1" descr="/Users/danwahlin/.copilot/session-state/56a7a0da-def8-48d4-b5e8-0ac3878cb8dd/files/slides-build/icons/FaGithub-1F2328.png">
+            <a:hlinkClick r:id="rId3" tooltip="https://github.com/github/copilot-app-for-beginners/tree/main/05-mcp-plugins"/>
+          </p:cNvPr>
+          <p:cNvPicPr>
+            <a:picLocks noChangeAspect="1"/>
+          </p:cNvPicPr>
+          <p:nvPr/>
+        </p:nvPicPr>
+        <p:blipFill>
+          <a:blip r:embed="rId2"/>
+          <a:stretch>
+            <a:fillRect/>
+          </a:stretch>
+        </p:blipFill>
+        <p:spPr>
+          <a:xfrm>
             <a:off x="8610600" y="165050"/>
             <a:ext cx="304800" cy="304800"/>
           </a:xfrm>
@@ -2653,7 +2567,7 @@
       </p:pic>
       <p:sp>
         <p:nvSpPr>
-          <p:cNvPr id="8" name="Text 5"/>
+          <p:cNvPr id="9" name="Text 5"/>
           <p:cNvSpPr/>
           <p:nvPr/>
         </p:nvSpPr>
@@ -2692,7 +2606,7 @@
       </p:sp>
       <p:sp>
         <p:nvSpPr>
-          <p:cNvPr id="9" name="Text 6"/>
+          <p:cNvPr id="10" name="Text 6"/>
           <p:cNvSpPr/>
           <p:nvPr/>
         </p:nvSpPr>
@@ -2737,7 +2651,7 @@
       </p:sp>
       <p:sp>
         <p:nvSpPr>
-          <p:cNvPr id="10" name="Text 7"/>
+          <p:cNvPr id="11" name="Text 7"/>
           <p:cNvSpPr/>
           <p:nvPr/>
         </p:nvSpPr>
@@ -2769,7 +2683,7 @@
       </p:sp>
       <p:sp>
         <p:nvSpPr>
-          <p:cNvPr id="11" name="Text 8"/>
+          <p:cNvPr id="12" name="Text 8"/>
           <p:cNvSpPr/>
           <p:nvPr/>
         </p:nvSpPr>
@@ -2841,112 +2755,9 @@
           <a:chExt cx="0" cy="0"/>
         </a:xfrm>
       </p:grpSpPr>
-      <p:sp>
-        <p:nvSpPr>
-          <p:cNvPr id="2" name="Text 0"/>
-          <p:cNvSpPr/>
-          <p:nvPr/>
-        </p:nvSpPr>
-        <p:spPr>
-          <a:xfrm>
-            <a:off x="0" y="0"/>
-            <a:ext cx="9144000" cy="76200"/>
-          </a:xfrm>
-          <a:prstGeom prst="rect">
-            <a:avLst/>
-          </a:prstGeom>
-          <a:solidFill>
-            <a:srgbClr val="8250DF"/>
-          </a:solidFill>
-          <a:ln/>
-        </p:spPr>
-        <p:txBody>
-          <a:bodyPr wrap="square" rtlCol="0" anchor="ctr"/>
-          <a:lstStyle/>
-          <a:p>
-            <a:pPr indent="0" marL="0">
-              <a:buNone/>
-            </a:pPr>
-            <a:endParaRPr lang="en-US" dirty="0"/>
-          </a:p>
-        </p:txBody>
-      </p:sp>
-      <p:sp>
-        <p:nvSpPr>
-          <p:cNvPr id="3" name="Text 1"/>
-          <p:cNvSpPr/>
-          <p:nvPr/>
-        </p:nvSpPr>
-        <p:spPr>
-          <a:xfrm>
-            <a:off x="7340501" y="177701"/>
-            <a:ext cx="1168301" cy="279350"/>
-          </a:xfrm>
-          <a:prstGeom prst="roundRect">
-            <a:avLst>
-              <a:gd name="adj" fmla="val 22731"/>
-            </a:avLst>
-          </a:prstGeom>
-          <a:solidFill>
-            <a:srgbClr val="1A7F37"/>
-          </a:solidFill>
-          <a:ln/>
-        </p:spPr>
-        <p:txBody>
-          <a:bodyPr wrap="square" rtlCol="0" anchor="ctr"/>
-          <a:lstStyle/>
-          <a:p>
-            <a:pPr indent="0" marL="0">
-              <a:buNone/>
-            </a:pPr>
-            <a:endParaRPr lang="en-US" dirty="0"/>
-          </a:p>
-        </p:txBody>
-      </p:sp>
-      <p:sp>
-        <p:nvSpPr>
-          <p:cNvPr id="4" name="Text 2"/>
-          <p:cNvSpPr/>
-          <p:nvPr/>
-        </p:nvSpPr>
-        <p:spPr>
-          <a:xfrm>
-            <a:off x="7461041" y="231577"/>
-            <a:ext cx="927071" cy="171450"/>
-          </a:xfrm>
-          <a:prstGeom prst="rect">
-            <a:avLst/>
-          </a:prstGeom>
-          <a:noFill/>
-          <a:ln/>
-        </p:spPr>
-        <p:txBody>
-          <a:bodyPr wrap="square" lIns="0" tIns="0" rIns="0" bIns="0" rtlCol="0" anchor="t"/>
-          <a:lstStyle/>
-          <a:p>
-            <a:pPr algn="ctr" indent="0" marL="0">
-              <a:buNone/>
-            </a:pPr>
-            <a:r>
-              <a:rPr lang="en-US" sz="1150" b="1" dirty="0">
-                <a:solidFill>
-                  <a:srgbClr val="FFFFFF"/>
-                </a:solidFill>
-                <a:latin typeface="Arial" pitchFamily="34" charset="0"/>
-                <a:ea typeface="Arial" pitchFamily="34" charset="-122"/>
-                <a:cs typeface="Arial" pitchFamily="34" charset="-120"/>
-              </a:rPr>
-              <a:t>CHAPTER 05</a:t>
-            </a:r>
-            <a:endParaRPr lang="en-US" sz="1150" dirty="0"/>
-          </a:p>
-        </p:txBody>
-      </p:sp>
       <p:pic>
         <p:nvPicPr>
-          <p:cNvPr id="5" name="Image 0" descr="/Users/danwahlin/.copilot/session-state/56a7a0da-def8-48d4-b5e8-0ac3878cb8dd/files/slides-build/icons/FaGithub-1F2328.png">
-            <a:hlinkClick r:id="rId2" tooltip="https://github.com/github/copilot-app-for-beginners/tree/main/05-mcp-plugins"/>
-          </p:cNvPr>
+          <p:cNvPr id="2" name="Image 0" descr="/Users/danwahlin/.copilot/session-state/56a7a0da-def8-48d4-b5e8-0ac3878cb8dd/files/slides-build/img/grad-corner.png">    </p:cNvPr>
           <p:cNvPicPr>
             <a:picLocks noChangeAspect="1"/>
           </p:cNvPicPr>
@@ -2960,6 +2771,103 @@
         </p:blipFill>
         <p:spPr>
           <a:xfrm>
+            <a:off x="6349901" y="0"/>
+            <a:ext cx="2793950" cy="1308050"/>
+          </a:xfrm>
+          <a:prstGeom prst="rect">
+            <a:avLst/>
+          </a:prstGeom>
+        </p:spPr>
+      </p:pic>
+      <p:sp>
+        <p:nvSpPr>
+          <p:cNvPr id="3" name="Text 0"/>
+          <p:cNvSpPr/>
+          <p:nvPr/>
+        </p:nvSpPr>
+        <p:spPr>
+          <a:xfrm>
+            <a:off x="7340501" y="177701"/>
+            <a:ext cx="1168301" cy="279350"/>
+          </a:xfrm>
+          <a:prstGeom prst="roundRect">
+            <a:avLst>
+              <a:gd name="adj" fmla="val 22731"/>
+            </a:avLst>
+          </a:prstGeom>
+          <a:solidFill>
+            <a:srgbClr val="1A7F37"/>
+          </a:solidFill>
+          <a:ln/>
+        </p:spPr>
+        <p:txBody>
+          <a:bodyPr wrap="square" rtlCol="0" anchor="ctr"/>
+          <a:lstStyle/>
+          <a:p>
+            <a:pPr indent="0" marL="0">
+              <a:buNone/>
+            </a:pPr>
+            <a:endParaRPr lang="en-US" dirty="0"/>
+          </a:p>
+        </p:txBody>
+      </p:sp>
+      <p:sp>
+        <p:nvSpPr>
+          <p:cNvPr id="4" name="Text 1"/>
+          <p:cNvSpPr/>
+          <p:nvPr/>
+        </p:nvSpPr>
+        <p:spPr>
+          <a:xfrm>
+            <a:off x="7461041" y="231577"/>
+            <a:ext cx="927071" cy="171450"/>
+          </a:xfrm>
+          <a:prstGeom prst="rect">
+            <a:avLst/>
+          </a:prstGeom>
+          <a:noFill/>
+          <a:ln/>
+        </p:spPr>
+        <p:txBody>
+          <a:bodyPr wrap="square" lIns="0" tIns="0" rIns="0" bIns="0" rtlCol="0" anchor="t"/>
+          <a:lstStyle/>
+          <a:p>
+            <a:pPr algn="ctr" indent="0" marL="0">
+              <a:buNone/>
+            </a:pPr>
+            <a:r>
+              <a:rPr lang="en-US" sz="1150" b="1" dirty="0">
+                <a:solidFill>
+                  <a:srgbClr val="FFFFFF"/>
+                </a:solidFill>
+                <a:latin typeface="Arial" pitchFamily="34" charset="0"/>
+                <a:ea typeface="Arial" pitchFamily="34" charset="-122"/>
+                <a:cs typeface="Arial" pitchFamily="34" charset="-120"/>
+              </a:rPr>
+              <a:t>CHAPTER 05</a:t>
+            </a:r>
+            <a:endParaRPr lang="en-US" sz="1150" dirty="0"/>
+          </a:p>
+        </p:txBody>
+      </p:sp>
+      <p:pic>
+        <p:nvPicPr>
+          <p:cNvPr id="5" name="Image 1" descr="/Users/danwahlin/.copilot/session-state/56a7a0da-def8-48d4-b5e8-0ac3878cb8dd/files/slides-build/icons/FaGithub-1F2328.png">
+            <a:hlinkClick r:id="rId3" tooltip="https://github.com/github/copilot-app-for-beginners/tree/main/05-mcp-plugins"/>
+          </p:cNvPr>
+          <p:cNvPicPr>
+            <a:picLocks noChangeAspect="1"/>
+          </p:cNvPicPr>
+          <p:nvPr/>
+        </p:nvPicPr>
+        <p:blipFill>
+          <a:blip r:embed="rId2"/>
+          <a:stretch>
+            <a:fillRect/>
+          </a:stretch>
+        </p:blipFill>
+        <p:spPr>
+          <a:xfrm>
             <a:off x="8610600" y="165050"/>
             <a:ext cx="304800" cy="304800"/>
           </a:xfrm>
@@ -2970,7 +2878,7 @@
       </p:pic>
       <p:sp>
         <p:nvSpPr>
-          <p:cNvPr id="6" name="Text 3"/>
+          <p:cNvPr id="6" name="Text 2"/>
           <p:cNvSpPr/>
           <p:nvPr/>
         </p:nvSpPr>
@@ -3009,7 +2917,7 @@
       </p:sp>
       <p:sp>
         <p:nvSpPr>
-          <p:cNvPr id="7" name="Text 4"/>
+          <p:cNvPr id="7" name="Text 3"/>
           <p:cNvSpPr/>
           <p:nvPr/>
         </p:nvSpPr>
@@ -3054,7 +2962,7 @@
       </p:sp>
       <p:sp>
         <p:nvSpPr>
-          <p:cNvPr id="8" name="Text 5"/>
+          <p:cNvPr id="8" name="Text 4"/>
           <p:cNvSpPr/>
           <p:nvPr/>
         </p:nvSpPr>
@@ -3099,7 +3007,7 @@
       </p:sp>
       <p:sp>
         <p:nvSpPr>
-          <p:cNvPr id="9" name="Text 6"/>
+          <p:cNvPr id="9" name="Text 5"/>
           <p:cNvSpPr/>
           <p:nvPr/>
         </p:nvSpPr>
@@ -3142,14 +3050,14 @@
       </p:sp>
       <p:pic>
         <p:nvPicPr>
-          <p:cNvPr id="10" name="Image 1" descr="/Users/danwahlin/.copilot/session-state/56a7a0da-def8-48d4-b5e8-0ac3878cb8dd/files/slides-build/img/05-plugins-crop.png">    </p:cNvPr>
+          <p:cNvPr id="10" name="Image 2" descr="/Users/danwahlin/.copilot/session-state/56a7a0da-def8-48d4-b5e8-0ac3878cb8dd/files/slides-build/img/05-plugins-crop.png">    </p:cNvPr>
           <p:cNvPicPr>
             <a:picLocks noChangeAspect="1"/>
           </p:cNvPicPr>
           <p:nvPr/>
         </p:nvPicPr>
         <p:blipFill>
-          <a:blip r:embed="rId3"/>
+          <a:blip r:embed="rId4"/>
           <a:stretch>
             <a:fillRect/>
           </a:stretch>
@@ -3166,7 +3074,7 @@
       </p:pic>
       <p:sp>
         <p:nvSpPr>
-          <p:cNvPr id="11" name="Text 7"/>
+          <p:cNvPr id="11" name="Text 6"/>
           <p:cNvSpPr/>
           <p:nvPr/>
         </p:nvSpPr>
@@ -3202,7 +3110,7 @@
       </p:sp>
       <p:sp>
         <p:nvSpPr>
-          <p:cNvPr id="12" name="Text 8"/>
+          <p:cNvPr id="12" name="Text 7"/>
           <p:cNvSpPr/>
           <p:nvPr/>
         </p:nvSpPr>
@@ -3234,7 +3142,7 @@
       </p:sp>
       <p:sp>
         <p:nvSpPr>
-          <p:cNvPr id="13" name="Text 9"/>
+          <p:cNvPr id="13" name="Text 8"/>
           <p:cNvSpPr/>
           <p:nvPr/>
         </p:nvSpPr>
@@ -3273,7 +3181,7 @@
       </p:sp>
       <p:sp>
         <p:nvSpPr>
-          <p:cNvPr id="14" name="Text 10"/>
+          <p:cNvPr id="14" name="Text 9"/>
           <p:cNvSpPr/>
           <p:nvPr/>
         </p:nvSpPr>
@@ -3315,7 +3223,7 @@
       </p:sp>
       <p:sp>
         <p:nvSpPr>
-          <p:cNvPr id="15" name="Text 11"/>
+          <p:cNvPr id="15" name="Text 10"/>
           <p:cNvSpPr/>
           <p:nvPr/>
         </p:nvSpPr>
@@ -3391,7 +3299,7 @@
       </p:sp>
       <p:sp>
         <p:nvSpPr>
-          <p:cNvPr id="16" name="Text 12"/>
+          <p:cNvPr id="16" name="Text 11"/>
           <p:cNvSpPr/>
           <p:nvPr/>
         </p:nvSpPr>
@@ -3427,7 +3335,7 @@
       </p:sp>
       <p:sp>
         <p:nvSpPr>
-          <p:cNvPr id="17" name="Text 13"/>
+          <p:cNvPr id="17" name="Text 12"/>
           <p:cNvSpPr/>
           <p:nvPr/>
         </p:nvSpPr>
@@ -3459,7 +3367,7 @@
       </p:sp>
       <p:sp>
         <p:nvSpPr>
-          <p:cNvPr id="18" name="Text 14"/>
+          <p:cNvPr id="18" name="Text 13"/>
           <p:cNvSpPr/>
           <p:nvPr/>
         </p:nvSpPr>
@@ -3498,7 +3406,7 @@
       </p:sp>
       <p:sp>
         <p:nvSpPr>
-          <p:cNvPr id="19" name="Text 15"/>
+          <p:cNvPr id="19" name="Text 14"/>
           <p:cNvSpPr/>
           <p:nvPr/>
         </p:nvSpPr>
@@ -3540,7 +3448,7 @@
       </p:sp>
       <p:sp>
         <p:nvSpPr>
-          <p:cNvPr id="20" name="Text 16"/>
+          <p:cNvPr id="20" name="Text 15"/>
           <p:cNvSpPr/>
           <p:nvPr/>
         </p:nvSpPr>
@@ -3582,7 +3490,7 @@
       </p:sp>
       <p:sp>
         <p:nvSpPr>
-          <p:cNvPr id="21" name="Text 17"/>
+          <p:cNvPr id="21" name="Text 16"/>
           <p:cNvSpPr/>
           <p:nvPr/>
         </p:nvSpPr>
@@ -3618,7 +3526,7 @@
       </p:sp>
       <p:sp>
         <p:nvSpPr>
-          <p:cNvPr id="22" name="Text 18"/>
+          <p:cNvPr id="22" name="Text 17"/>
           <p:cNvSpPr/>
           <p:nvPr/>
         </p:nvSpPr>
@@ -3650,7 +3558,7 @@
       </p:sp>
       <p:sp>
         <p:nvSpPr>
-          <p:cNvPr id="23" name="Text 19"/>
+          <p:cNvPr id="23" name="Text 18"/>
           <p:cNvSpPr/>
           <p:nvPr/>
         </p:nvSpPr>
@@ -3689,7 +3597,7 @@
       </p:sp>
       <p:sp>
         <p:nvSpPr>
-          <p:cNvPr id="24" name="Text 20"/>
+          <p:cNvPr id="24" name="Text 19"/>
           <p:cNvSpPr/>
           <p:nvPr/>
         </p:nvSpPr>
@@ -3731,7 +3639,7 @@
       </p:sp>
       <p:sp>
         <p:nvSpPr>
-          <p:cNvPr id="25" name="Text 21"/>
+          <p:cNvPr id="25" name="Text 20"/>
           <p:cNvSpPr/>
           <p:nvPr/>
         </p:nvSpPr>
@@ -3837,112 +3745,9 @@
           <a:chExt cx="0" cy="0"/>
         </a:xfrm>
       </p:grpSpPr>
-      <p:sp>
-        <p:nvSpPr>
-          <p:cNvPr id="2" name="Text 0"/>
-          <p:cNvSpPr/>
-          <p:nvPr/>
-        </p:nvSpPr>
-        <p:spPr>
-          <a:xfrm>
-            <a:off x="0" y="0"/>
-            <a:ext cx="9144000" cy="76200"/>
-          </a:xfrm>
-          <a:prstGeom prst="rect">
-            <a:avLst/>
-          </a:prstGeom>
-          <a:solidFill>
-            <a:srgbClr val="8250DF"/>
-          </a:solidFill>
-          <a:ln/>
-        </p:spPr>
-        <p:txBody>
-          <a:bodyPr wrap="square" rtlCol="0" anchor="ctr"/>
-          <a:lstStyle/>
-          <a:p>
-            <a:pPr indent="0" marL="0">
-              <a:buNone/>
-            </a:pPr>
-            <a:endParaRPr lang="en-US" dirty="0"/>
-          </a:p>
-        </p:txBody>
-      </p:sp>
-      <p:sp>
-        <p:nvSpPr>
-          <p:cNvPr id="3" name="Text 1"/>
-          <p:cNvSpPr/>
-          <p:nvPr/>
-        </p:nvSpPr>
-        <p:spPr>
-          <a:xfrm>
-            <a:off x="7340501" y="177701"/>
-            <a:ext cx="1168301" cy="279350"/>
-          </a:xfrm>
-          <a:prstGeom prst="roundRect">
-            <a:avLst>
-              <a:gd name="adj" fmla="val 22731"/>
-            </a:avLst>
-          </a:prstGeom>
-          <a:solidFill>
-            <a:srgbClr val="1A7F37"/>
-          </a:solidFill>
-          <a:ln/>
-        </p:spPr>
-        <p:txBody>
-          <a:bodyPr wrap="square" rtlCol="0" anchor="ctr"/>
-          <a:lstStyle/>
-          <a:p>
-            <a:pPr indent="0" marL="0">
-              <a:buNone/>
-            </a:pPr>
-            <a:endParaRPr lang="en-US" dirty="0"/>
-          </a:p>
-        </p:txBody>
-      </p:sp>
-      <p:sp>
-        <p:nvSpPr>
-          <p:cNvPr id="4" name="Text 2"/>
-          <p:cNvSpPr/>
-          <p:nvPr/>
-        </p:nvSpPr>
-        <p:spPr>
-          <a:xfrm>
-            <a:off x="7461041" y="231577"/>
-            <a:ext cx="927071" cy="171450"/>
-          </a:xfrm>
-          <a:prstGeom prst="rect">
-            <a:avLst/>
-          </a:prstGeom>
-          <a:noFill/>
-          <a:ln/>
-        </p:spPr>
-        <p:txBody>
-          <a:bodyPr wrap="square" lIns="0" tIns="0" rIns="0" bIns="0" rtlCol="0" anchor="t"/>
-          <a:lstStyle/>
-          <a:p>
-            <a:pPr algn="ctr" indent="0" marL="0">
-              <a:buNone/>
-            </a:pPr>
-            <a:r>
-              <a:rPr lang="en-US" sz="1150" b="1" dirty="0">
-                <a:solidFill>
-                  <a:srgbClr val="FFFFFF"/>
-                </a:solidFill>
-                <a:latin typeface="Arial" pitchFamily="34" charset="0"/>
-                <a:ea typeface="Arial" pitchFamily="34" charset="-122"/>
-                <a:cs typeface="Arial" pitchFamily="34" charset="-120"/>
-              </a:rPr>
-              <a:t>CHAPTER 05</a:t>
-            </a:r>
-            <a:endParaRPr lang="en-US" sz="1150" dirty="0"/>
-          </a:p>
-        </p:txBody>
-      </p:sp>
       <p:pic>
         <p:nvPicPr>
-          <p:cNvPr id="5" name="Image 0" descr="/Users/danwahlin/.copilot/session-state/56a7a0da-def8-48d4-b5e8-0ac3878cb8dd/files/slides-build/icons/FaGithub-1F2328.png">
-            <a:hlinkClick r:id="rId2" tooltip="https://github.com/github/copilot-app-for-beginners/tree/main/05-mcp-plugins"/>
-          </p:cNvPr>
+          <p:cNvPr id="2" name="Image 0" descr="/Users/danwahlin/.copilot/session-state/56a7a0da-def8-48d4-b5e8-0ac3878cb8dd/files/slides-build/img/grad-corner.png">    </p:cNvPr>
           <p:cNvPicPr>
             <a:picLocks noChangeAspect="1"/>
           </p:cNvPicPr>
@@ -3956,6 +3761,103 @@
         </p:blipFill>
         <p:spPr>
           <a:xfrm>
+            <a:off x="6349901" y="0"/>
+            <a:ext cx="2793950" cy="1308050"/>
+          </a:xfrm>
+          <a:prstGeom prst="rect">
+            <a:avLst/>
+          </a:prstGeom>
+        </p:spPr>
+      </p:pic>
+      <p:sp>
+        <p:nvSpPr>
+          <p:cNvPr id="3" name="Text 0"/>
+          <p:cNvSpPr/>
+          <p:nvPr/>
+        </p:nvSpPr>
+        <p:spPr>
+          <a:xfrm>
+            <a:off x="7340501" y="177701"/>
+            <a:ext cx="1168301" cy="279350"/>
+          </a:xfrm>
+          <a:prstGeom prst="roundRect">
+            <a:avLst>
+              <a:gd name="adj" fmla="val 22731"/>
+            </a:avLst>
+          </a:prstGeom>
+          <a:solidFill>
+            <a:srgbClr val="1A7F37"/>
+          </a:solidFill>
+          <a:ln/>
+        </p:spPr>
+        <p:txBody>
+          <a:bodyPr wrap="square" rtlCol="0" anchor="ctr"/>
+          <a:lstStyle/>
+          <a:p>
+            <a:pPr indent="0" marL="0">
+              <a:buNone/>
+            </a:pPr>
+            <a:endParaRPr lang="en-US" dirty="0"/>
+          </a:p>
+        </p:txBody>
+      </p:sp>
+      <p:sp>
+        <p:nvSpPr>
+          <p:cNvPr id="4" name="Text 1"/>
+          <p:cNvSpPr/>
+          <p:nvPr/>
+        </p:nvSpPr>
+        <p:spPr>
+          <a:xfrm>
+            <a:off x="7461041" y="231577"/>
+            <a:ext cx="927071" cy="171450"/>
+          </a:xfrm>
+          <a:prstGeom prst="rect">
+            <a:avLst/>
+          </a:prstGeom>
+          <a:noFill/>
+          <a:ln/>
+        </p:spPr>
+        <p:txBody>
+          <a:bodyPr wrap="square" lIns="0" tIns="0" rIns="0" bIns="0" rtlCol="0" anchor="t"/>
+          <a:lstStyle/>
+          <a:p>
+            <a:pPr algn="ctr" indent="0" marL="0">
+              <a:buNone/>
+            </a:pPr>
+            <a:r>
+              <a:rPr lang="en-US" sz="1150" b="1" dirty="0">
+                <a:solidFill>
+                  <a:srgbClr val="FFFFFF"/>
+                </a:solidFill>
+                <a:latin typeface="Arial" pitchFamily="34" charset="0"/>
+                <a:ea typeface="Arial" pitchFamily="34" charset="-122"/>
+                <a:cs typeface="Arial" pitchFamily="34" charset="-120"/>
+              </a:rPr>
+              <a:t>CHAPTER 05</a:t>
+            </a:r>
+            <a:endParaRPr lang="en-US" sz="1150" dirty="0"/>
+          </a:p>
+        </p:txBody>
+      </p:sp>
+      <p:pic>
+        <p:nvPicPr>
+          <p:cNvPr id="5" name="Image 1" descr="/Users/danwahlin/.copilot/session-state/56a7a0da-def8-48d4-b5e8-0ac3878cb8dd/files/slides-build/icons/FaGithub-1F2328.png">
+            <a:hlinkClick r:id="rId3" tooltip="https://github.com/github/copilot-app-for-beginners/tree/main/05-mcp-plugins"/>
+          </p:cNvPr>
+          <p:cNvPicPr>
+            <a:picLocks noChangeAspect="1"/>
+          </p:cNvPicPr>
+          <p:nvPr/>
+        </p:nvPicPr>
+        <p:blipFill>
+          <a:blip r:embed="rId2"/>
+          <a:stretch>
+            <a:fillRect/>
+          </a:stretch>
+        </p:blipFill>
+        <p:spPr>
+          <a:xfrm>
             <a:off x="8610600" y="165050"/>
             <a:ext cx="304800" cy="304800"/>
           </a:xfrm>
@@ -3966,7 +3868,7 @@
       </p:pic>
       <p:sp>
         <p:nvSpPr>
-          <p:cNvPr id="6" name="Text 3"/>
+          <p:cNvPr id="6" name="Text 2"/>
           <p:cNvSpPr/>
           <p:nvPr/>
         </p:nvSpPr>
@@ -4005,7 +3907,7 @@
       </p:sp>
       <p:sp>
         <p:nvSpPr>
-          <p:cNvPr id="7" name="Text 4"/>
+          <p:cNvPr id="7" name="Text 3"/>
           <p:cNvSpPr/>
           <p:nvPr/>
         </p:nvSpPr>
@@ -4050,7 +3952,7 @@
       </p:sp>
       <p:sp>
         <p:nvSpPr>
-          <p:cNvPr id="8" name="Text 5"/>
+          <p:cNvPr id="8" name="Text 4"/>
           <p:cNvSpPr/>
           <p:nvPr/>
         </p:nvSpPr>
@@ -4175,7 +4077,7 @@
       </p:sp>
       <p:sp>
         <p:nvSpPr>
-          <p:cNvPr id="9" name="Text 6"/>
+          <p:cNvPr id="9" name="Text 5"/>
           <p:cNvSpPr/>
           <p:nvPr/>
         </p:nvSpPr>
@@ -4207,7 +4109,7 @@
       </p:sp>
       <p:sp>
         <p:nvSpPr>
-          <p:cNvPr id="10" name="Shape 7"/>
+          <p:cNvPr id="10" name="Shape 6"/>
           <p:cNvSpPr/>
           <p:nvPr/>
         </p:nvSpPr>
@@ -4230,7 +4132,7 @@
       </p:sp>
       <p:sp>
         <p:nvSpPr>
-          <p:cNvPr id="11" name="Shape 8"/>
+          <p:cNvPr id="11" name="Shape 7"/>
           <p:cNvSpPr/>
           <p:nvPr/>
         </p:nvSpPr>
@@ -4253,7 +4155,7 @@
       </p:sp>
       <p:sp>
         <p:nvSpPr>
-          <p:cNvPr id="12" name="Shape 9"/>
+          <p:cNvPr id="12" name="Shape 8"/>
           <p:cNvSpPr/>
           <p:nvPr/>
         </p:nvSpPr>
@@ -4276,7 +4178,7 @@
       </p:sp>
       <p:sp>
         <p:nvSpPr>
-          <p:cNvPr id="13" name="Shape 10"/>
+          <p:cNvPr id="13" name="Shape 9"/>
           <p:cNvSpPr/>
           <p:nvPr/>
         </p:nvSpPr>
@@ -4299,14 +4201,14 @@
       </p:sp>
       <p:pic>
         <p:nvPicPr>
-          <p:cNvPr id="14" name="Image 1" descr="/Users/danwahlin/.copilot/session-state/56a7a0da-def8-48d4-b5e8-0ac3878cb8dd/files/slides-build/icons/GoCopilot-8250DF.png">    </p:cNvPr>
+          <p:cNvPr id="14" name="Image 2" descr="/Users/danwahlin/.copilot/session-state/56a7a0da-def8-48d4-b5e8-0ac3878cb8dd/files/slides-build/icons/GoCopilot-8250DF.png">    </p:cNvPr>
           <p:cNvPicPr>
             <a:picLocks noChangeAspect="1"/>
           </p:cNvPicPr>
           <p:nvPr/>
         </p:nvPicPr>
         <p:blipFill>
-          <a:blip r:embed="rId3"/>
+          <a:blip r:embed="rId4"/>
           <a:stretch>
             <a:fillRect/>
           </a:stretch>
@@ -4323,7 +4225,7 @@
       </p:pic>
       <p:sp>
         <p:nvSpPr>
-          <p:cNvPr id="15" name="Text 11"/>
+          <p:cNvPr id="15" name="Text 10"/>
           <p:cNvSpPr/>
           <p:nvPr/>
         </p:nvSpPr>
@@ -4362,7 +4264,7 @@
       </p:sp>
       <p:sp>
         <p:nvSpPr>
-          <p:cNvPr id="16" name="Text 12"/>
+          <p:cNvPr id="16" name="Text 11"/>
           <p:cNvSpPr/>
           <p:nvPr/>
         </p:nvSpPr>
@@ -4404,7 +4306,7 @@
       </p:sp>
       <p:sp>
         <p:nvSpPr>
-          <p:cNvPr id="17" name="Text 13"/>
+          <p:cNvPr id="17" name="Text 12"/>
           <p:cNvSpPr/>
           <p:nvPr/>
         </p:nvSpPr>
@@ -4446,7 +4348,7 @@
       </p:sp>
       <p:sp>
         <p:nvSpPr>
-          <p:cNvPr id="18" name="Text 14"/>
+          <p:cNvPr id="18" name="Text 13"/>
           <p:cNvSpPr/>
           <p:nvPr/>
         </p:nvSpPr>
@@ -4482,7 +4384,7 @@
       </p:sp>
       <p:sp>
         <p:nvSpPr>
-          <p:cNvPr id="19" name="Text 15"/>
+          <p:cNvPr id="19" name="Text 14"/>
           <p:cNvSpPr/>
           <p:nvPr/>
         </p:nvSpPr>
@@ -4514,14 +4416,14 @@
       </p:sp>
       <p:pic>
         <p:nvPicPr>
-          <p:cNvPr id="20" name="Image 2" descr="/Users/danwahlin/.copilot/session-state/56a7a0da-def8-48d4-b5e8-0ac3878cb8dd/files/slides-build/icons/GoCheckCircle-1A7F37.png">    </p:cNvPr>
+          <p:cNvPr id="20" name="Image 3" descr="/Users/danwahlin/.copilot/session-state/56a7a0da-def8-48d4-b5e8-0ac3878cb8dd/files/slides-build/icons/GoCheckCircle-1A7F37.png">    </p:cNvPr>
           <p:cNvPicPr>
             <a:picLocks noChangeAspect="1"/>
           </p:cNvPicPr>
           <p:nvPr/>
         </p:nvPicPr>
         <p:blipFill>
-          <a:blip r:embed="rId4"/>
+          <a:blip r:embed="rId5"/>
           <a:stretch>
             <a:fillRect/>
           </a:stretch>
@@ -4538,7 +4440,7 @@
       </p:pic>
       <p:sp>
         <p:nvSpPr>
-          <p:cNvPr id="21" name="Text 16"/>
+          <p:cNvPr id="21" name="Text 15"/>
           <p:cNvSpPr/>
           <p:nvPr/>
         </p:nvSpPr>
@@ -4580,7 +4482,7 @@
       </p:sp>
       <p:sp>
         <p:nvSpPr>
-          <p:cNvPr id="22" name="Text 17"/>
+          <p:cNvPr id="22" name="Text 16"/>
           <p:cNvSpPr/>
           <p:nvPr/>
         </p:nvSpPr>
@@ -4612,7 +4514,7 @@
       </p:sp>
       <p:sp>
         <p:nvSpPr>
-          <p:cNvPr id="23" name="Text 18"/>
+          <p:cNvPr id="23" name="Text 17"/>
           <p:cNvSpPr/>
           <p:nvPr/>
         </p:nvSpPr>
@@ -4654,7 +4556,7 @@
       </p:sp>
       <p:sp>
         <p:nvSpPr>
-          <p:cNvPr id="24" name="Text 19"/>
+          <p:cNvPr id="24" name="Text 18"/>
           <p:cNvSpPr/>
           <p:nvPr/>
         </p:nvSpPr>
@@ -4686,7 +4588,7 @@
       </p:sp>
       <p:sp>
         <p:nvSpPr>
-          <p:cNvPr id="25" name="Text 20"/>
+          <p:cNvPr id="25" name="Text 19"/>
           <p:cNvSpPr/>
           <p:nvPr/>
         </p:nvSpPr>
@@ -4728,7 +4630,7 @@
       </p:sp>
       <p:sp>
         <p:nvSpPr>
-          <p:cNvPr id="26" name="Text 21"/>
+          <p:cNvPr id="26" name="Text 20"/>
           <p:cNvSpPr/>
           <p:nvPr/>
         </p:nvSpPr>
@@ -4760,7 +4662,7 @@
       </p:sp>
       <p:sp>
         <p:nvSpPr>
-          <p:cNvPr id="27" name="Text 22"/>
+          <p:cNvPr id="27" name="Text 21"/>
           <p:cNvSpPr/>
           <p:nvPr/>
         </p:nvSpPr>
@@ -4802,7 +4704,7 @@
       </p:sp>
       <p:sp>
         <p:nvSpPr>
-          <p:cNvPr id="28" name="Text 23"/>
+          <p:cNvPr id="28" name="Text 22"/>
           <p:cNvSpPr/>
           <p:nvPr/>
         </p:nvSpPr>
@@ -4838,14 +4740,14 @@
       </p:sp>
       <p:pic>
         <p:nvPicPr>
-          <p:cNvPr id="29" name="Image 3" descr="/Users/danwahlin/.copilot/session-state/56a7a0da-def8-48d4-b5e8-0ac3878cb8dd/files/slides-build/icons/GoInfo-0969DA.png">    </p:cNvPr>
+          <p:cNvPr id="29" name="Image 4" descr="/Users/danwahlin/.copilot/session-state/56a7a0da-def8-48d4-b5e8-0ac3878cb8dd/files/slides-build/icons/GoInfo-0969DA.png">    </p:cNvPr>
           <p:cNvPicPr>
             <a:picLocks noChangeAspect="1"/>
           </p:cNvPicPr>
           <p:nvPr/>
         </p:nvPicPr>
         <p:blipFill>
-          <a:blip r:embed="rId5"/>
+          <a:blip r:embed="rId6"/>
           <a:stretch>
             <a:fillRect/>
           </a:stretch>
@@ -4862,7 +4764,7 @@
       </p:pic>
       <p:sp>
         <p:nvSpPr>
-          <p:cNvPr id="30" name="Text 24"/>
+          <p:cNvPr id="30" name="Text 23"/>
           <p:cNvSpPr/>
           <p:nvPr/>
         </p:nvSpPr>
@@ -4968,112 +4870,9 @@
           <a:chExt cx="0" cy="0"/>
         </a:xfrm>
       </p:grpSpPr>
-      <p:sp>
-        <p:nvSpPr>
-          <p:cNvPr id="2" name="Text 0"/>
-          <p:cNvSpPr/>
-          <p:nvPr/>
-        </p:nvSpPr>
-        <p:spPr>
-          <a:xfrm>
-            <a:off x="0" y="0"/>
-            <a:ext cx="9144000" cy="76200"/>
-          </a:xfrm>
-          <a:prstGeom prst="rect">
-            <a:avLst/>
-          </a:prstGeom>
-          <a:solidFill>
-            <a:srgbClr val="BC4C00"/>
-          </a:solidFill>
-          <a:ln/>
-        </p:spPr>
-        <p:txBody>
-          <a:bodyPr wrap="square" rtlCol="0" anchor="ctr"/>
-          <a:lstStyle/>
-          <a:p>
-            <a:pPr indent="0" marL="0">
-              <a:buNone/>
-            </a:pPr>
-            <a:endParaRPr lang="en-US" dirty="0"/>
-          </a:p>
-        </p:txBody>
-      </p:sp>
-      <p:sp>
-        <p:nvSpPr>
-          <p:cNvPr id="3" name="Text 1"/>
-          <p:cNvSpPr/>
-          <p:nvPr/>
-        </p:nvSpPr>
-        <p:spPr>
-          <a:xfrm>
-            <a:off x="7340501" y="177701"/>
-            <a:ext cx="1168301" cy="279350"/>
-          </a:xfrm>
-          <a:prstGeom prst="roundRect">
-            <a:avLst>
-              <a:gd name="adj" fmla="val 22731"/>
-            </a:avLst>
-          </a:prstGeom>
-          <a:solidFill>
-            <a:srgbClr val="1A7F37"/>
-          </a:solidFill>
-          <a:ln/>
-        </p:spPr>
-        <p:txBody>
-          <a:bodyPr wrap="square" rtlCol="0" anchor="ctr"/>
-          <a:lstStyle/>
-          <a:p>
-            <a:pPr indent="0" marL="0">
-              <a:buNone/>
-            </a:pPr>
-            <a:endParaRPr lang="en-US" dirty="0"/>
-          </a:p>
-        </p:txBody>
-      </p:sp>
-      <p:sp>
-        <p:nvSpPr>
-          <p:cNvPr id="4" name="Text 2"/>
-          <p:cNvSpPr/>
-          <p:nvPr/>
-        </p:nvSpPr>
-        <p:spPr>
-          <a:xfrm>
-            <a:off x="7461041" y="231577"/>
-            <a:ext cx="927071" cy="171450"/>
-          </a:xfrm>
-          <a:prstGeom prst="rect">
-            <a:avLst/>
-          </a:prstGeom>
-          <a:noFill/>
-          <a:ln/>
-        </p:spPr>
-        <p:txBody>
-          <a:bodyPr wrap="square" lIns="0" tIns="0" rIns="0" bIns="0" rtlCol="0" anchor="t"/>
-          <a:lstStyle/>
-          <a:p>
-            <a:pPr algn="ctr" indent="0" marL="0">
-              <a:buNone/>
-            </a:pPr>
-            <a:r>
-              <a:rPr lang="en-US" sz="1150" b="1" dirty="0">
-                <a:solidFill>
-                  <a:srgbClr val="FFFFFF"/>
-                </a:solidFill>
-                <a:latin typeface="Arial" pitchFamily="34" charset="0"/>
-                <a:ea typeface="Arial" pitchFamily="34" charset="-122"/>
-                <a:cs typeface="Arial" pitchFamily="34" charset="-120"/>
-              </a:rPr>
-              <a:t>CHAPTER 05</a:t>
-            </a:r>
-            <a:endParaRPr lang="en-US" sz="1150" dirty="0"/>
-          </a:p>
-        </p:txBody>
-      </p:sp>
       <p:pic>
         <p:nvPicPr>
-          <p:cNvPr id="5" name="Image 0" descr="/Users/danwahlin/.copilot/session-state/56a7a0da-def8-48d4-b5e8-0ac3878cb8dd/files/slides-build/icons/FaGithub-1F2328.png">
-            <a:hlinkClick r:id="rId2" tooltip="https://github.com/github/copilot-app-for-beginners/tree/main/05-mcp-plugins"/>
-          </p:cNvPr>
+          <p:cNvPr id="2" name="Image 0" descr="/Users/danwahlin/.copilot/session-state/56a7a0da-def8-48d4-b5e8-0ac3878cb8dd/files/slides-build/img/grad-corner.png">    </p:cNvPr>
           <p:cNvPicPr>
             <a:picLocks noChangeAspect="1"/>
           </p:cNvPicPr>
@@ -5087,6 +4886,103 @@
         </p:blipFill>
         <p:spPr>
           <a:xfrm>
+            <a:off x="6349901" y="0"/>
+            <a:ext cx="2793950" cy="1308050"/>
+          </a:xfrm>
+          <a:prstGeom prst="rect">
+            <a:avLst/>
+          </a:prstGeom>
+        </p:spPr>
+      </p:pic>
+      <p:sp>
+        <p:nvSpPr>
+          <p:cNvPr id="3" name="Text 0"/>
+          <p:cNvSpPr/>
+          <p:nvPr/>
+        </p:nvSpPr>
+        <p:spPr>
+          <a:xfrm>
+            <a:off x="7340501" y="177701"/>
+            <a:ext cx="1168301" cy="279350"/>
+          </a:xfrm>
+          <a:prstGeom prst="roundRect">
+            <a:avLst>
+              <a:gd name="adj" fmla="val 22731"/>
+            </a:avLst>
+          </a:prstGeom>
+          <a:solidFill>
+            <a:srgbClr val="1A7F37"/>
+          </a:solidFill>
+          <a:ln/>
+        </p:spPr>
+        <p:txBody>
+          <a:bodyPr wrap="square" rtlCol="0" anchor="ctr"/>
+          <a:lstStyle/>
+          <a:p>
+            <a:pPr indent="0" marL="0">
+              <a:buNone/>
+            </a:pPr>
+            <a:endParaRPr lang="en-US" dirty="0"/>
+          </a:p>
+        </p:txBody>
+      </p:sp>
+      <p:sp>
+        <p:nvSpPr>
+          <p:cNvPr id="4" name="Text 1"/>
+          <p:cNvSpPr/>
+          <p:nvPr/>
+        </p:nvSpPr>
+        <p:spPr>
+          <a:xfrm>
+            <a:off x="7461041" y="231577"/>
+            <a:ext cx="927071" cy="171450"/>
+          </a:xfrm>
+          <a:prstGeom prst="rect">
+            <a:avLst/>
+          </a:prstGeom>
+          <a:noFill/>
+          <a:ln/>
+        </p:spPr>
+        <p:txBody>
+          <a:bodyPr wrap="square" lIns="0" tIns="0" rIns="0" bIns="0" rtlCol="0" anchor="t"/>
+          <a:lstStyle/>
+          <a:p>
+            <a:pPr algn="ctr" indent="0" marL="0">
+              <a:buNone/>
+            </a:pPr>
+            <a:r>
+              <a:rPr lang="en-US" sz="1150" b="1" dirty="0">
+                <a:solidFill>
+                  <a:srgbClr val="FFFFFF"/>
+                </a:solidFill>
+                <a:latin typeface="Arial" pitchFamily="34" charset="0"/>
+                <a:ea typeface="Arial" pitchFamily="34" charset="-122"/>
+                <a:cs typeface="Arial" pitchFamily="34" charset="-120"/>
+              </a:rPr>
+              <a:t>CHAPTER 05</a:t>
+            </a:r>
+            <a:endParaRPr lang="en-US" sz="1150" dirty="0"/>
+          </a:p>
+        </p:txBody>
+      </p:sp>
+      <p:pic>
+        <p:nvPicPr>
+          <p:cNvPr id="5" name="Image 1" descr="/Users/danwahlin/.copilot/session-state/56a7a0da-def8-48d4-b5e8-0ac3878cb8dd/files/slides-build/icons/FaGithub-1F2328.png">
+            <a:hlinkClick r:id="rId3" tooltip="https://github.com/github/copilot-app-for-beginners/tree/main/05-mcp-plugins"/>
+          </p:cNvPr>
+          <p:cNvPicPr>
+            <a:picLocks noChangeAspect="1"/>
+          </p:cNvPicPr>
+          <p:nvPr/>
+        </p:nvPicPr>
+        <p:blipFill>
+          <a:blip r:embed="rId2"/>
+          <a:stretch>
+            <a:fillRect/>
+          </a:stretch>
+        </p:blipFill>
+        <p:spPr>
+          <a:xfrm>
             <a:off x="8610600" y="165050"/>
             <a:ext cx="304800" cy="304800"/>
           </a:xfrm>
@@ -5097,7 +4993,7 @@
       </p:pic>
       <p:sp>
         <p:nvSpPr>
-          <p:cNvPr id="6" name="Text 3"/>
+          <p:cNvPr id="6" name="Text 2"/>
           <p:cNvSpPr/>
           <p:nvPr/>
         </p:nvSpPr>
@@ -5136,7 +5032,7 @@
       </p:sp>
       <p:sp>
         <p:nvSpPr>
-          <p:cNvPr id="7" name="Text 4"/>
+          <p:cNvPr id="7" name="Text 3"/>
           <p:cNvSpPr/>
           <p:nvPr/>
         </p:nvSpPr>
@@ -5181,7 +5077,7 @@
       </p:sp>
       <p:sp>
         <p:nvSpPr>
-          <p:cNvPr id="8" name="Text 5"/>
+          <p:cNvPr id="8" name="Text 4"/>
           <p:cNvSpPr/>
           <p:nvPr/>
         </p:nvSpPr>
@@ -5226,7 +5122,7 @@
       </p:sp>
       <p:sp>
         <p:nvSpPr>
-          <p:cNvPr id="9" name="Text 6"/>
+          <p:cNvPr id="9" name="Text 5"/>
           <p:cNvSpPr/>
           <p:nvPr/>
         </p:nvSpPr>
@@ -5262,7 +5158,7 @@
       </p:sp>
       <p:sp>
         <p:nvSpPr>
-          <p:cNvPr id="10" name="Text 7"/>
+          <p:cNvPr id="10" name="Text 6"/>
           <p:cNvSpPr/>
           <p:nvPr/>
         </p:nvSpPr>
@@ -5292,7 +5188,7 @@
       </p:sp>
       <p:sp>
         <p:nvSpPr>
-          <p:cNvPr id="11" name="Shape 8"/>
+          <p:cNvPr id="11" name="Shape 7"/>
           <p:cNvSpPr/>
           <p:nvPr/>
         </p:nvSpPr>
@@ -5315,7 +5211,7 @@
       </p:sp>
       <p:sp>
         <p:nvSpPr>
-          <p:cNvPr id="12" name="Text 9"/>
+          <p:cNvPr id="12" name="Text 8"/>
           <p:cNvSpPr/>
           <p:nvPr/>
         </p:nvSpPr>
@@ -5357,7 +5253,7 @@
       </p:sp>
       <p:sp>
         <p:nvSpPr>
-          <p:cNvPr id="13" name="Text 10"/>
+          <p:cNvPr id="13" name="Text 9"/>
           <p:cNvSpPr/>
           <p:nvPr/>
         </p:nvSpPr>
@@ -5399,7 +5295,7 @@
       </p:sp>
       <p:sp>
         <p:nvSpPr>
-          <p:cNvPr id="14" name="Text 11"/>
+          <p:cNvPr id="14" name="Text 10"/>
           <p:cNvSpPr/>
           <p:nvPr/>
         </p:nvSpPr>
@@ -5441,7 +5337,7 @@
       </p:sp>
       <p:sp>
         <p:nvSpPr>
-          <p:cNvPr id="15" name="Shape 12"/>
+          <p:cNvPr id="15" name="Shape 11"/>
           <p:cNvSpPr/>
           <p:nvPr/>
         </p:nvSpPr>
@@ -5464,7 +5360,7 @@
       </p:sp>
       <p:sp>
         <p:nvSpPr>
-          <p:cNvPr id="16" name="Text 13"/>
+          <p:cNvPr id="16" name="Text 12"/>
           <p:cNvSpPr/>
           <p:nvPr/>
         </p:nvSpPr>
@@ -5506,7 +5402,7 @@
       </p:sp>
       <p:sp>
         <p:nvSpPr>
-          <p:cNvPr id="17" name="Text 14"/>
+          <p:cNvPr id="17" name="Text 13"/>
           <p:cNvSpPr/>
           <p:nvPr/>
         </p:nvSpPr>
@@ -5548,7 +5444,7 @@
       </p:sp>
       <p:sp>
         <p:nvSpPr>
-          <p:cNvPr id="18" name="Text 15"/>
+          <p:cNvPr id="18" name="Text 14"/>
           <p:cNvSpPr/>
           <p:nvPr/>
         </p:nvSpPr>
@@ -5590,7 +5486,7 @@
       </p:sp>
       <p:sp>
         <p:nvSpPr>
-          <p:cNvPr id="19" name="Text 16"/>
+          <p:cNvPr id="19" name="Text 15"/>
           <p:cNvSpPr/>
           <p:nvPr/>
         </p:nvSpPr>
@@ -5632,7 +5528,7 @@
       </p:sp>
       <p:sp>
         <p:nvSpPr>
-          <p:cNvPr id="20" name="Text 17"/>
+          <p:cNvPr id="20" name="Text 16"/>
           <p:cNvSpPr/>
           <p:nvPr/>
         </p:nvSpPr>
@@ -5674,7 +5570,7 @@
       </p:sp>
       <p:sp>
         <p:nvSpPr>
-          <p:cNvPr id="21" name="Text 18"/>
+          <p:cNvPr id="21" name="Text 17"/>
           <p:cNvSpPr/>
           <p:nvPr/>
         </p:nvSpPr>
@@ -5716,7 +5612,7 @@
       </p:sp>
       <p:sp>
         <p:nvSpPr>
-          <p:cNvPr id="22" name="Text 19"/>
+          <p:cNvPr id="22" name="Text 18"/>
           <p:cNvSpPr/>
           <p:nvPr/>
         </p:nvSpPr>
@@ -5752,14 +5648,14 @@
       </p:sp>
       <p:pic>
         <p:nvPicPr>
-          <p:cNvPr id="23" name="Image 1" descr="/Users/danwahlin/.copilot/session-state/56a7a0da-def8-48d4-b5e8-0ac3878cb8dd/files/slides-build/icons/GoShieldCheck-BC4C00.png">    </p:cNvPr>
+          <p:cNvPr id="23" name="Image 2" descr="/Users/danwahlin/.copilot/session-state/56a7a0da-def8-48d4-b5e8-0ac3878cb8dd/files/slides-build/icons/GoShieldCheck-BC4C00.png">    </p:cNvPr>
           <p:cNvPicPr>
             <a:picLocks noChangeAspect="1"/>
           </p:cNvPicPr>
           <p:nvPr/>
         </p:nvPicPr>
         <p:blipFill>
-          <a:blip r:embed="rId3"/>
+          <a:blip r:embed="rId4"/>
           <a:stretch>
             <a:fillRect/>
           </a:stretch>
@@ -5776,7 +5672,7 @@
       </p:pic>
       <p:sp>
         <p:nvSpPr>
-          <p:cNvPr id="24" name="Text 20"/>
+          <p:cNvPr id="24" name="Text 19"/>
           <p:cNvSpPr/>
           <p:nvPr/>
         </p:nvSpPr>
@@ -5882,112 +5778,9 @@
           <a:chExt cx="0" cy="0"/>
         </a:xfrm>
       </p:grpSpPr>
-      <p:sp>
-        <p:nvSpPr>
-          <p:cNvPr id="2" name="Text 0"/>
-          <p:cNvSpPr/>
-          <p:nvPr/>
-        </p:nvSpPr>
-        <p:spPr>
-          <a:xfrm>
-            <a:off x="0" y="0"/>
-            <a:ext cx="9144000" cy="76200"/>
-          </a:xfrm>
-          <a:prstGeom prst="rect">
-            <a:avLst/>
-          </a:prstGeom>
-          <a:solidFill>
-            <a:srgbClr val="1A7F37"/>
-          </a:solidFill>
-          <a:ln/>
-        </p:spPr>
-        <p:txBody>
-          <a:bodyPr wrap="square" rtlCol="0" anchor="ctr"/>
-          <a:lstStyle/>
-          <a:p>
-            <a:pPr indent="0" marL="0">
-              <a:buNone/>
-            </a:pPr>
-            <a:endParaRPr lang="en-US" dirty="0"/>
-          </a:p>
-        </p:txBody>
-      </p:sp>
-      <p:sp>
-        <p:nvSpPr>
-          <p:cNvPr id="3" name="Text 1"/>
-          <p:cNvSpPr/>
-          <p:nvPr/>
-        </p:nvSpPr>
-        <p:spPr>
-          <a:xfrm>
-            <a:off x="7340501" y="177701"/>
-            <a:ext cx="1168301" cy="279350"/>
-          </a:xfrm>
-          <a:prstGeom prst="roundRect">
-            <a:avLst>
-              <a:gd name="adj" fmla="val 22731"/>
-            </a:avLst>
-          </a:prstGeom>
-          <a:solidFill>
-            <a:srgbClr val="1A7F37"/>
-          </a:solidFill>
-          <a:ln/>
-        </p:spPr>
-        <p:txBody>
-          <a:bodyPr wrap="square" rtlCol="0" anchor="ctr"/>
-          <a:lstStyle/>
-          <a:p>
-            <a:pPr indent="0" marL="0">
-              <a:buNone/>
-            </a:pPr>
-            <a:endParaRPr lang="en-US" dirty="0"/>
-          </a:p>
-        </p:txBody>
-      </p:sp>
-      <p:sp>
-        <p:nvSpPr>
-          <p:cNvPr id="4" name="Text 2"/>
-          <p:cNvSpPr/>
-          <p:nvPr/>
-        </p:nvSpPr>
-        <p:spPr>
-          <a:xfrm>
-            <a:off x="7461041" y="231577"/>
-            <a:ext cx="927071" cy="171450"/>
-          </a:xfrm>
-          <a:prstGeom prst="rect">
-            <a:avLst/>
-          </a:prstGeom>
-          <a:noFill/>
-          <a:ln/>
-        </p:spPr>
-        <p:txBody>
-          <a:bodyPr wrap="square" lIns="0" tIns="0" rIns="0" bIns="0" rtlCol="0" anchor="t"/>
-          <a:lstStyle/>
-          <a:p>
-            <a:pPr algn="ctr" indent="0" marL="0">
-              <a:buNone/>
-            </a:pPr>
-            <a:r>
-              <a:rPr lang="en-US" sz="1150" b="1" dirty="0">
-                <a:solidFill>
-                  <a:srgbClr val="FFFFFF"/>
-                </a:solidFill>
-                <a:latin typeface="Arial" pitchFamily="34" charset="0"/>
-                <a:ea typeface="Arial" pitchFamily="34" charset="-122"/>
-                <a:cs typeface="Arial" pitchFamily="34" charset="-120"/>
-              </a:rPr>
-              <a:t>CHAPTER 05</a:t>
-            </a:r>
-            <a:endParaRPr lang="en-US" sz="1150" dirty="0"/>
-          </a:p>
-        </p:txBody>
-      </p:sp>
       <p:pic>
         <p:nvPicPr>
-          <p:cNvPr id="5" name="Image 0" descr="/Users/danwahlin/.copilot/session-state/56a7a0da-def8-48d4-b5e8-0ac3878cb8dd/files/slides-build/icons/FaGithub-1F2328.png">
-            <a:hlinkClick r:id="rId2" tooltip="https://github.com/github/copilot-app-for-beginners/tree/main/05-mcp-plugins"/>
-          </p:cNvPr>
+          <p:cNvPr id="2" name="Image 0" descr="/Users/danwahlin/.copilot/session-state/56a7a0da-def8-48d4-b5e8-0ac3878cb8dd/files/slides-build/img/grad-corner.png">    </p:cNvPr>
           <p:cNvPicPr>
             <a:picLocks noChangeAspect="1"/>
           </p:cNvPicPr>
@@ -6001,6 +5794,103 @@
         </p:blipFill>
         <p:spPr>
           <a:xfrm>
+            <a:off x="6349901" y="0"/>
+            <a:ext cx="2793950" cy="1308050"/>
+          </a:xfrm>
+          <a:prstGeom prst="rect">
+            <a:avLst/>
+          </a:prstGeom>
+        </p:spPr>
+      </p:pic>
+      <p:sp>
+        <p:nvSpPr>
+          <p:cNvPr id="3" name="Text 0"/>
+          <p:cNvSpPr/>
+          <p:nvPr/>
+        </p:nvSpPr>
+        <p:spPr>
+          <a:xfrm>
+            <a:off x="7340501" y="177701"/>
+            <a:ext cx="1168301" cy="279350"/>
+          </a:xfrm>
+          <a:prstGeom prst="roundRect">
+            <a:avLst>
+              <a:gd name="adj" fmla="val 22731"/>
+            </a:avLst>
+          </a:prstGeom>
+          <a:solidFill>
+            <a:srgbClr val="1A7F37"/>
+          </a:solidFill>
+          <a:ln/>
+        </p:spPr>
+        <p:txBody>
+          <a:bodyPr wrap="square" rtlCol="0" anchor="ctr"/>
+          <a:lstStyle/>
+          <a:p>
+            <a:pPr indent="0" marL="0">
+              <a:buNone/>
+            </a:pPr>
+            <a:endParaRPr lang="en-US" dirty="0"/>
+          </a:p>
+        </p:txBody>
+      </p:sp>
+      <p:sp>
+        <p:nvSpPr>
+          <p:cNvPr id="4" name="Text 1"/>
+          <p:cNvSpPr/>
+          <p:nvPr/>
+        </p:nvSpPr>
+        <p:spPr>
+          <a:xfrm>
+            <a:off x="7461041" y="231577"/>
+            <a:ext cx="927071" cy="171450"/>
+          </a:xfrm>
+          <a:prstGeom prst="rect">
+            <a:avLst/>
+          </a:prstGeom>
+          <a:noFill/>
+          <a:ln/>
+        </p:spPr>
+        <p:txBody>
+          <a:bodyPr wrap="square" lIns="0" tIns="0" rIns="0" bIns="0" rtlCol="0" anchor="t"/>
+          <a:lstStyle/>
+          <a:p>
+            <a:pPr algn="ctr" indent="0" marL="0">
+              <a:buNone/>
+            </a:pPr>
+            <a:r>
+              <a:rPr lang="en-US" sz="1150" b="1" dirty="0">
+                <a:solidFill>
+                  <a:srgbClr val="FFFFFF"/>
+                </a:solidFill>
+                <a:latin typeface="Arial" pitchFamily="34" charset="0"/>
+                <a:ea typeface="Arial" pitchFamily="34" charset="-122"/>
+                <a:cs typeface="Arial" pitchFamily="34" charset="-120"/>
+              </a:rPr>
+              <a:t>CHAPTER 05</a:t>
+            </a:r>
+            <a:endParaRPr lang="en-US" sz="1150" dirty="0"/>
+          </a:p>
+        </p:txBody>
+      </p:sp>
+      <p:pic>
+        <p:nvPicPr>
+          <p:cNvPr id="5" name="Image 1" descr="/Users/danwahlin/.copilot/session-state/56a7a0da-def8-48d4-b5e8-0ac3878cb8dd/files/slides-build/icons/FaGithub-1F2328.png">
+            <a:hlinkClick r:id="rId3" tooltip="https://github.com/github/copilot-app-for-beginners/tree/main/05-mcp-plugins"/>
+          </p:cNvPr>
+          <p:cNvPicPr>
+            <a:picLocks noChangeAspect="1"/>
+          </p:cNvPicPr>
+          <p:nvPr/>
+        </p:nvPicPr>
+        <p:blipFill>
+          <a:blip r:embed="rId2"/>
+          <a:stretch>
+            <a:fillRect/>
+          </a:stretch>
+        </p:blipFill>
+        <p:spPr>
+          <a:xfrm>
             <a:off x="8610600" y="165050"/>
             <a:ext cx="304800" cy="304800"/>
           </a:xfrm>
@@ -6011,7 +5901,7 @@
       </p:pic>
       <p:sp>
         <p:nvSpPr>
-          <p:cNvPr id="6" name="Text 3"/>
+          <p:cNvPr id="6" name="Text 2"/>
           <p:cNvSpPr/>
           <p:nvPr/>
         </p:nvSpPr>
@@ -6050,7 +5940,7 @@
       </p:sp>
       <p:sp>
         <p:nvSpPr>
-          <p:cNvPr id="7" name="Text 4"/>
+          <p:cNvPr id="7" name="Text 3"/>
           <p:cNvSpPr/>
           <p:nvPr/>
         </p:nvSpPr>
@@ -6095,7 +5985,7 @@
       </p:sp>
       <p:sp>
         <p:nvSpPr>
-          <p:cNvPr id="8" name="Text 5"/>
+          <p:cNvPr id="8" name="Text 4"/>
           <p:cNvSpPr/>
           <p:nvPr/>
         </p:nvSpPr>
@@ -6131,7 +6021,7 @@
       </p:sp>
       <p:sp>
         <p:nvSpPr>
-          <p:cNvPr id="9" name="Text 6"/>
+          <p:cNvPr id="9" name="Text 5"/>
           <p:cNvSpPr/>
           <p:nvPr/>
         </p:nvSpPr>
@@ -6163,7 +6053,7 @@
       </p:sp>
       <p:sp>
         <p:nvSpPr>
-          <p:cNvPr id="10" name="Text 7"/>
+          <p:cNvPr id="10" name="Text 6"/>
           <p:cNvSpPr/>
           <p:nvPr/>
         </p:nvSpPr>
@@ -6202,7 +6092,7 @@
       </p:sp>
       <p:sp>
         <p:nvSpPr>
-          <p:cNvPr id="11" name="Text 8"/>
+          <p:cNvPr id="11" name="Text 7"/>
           <p:cNvSpPr/>
           <p:nvPr/>
         </p:nvSpPr>
@@ -6244,7 +6134,7 @@
       </p:sp>
       <p:sp>
         <p:nvSpPr>
-          <p:cNvPr id="12" name="Text 9"/>
+          <p:cNvPr id="12" name="Text 8"/>
           <p:cNvSpPr/>
           <p:nvPr/>
         </p:nvSpPr>
@@ -6280,7 +6170,7 @@
       </p:sp>
       <p:sp>
         <p:nvSpPr>
-          <p:cNvPr id="13" name="Text 10"/>
+          <p:cNvPr id="13" name="Text 9"/>
           <p:cNvSpPr/>
           <p:nvPr/>
         </p:nvSpPr>
@@ -6312,7 +6202,7 @@
       </p:sp>
       <p:sp>
         <p:nvSpPr>
-          <p:cNvPr id="14" name="Text 11"/>
+          <p:cNvPr id="14" name="Text 10"/>
           <p:cNvSpPr/>
           <p:nvPr/>
         </p:nvSpPr>
@@ -6351,7 +6241,7 @@
       </p:sp>
       <p:sp>
         <p:nvSpPr>
-          <p:cNvPr id="15" name="Text 12"/>
+          <p:cNvPr id="15" name="Text 11"/>
           <p:cNvSpPr/>
           <p:nvPr/>
         </p:nvSpPr>
@@ -6393,7 +6283,7 @@
       </p:sp>
       <p:sp>
         <p:nvSpPr>
-          <p:cNvPr id="16" name="Text 13"/>
+          <p:cNvPr id="16" name="Text 12"/>
           <p:cNvSpPr/>
           <p:nvPr/>
         </p:nvSpPr>
@@ -6429,7 +6319,7 @@
       </p:sp>
       <p:sp>
         <p:nvSpPr>
-          <p:cNvPr id="17" name="Text 14"/>
+          <p:cNvPr id="17" name="Text 13"/>
           <p:cNvSpPr/>
           <p:nvPr/>
         </p:nvSpPr>
@@ -6461,7 +6351,7 @@
       </p:sp>
       <p:sp>
         <p:nvSpPr>
-          <p:cNvPr id="18" name="Text 15"/>
+          <p:cNvPr id="18" name="Text 14"/>
           <p:cNvSpPr/>
           <p:nvPr/>
         </p:nvSpPr>
@@ -6500,7 +6390,7 @@
       </p:sp>
       <p:sp>
         <p:nvSpPr>
-          <p:cNvPr id="19" name="Text 16"/>
+          <p:cNvPr id="19" name="Text 15"/>
           <p:cNvSpPr/>
           <p:nvPr/>
         </p:nvSpPr>
@@ -6542,7 +6432,7 @@
       </p:sp>
       <p:sp>
         <p:nvSpPr>
-          <p:cNvPr id="20" name="Text 17"/>
+          <p:cNvPr id="20" name="Text 16"/>
           <p:cNvSpPr/>
           <p:nvPr/>
         </p:nvSpPr>
@@ -6578,7 +6468,7 @@
       </p:sp>
       <p:sp>
         <p:nvSpPr>
-          <p:cNvPr id="21" name="Text 18"/>
+          <p:cNvPr id="21" name="Text 17"/>
           <p:cNvSpPr/>
           <p:nvPr/>
         </p:nvSpPr>
@@ -6610,7 +6500,7 @@
       </p:sp>
       <p:sp>
         <p:nvSpPr>
-          <p:cNvPr id="22" name="Text 19"/>
+          <p:cNvPr id="22" name="Text 18"/>
           <p:cNvSpPr/>
           <p:nvPr/>
         </p:nvSpPr>
@@ -6649,7 +6539,7 @@
       </p:sp>
       <p:sp>
         <p:nvSpPr>
-          <p:cNvPr id="23" name="Text 20"/>
+          <p:cNvPr id="23" name="Text 19"/>
           <p:cNvSpPr/>
           <p:nvPr/>
         </p:nvSpPr>
@@ -6691,7 +6581,7 @@
       </p:sp>
       <p:sp>
         <p:nvSpPr>
-          <p:cNvPr id="24" name="Text 21"/>
+          <p:cNvPr id="24" name="Text 20"/>
           <p:cNvSpPr/>
           <p:nvPr/>
         </p:nvSpPr>
@@ -6727,7 +6617,7 @@
       </p:sp>
       <p:sp>
         <p:nvSpPr>
-          <p:cNvPr id="25" name="Text 22"/>
+          <p:cNvPr id="25" name="Text 21"/>
           <p:cNvSpPr/>
           <p:nvPr/>
         </p:nvSpPr>
@@ -6759,14 +6649,14 @@
       </p:sp>
       <p:pic>
         <p:nvPicPr>
-          <p:cNvPr id="26" name="Image 1" descr="/Users/danwahlin/.copilot/session-state/56a7a0da-def8-48d4-b5e8-0ac3878cb8dd/files/slides-build/icons/FaGithub-0969DA.png">    </p:cNvPr>
+          <p:cNvPr id="26" name="Image 2" descr="/Users/danwahlin/.copilot/session-state/56a7a0da-def8-48d4-b5e8-0ac3878cb8dd/files/slides-build/icons/FaGithub-0969DA.png">    </p:cNvPr>
           <p:cNvPicPr>
             <a:picLocks noChangeAspect="1"/>
           </p:cNvPicPr>
           <p:nvPr/>
         </p:nvPicPr>
         <p:blipFill>
-          <a:blip r:embed="rId3"/>
+          <a:blip r:embed="rId4"/>
           <a:stretch>
             <a:fillRect/>
           </a:stretch>
@@ -6783,7 +6673,7 @@
       </p:pic>
       <p:sp>
         <p:nvSpPr>
-          <p:cNvPr id="27" name="Text 23"/>
+          <p:cNvPr id="27" name="Text 22"/>
           <p:cNvSpPr/>
           <p:nvPr/>
         </p:nvSpPr>
@@ -6822,7 +6712,7 @@
       </p:sp>
       <p:sp>
         <p:nvSpPr>
-          <p:cNvPr id="28" name="Text 24"/>
+          <p:cNvPr id="28" name="Text 23"/>
           <p:cNvSpPr/>
           <p:nvPr/>
         </p:nvSpPr>
@@ -6852,7 +6742,7 @@
                 <a:latin typeface="Arial" pitchFamily="34" charset="0"/>
                 <a:ea typeface="Arial" pitchFamily="34" charset="-122"/>
                 <a:cs typeface="Arial" pitchFamily="34" charset="-120"/>
-                <a:hlinkClick r:id="rId4" invalidUrl="" action="" tgtFrame="" tooltip="https://github.com/github/copilot-app-for-beginners/tree/main/05-mcp-plugins" history="1" highlightClick="0" endSnd="0">
+                <a:hlinkClick r:id="rId5" invalidUrl="" action="" tgtFrame="" tooltip="https://github.com/github/copilot-app-for-beginners/tree/main/05-mcp-plugins" history="1" highlightClick="0" endSnd="0">
                   <a:extLst>
                     <a:ext uri="{A12FA001-AC4F-418D-AE19-62706E023703}">
                       <ahyp:hlinkClr xmlns:ahyp="http://schemas.microsoft.com/office/drawing/2018/hyperlinkcolor" val="tx"/>
@@ -6868,7 +6758,7 @@
       </p:sp>
       <p:sp>
         <p:nvSpPr>
-          <p:cNvPr id="29" name="Text 25"/>
+          <p:cNvPr id="29" name="Text 24"/>
           <p:cNvSpPr/>
           <p:nvPr/>
         </p:nvSpPr>
@@ -6907,7 +6797,7 @@
       </p:sp>
       <p:sp>
         <p:nvSpPr>
-          <p:cNvPr id="30" name="Text 26"/>
+          <p:cNvPr id="30" name="Text 25"/>
           <p:cNvSpPr/>
           <p:nvPr/>
         </p:nvSpPr>
@@ -6937,7 +6827,7 @@
                 <a:latin typeface="Arial" pitchFamily="34" charset="0"/>
                 <a:ea typeface="Arial" pitchFamily="34" charset="-122"/>
                 <a:cs typeface="Arial" pitchFamily="34" charset="-120"/>
-                <a:hlinkClick r:id="rId5" invalidUrl="" action="" tgtFrame="" tooltip="https://github.com/github/copilot-app-for-beginners/tree/main/06-canvases" history="1" highlightClick="0" endSnd="0">
+                <a:hlinkClick r:id="rId6" invalidUrl="" action="" tgtFrame="" tooltip="https://github.com/github/copilot-app-for-beginners/tree/main/06-canvases" history="1" highlightClick="0" endSnd="0">
                   <a:extLst>
                     <a:ext uri="{A12FA001-AC4F-418D-AE19-62706E023703}">
                       <ahyp:hlinkClr xmlns:ahyp="http://schemas.microsoft.com/office/drawing/2018/hyperlinkcolor" val="tx"/>
@@ -6983,112 +6873,9 @@
           <a:chExt cx="0" cy="0"/>
         </a:xfrm>
       </p:grpSpPr>
-      <p:sp>
-        <p:nvSpPr>
-          <p:cNvPr id="2" name="Text 0"/>
-          <p:cNvSpPr/>
-          <p:nvPr/>
-        </p:nvSpPr>
-        <p:spPr>
-          <a:xfrm>
-            <a:off x="0" y="0"/>
-            <a:ext cx="9144000" cy="76200"/>
-          </a:xfrm>
-          <a:prstGeom prst="rect">
-            <a:avLst/>
-          </a:prstGeom>
-          <a:solidFill>
-            <a:srgbClr val="1A7F37"/>
-          </a:solidFill>
-          <a:ln/>
-        </p:spPr>
-        <p:txBody>
-          <a:bodyPr wrap="square" rtlCol="0" anchor="ctr"/>
-          <a:lstStyle/>
-          <a:p>
-            <a:pPr indent="0" marL="0">
-              <a:buNone/>
-            </a:pPr>
-            <a:endParaRPr lang="en-US" dirty="0"/>
-          </a:p>
-        </p:txBody>
-      </p:sp>
-      <p:sp>
-        <p:nvSpPr>
-          <p:cNvPr id="3" name="Text 1"/>
-          <p:cNvSpPr/>
-          <p:nvPr/>
-        </p:nvSpPr>
-        <p:spPr>
-          <a:xfrm>
-            <a:off x="7340501" y="177701"/>
-            <a:ext cx="1168301" cy="279350"/>
-          </a:xfrm>
-          <a:prstGeom prst="roundRect">
-            <a:avLst>
-              <a:gd name="adj" fmla="val 22731"/>
-            </a:avLst>
-          </a:prstGeom>
-          <a:solidFill>
-            <a:srgbClr val="1A7F37"/>
-          </a:solidFill>
-          <a:ln/>
-        </p:spPr>
-        <p:txBody>
-          <a:bodyPr wrap="square" rtlCol="0" anchor="ctr"/>
-          <a:lstStyle/>
-          <a:p>
-            <a:pPr indent="0" marL="0">
-              <a:buNone/>
-            </a:pPr>
-            <a:endParaRPr lang="en-US" dirty="0"/>
-          </a:p>
-        </p:txBody>
-      </p:sp>
-      <p:sp>
-        <p:nvSpPr>
-          <p:cNvPr id="4" name="Text 2"/>
-          <p:cNvSpPr/>
-          <p:nvPr/>
-        </p:nvSpPr>
-        <p:spPr>
-          <a:xfrm>
-            <a:off x="7461041" y="231577"/>
-            <a:ext cx="927071" cy="171450"/>
-          </a:xfrm>
-          <a:prstGeom prst="rect">
-            <a:avLst/>
-          </a:prstGeom>
-          <a:noFill/>
-          <a:ln/>
-        </p:spPr>
-        <p:txBody>
-          <a:bodyPr wrap="square" lIns="0" tIns="0" rIns="0" bIns="0" rtlCol="0" anchor="t"/>
-          <a:lstStyle/>
-          <a:p>
-            <a:pPr algn="ctr" indent="0" marL="0">
-              <a:buNone/>
-            </a:pPr>
-            <a:r>
-              <a:rPr lang="en-US" sz="1150" b="1" dirty="0">
-                <a:solidFill>
-                  <a:srgbClr val="FFFFFF"/>
-                </a:solidFill>
-                <a:latin typeface="Arial" pitchFamily="34" charset="0"/>
-                <a:ea typeface="Arial" pitchFamily="34" charset="-122"/>
-                <a:cs typeface="Arial" pitchFamily="34" charset="-120"/>
-              </a:rPr>
-              <a:t>CHAPTER 05</a:t>
-            </a:r>
-            <a:endParaRPr lang="en-US" sz="1150" dirty="0"/>
-          </a:p>
-        </p:txBody>
-      </p:sp>
       <p:pic>
         <p:nvPicPr>
-          <p:cNvPr id="5" name="Image 0" descr="/Users/danwahlin/.copilot/session-state/56a7a0da-def8-48d4-b5e8-0ac3878cb8dd/files/slides-build/icons/FaGithub-1F2328.png">
-            <a:hlinkClick r:id="rId2" tooltip="https://github.com/github/copilot-app-for-beginners/tree/main/05-mcp-plugins"/>
-          </p:cNvPr>
+          <p:cNvPr id="2" name="Image 0" descr="/Users/danwahlin/.copilot/session-state/56a7a0da-def8-48d4-b5e8-0ac3878cb8dd/files/slides-build/img/grad-corner.png">    </p:cNvPr>
           <p:cNvPicPr>
             <a:picLocks noChangeAspect="1"/>
           </p:cNvPicPr>
@@ -7102,6 +6889,103 @@
         </p:blipFill>
         <p:spPr>
           <a:xfrm>
+            <a:off x="6349901" y="0"/>
+            <a:ext cx="2793950" cy="1308050"/>
+          </a:xfrm>
+          <a:prstGeom prst="rect">
+            <a:avLst/>
+          </a:prstGeom>
+        </p:spPr>
+      </p:pic>
+      <p:sp>
+        <p:nvSpPr>
+          <p:cNvPr id="3" name="Text 0"/>
+          <p:cNvSpPr/>
+          <p:nvPr/>
+        </p:nvSpPr>
+        <p:spPr>
+          <a:xfrm>
+            <a:off x="7340501" y="177701"/>
+            <a:ext cx="1168301" cy="279350"/>
+          </a:xfrm>
+          <a:prstGeom prst="roundRect">
+            <a:avLst>
+              <a:gd name="adj" fmla="val 22731"/>
+            </a:avLst>
+          </a:prstGeom>
+          <a:solidFill>
+            <a:srgbClr val="1A7F37"/>
+          </a:solidFill>
+          <a:ln/>
+        </p:spPr>
+        <p:txBody>
+          <a:bodyPr wrap="square" rtlCol="0" anchor="ctr"/>
+          <a:lstStyle/>
+          <a:p>
+            <a:pPr indent="0" marL="0">
+              <a:buNone/>
+            </a:pPr>
+            <a:endParaRPr lang="en-US" dirty="0"/>
+          </a:p>
+        </p:txBody>
+      </p:sp>
+      <p:sp>
+        <p:nvSpPr>
+          <p:cNvPr id="4" name="Text 1"/>
+          <p:cNvSpPr/>
+          <p:nvPr/>
+        </p:nvSpPr>
+        <p:spPr>
+          <a:xfrm>
+            <a:off x="7461041" y="231577"/>
+            <a:ext cx="927071" cy="171450"/>
+          </a:xfrm>
+          <a:prstGeom prst="rect">
+            <a:avLst/>
+          </a:prstGeom>
+          <a:noFill/>
+          <a:ln/>
+        </p:spPr>
+        <p:txBody>
+          <a:bodyPr wrap="square" lIns="0" tIns="0" rIns="0" bIns="0" rtlCol="0" anchor="t"/>
+          <a:lstStyle/>
+          <a:p>
+            <a:pPr algn="ctr" indent="0" marL="0">
+              <a:buNone/>
+            </a:pPr>
+            <a:r>
+              <a:rPr lang="en-US" sz="1150" b="1" dirty="0">
+                <a:solidFill>
+                  <a:srgbClr val="FFFFFF"/>
+                </a:solidFill>
+                <a:latin typeface="Arial" pitchFamily="34" charset="0"/>
+                <a:ea typeface="Arial" pitchFamily="34" charset="-122"/>
+                <a:cs typeface="Arial" pitchFamily="34" charset="-120"/>
+              </a:rPr>
+              <a:t>CHAPTER 05</a:t>
+            </a:r>
+            <a:endParaRPr lang="en-US" sz="1150" dirty="0"/>
+          </a:p>
+        </p:txBody>
+      </p:sp>
+      <p:pic>
+        <p:nvPicPr>
+          <p:cNvPr id="5" name="Image 1" descr="/Users/danwahlin/.copilot/session-state/56a7a0da-def8-48d4-b5e8-0ac3878cb8dd/files/slides-build/icons/FaGithub-1F2328.png">
+            <a:hlinkClick r:id="rId3" tooltip="https://github.com/github/copilot-app-for-beginners/tree/main/05-mcp-plugins"/>
+          </p:cNvPr>
+          <p:cNvPicPr>
+            <a:picLocks noChangeAspect="1"/>
+          </p:cNvPicPr>
+          <p:nvPr/>
+        </p:nvPicPr>
+        <p:blipFill>
+          <a:blip r:embed="rId2"/>
+          <a:stretch>
+            <a:fillRect/>
+          </a:stretch>
+        </p:blipFill>
+        <p:spPr>
+          <a:xfrm>
             <a:off x="8610600" y="165050"/>
             <a:ext cx="304800" cy="304800"/>
           </a:xfrm>
@@ -7112,7 +6996,7 @@
       </p:pic>
       <p:sp>
         <p:nvSpPr>
-          <p:cNvPr id="6" name="Text 3"/>
+          <p:cNvPr id="6" name="Text 2"/>
           <p:cNvSpPr/>
           <p:nvPr/>
         </p:nvSpPr>
@@ -7151,7 +7035,7 @@
       </p:sp>
       <p:sp>
         <p:nvSpPr>
-          <p:cNvPr id="7" name="Text 4"/>
+          <p:cNvPr id="7" name="Text 3"/>
           <p:cNvSpPr/>
           <p:nvPr/>
         </p:nvSpPr>
@@ -7196,7 +7080,7 @@
       </p:sp>
       <p:sp>
         <p:nvSpPr>
-          <p:cNvPr id="8" name="Text 5"/>
+          <p:cNvPr id="8" name="Text 4"/>
           <p:cNvSpPr/>
           <p:nvPr/>
         </p:nvSpPr>
@@ -7228,7 +7112,7 @@
       </p:sp>
       <p:sp>
         <p:nvSpPr>
-          <p:cNvPr id="9" name="Shape 6"/>
+          <p:cNvPr id="9" name="Shape 5"/>
           <p:cNvSpPr/>
           <p:nvPr/>
         </p:nvSpPr>
@@ -7251,7 +7135,7 @@
       </p:sp>
       <p:sp>
         <p:nvSpPr>
-          <p:cNvPr id="10" name="Shape 7"/>
+          <p:cNvPr id="10" name="Shape 6"/>
           <p:cNvSpPr/>
           <p:nvPr/>
         </p:nvSpPr>
@@ -7274,7 +7158,7 @@
       </p:sp>
       <p:sp>
         <p:nvSpPr>
-          <p:cNvPr id="11" name="Shape 8"/>
+          <p:cNvPr id="11" name="Shape 7"/>
           <p:cNvSpPr/>
           <p:nvPr/>
         </p:nvSpPr>
@@ -7297,7 +7181,7 @@
       </p:sp>
       <p:sp>
         <p:nvSpPr>
-          <p:cNvPr id="12" name="Shape 9"/>
+          <p:cNvPr id="12" name="Shape 8"/>
           <p:cNvSpPr/>
           <p:nvPr/>
         </p:nvSpPr>
@@ -7320,7 +7204,7 @@
       </p:sp>
       <p:sp>
         <p:nvSpPr>
-          <p:cNvPr id="13" name="Text 10"/>
+          <p:cNvPr id="13" name="Text 9"/>
           <p:cNvSpPr/>
           <p:nvPr/>
         </p:nvSpPr>
@@ -7359,7 +7243,7 @@
       </p:sp>
       <p:sp>
         <p:nvSpPr>
-          <p:cNvPr id="14" name="Text 11"/>
+          <p:cNvPr id="14" name="Text 10"/>
           <p:cNvSpPr/>
           <p:nvPr/>
         </p:nvSpPr>
@@ -7398,7 +7282,7 @@
       </p:sp>
       <p:sp>
         <p:nvSpPr>
-          <p:cNvPr id="15" name="Text 12"/>
+          <p:cNvPr id="15" name="Text 11"/>
           <p:cNvSpPr/>
           <p:nvPr/>
         </p:nvSpPr>
@@ -7440,7 +7324,7 @@
       </p:sp>
       <p:sp>
         <p:nvSpPr>
-          <p:cNvPr id="16" name="Text 13"/>
+          <p:cNvPr id="16" name="Text 12"/>
           <p:cNvSpPr/>
           <p:nvPr/>
         </p:nvSpPr>
@@ -7472,7 +7356,7 @@
       </p:sp>
       <p:sp>
         <p:nvSpPr>
-          <p:cNvPr id="17" name="Shape 14"/>
+          <p:cNvPr id="17" name="Shape 13"/>
           <p:cNvSpPr/>
           <p:nvPr/>
         </p:nvSpPr>
@@ -7495,7 +7379,7 @@
       </p:sp>
       <p:sp>
         <p:nvSpPr>
-          <p:cNvPr id="18" name="Shape 15"/>
+          <p:cNvPr id="18" name="Shape 14"/>
           <p:cNvSpPr/>
           <p:nvPr/>
         </p:nvSpPr>
@@ -7518,7 +7402,7 @@
       </p:sp>
       <p:sp>
         <p:nvSpPr>
-          <p:cNvPr id="19" name="Shape 16"/>
+          <p:cNvPr id="19" name="Shape 15"/>
           <p:cNvSpPr/>
           <p:nvPr/>
         </p:nvSpPr>
@@ -7541,7 +7425,7 @@
       </p:sp>
       <p:sp>
         <p:nvSpPr>
-          <p:cNvPr id="20" name="Shape 17"/>
+          <p:cNvPr id="20" name="Shape 16"/>
           <p:cNvSpPr/>
           <p:nvPr/>
         </p:nvSpPr>
@@ -7564,7 +7448,7 @@
       </p:sp>
       <p:sp>
         <p:nvSpPr>
-          <p:cNvPr id="21" name="Text 18"/>
+          <p:cNvPr id="21" name="Text 17"/>
           <p:cNvSpPr/>
           <p:nvPr/>
         </p:nvSpPr>
@@ -7603,7 +7487,7 @@
       </p:sp>
       <p:sp>
         <p:nvSpPr>
-          <p:cNvPr id="22" name="Text 19"/>
+          <p:cNvPr id="22" name="Text 18"/>
           <p:cNvSpPr/>
           <p:nvPr/>
         </p:nvSpPr>
@@ -7642,7 +7526,7 @@
       </p:sp>
       <p:sp>
         <p:nvSpPr>
-          <p:cNvPr id="23" name="Text 20"/>
+          <p:cNvPr id="23" name="Text 19"/>
           <p:cNvSpPr/>
           <p:nvPr/>
         </p:nvSpPr>
@@ -7714,112 +7598,9 @@
           <a:chExt cx="0" cy="0"/>
         </a:xfrm>
       </p:grpSpPr>
-      <p:sp>
-        <p:nvSpPr>
-          <p:cNvPr id="2" name="Text 0"/>
-          <p:cNvSpPr/>
-          <p:nvPr/>
-        </p:nvSpPr>
-        <p:spPr>
-          <a:xfrm>
-            <a:off x="0" y="0"/>
-            <a:ext cx="9144000" cy="76200"/>
-          </a:xfrm>
-          <a:prstGeom prst="rect">
-            <a:avLst/>
-          </a:prstGeom>
-          <a:solidFill>
-            <a:srgbClr val="9A6700"/>
-          </a:solidFill>
-          <a:ln/>
-        </p:spPr>
-        <p:txBody>
-          <a:bodyPr wrap="square" rtlCol="0" anchor="ctr"/>
-          <a:lstStyle/>
-          <a:p>
-            <a:pPr indent="0" marL="0">
-              <a:buNone/>
-            </a:pPr>
-            <a:endParaRPr lang="en-US" dirty="0"/>
-          </a:p>
-        </p:txBody>
-      </p:sp>
-      <p:sp>
-        <p:nvSpPr>
-          <p:cNvPr id="3" name="Text 1"/>
-          <p:cNvSpPr/>
-          <p:nvPr/>
-        </p:nvSpPr>
-        <p:spPr>
-          <a:xfrm>
-            <a:off x="7340501" y="177701"/>
-            <a:ext cx="1168301" cy="279350"/>
-          </a:xfrm>
-          <a:prstGeom prst="roundRect">
-            <a:avLst>
-              <a:gd name="adj" fmla="val 22731"/>
-            </a:avLst>
-          </a:prstGeom>
-          <a:solidFill>
-            <a:srgbClr val="1A7F37"/>
-          </a:solidFill>
-          <a:ln/>
-        </p:spPr>
-        <p:txBody>
-          <a:bodyPr wrap="square" rtlCol="0" anchor="ctr"/>
-          <a:lstStyle/>
-          <a:p>
-            <a:pPr indent="0" marL="0">
-              <a:buNone/>
-            </a:pPr>
-            <a:endParaRPr lang="en-US" dirty="0"/>
-          </a:p>
-        </p:txBody>
-      </p:sp>
-      <p:sp>
-        <p:nvSpPr>
-          <p:cNvPr id="4" name="Text 2"/>
-          <p:cNvSpPr/>
-          <p:nvPr/>
-        </p:nvSpPr>
-        <p:spPr>
-          <a:xfrm>
-            <a:off x="7461041" y="231577"/>
-            <a:ext cx="927071" cy="171450"/>
-          </a:xfrm>
-          <a:prstGeom prst="rect">
-            <a:avLst/>
-          </a:prstGeom>
-          <a:noFill/>
-          <a:ln/>
-        </p:spPr>
-        <p:txBody>
-          <a:bodyPr wrap="square" lIns="0" tIns="0" rIns="0" bIns="0" rtlCol="0" anchor="t"/>
-          <a:lstStyle/>
-          <a:p>
-            <a:pPr algn="ctr" indent="0" marL="0">
-              <a:buNone/>
-            </a:pPr>
-            <a:r>
-              <a:rPr lang="en-US" sz="1150" b="1" dirty="0">
-                <a:solidFill>
-                  <a:srgbClr val="FFFFFF"/>
-                </a:solidFill>
-                <a:latin typeface="Arial" pitchFamily="34" charset="0"/>
-                <a:ea typeface="Arial" pitchFamily="34" charset="-122"/>
-                <a:cs typeface="Arial" pitchFamily="34" charset="-120"/>
-              </a:rPr>
-              <a:t>CHAPTER 05</a:t>
-            </a:r>
-            <a:endParaRPr lang="en-US" sz="1150" dirty="0"/>
-          </a:p>
-        </p:txBody>
-      </p:sp>
       <p:pic>
         <p:nvPicPr>
-          <p:cNvPr id="5" name="Image 0" descr="/Users/danwahlin/.copilot/session-state/56a7a0da-def8-48d4-b5e8-0ac3878cb8dd/files/slides-build/icons/FaGithub-1F2328.png">
-            <a:hlinkClick r:id="rId2" tooltip="https://github.com/github/copilot-app-for-beginners/tree/main/05-mcp-plugins"/>
-          </p:cNvPr>
+          <p:cNvPr id="2" name="Image 0" descr="/Users/danwahlin/.copilot/session-state/56a7a0da-def8-48d4-b5e8-0ac3878cb8dd/files/slides-build/img/grad-corner.png">    </p:cNvPr>
           <p:cNvPicPr>
             <a:picLocks noChangeAspect="1"/>
           </p:cNvPicPr>
@@ -7833,6 +7614,103 @@
         </p:blipFill>
         <p:spPr>
           <a:xfrm>
+            <a:off x="6349901" y="0"/>
+            <a:ext cx="2793950" cy="1308050"/>
+          </a:xfrm>
+          <a:prstGeom prst="rect">
+            <a:avLst/>
+          </a:prstGeom>
+        </p:spPr>
+      </p:pic>
+      <p:sp>
+        <p:nvSpPr>
+          <p:cNvPr id="3" name="Text 0"/>
+          <p:cNvSpPr/>
+          <p:nvPr/>
+        </p:nvSpPr>
+        <p:spPr>
+          <a:xfrm>
+            <a:off x="7340501" y="177701"/>
+            <a:ext cx="1168301" cy="279350"/>
+          </a:xfrm>
+          <a:prstGeom prst="roundRect">
+            <a:avLst>
+              <a:gd name="adj" fmla="val 22731"/>
+            </a:avLst>
+          </a:prstGeom>
+          <a:solidFill>
+            <a:srgbClr val="1A7F37"/>
+          </a:solidFill>
+          <a:ln/>
+        </p:spPr>
+        <p:txBody>
+          <a:bodyPr wrap="square" rtlCol="0" anchor="ctr"/>
+          <a:lstStyle/>
+          <a:p>
+            <a:pPr indent="0" marL="0">
+              <a:buNone/>
+            </a:pPr>
+            <a:endParaRPr lang="en-US" dirty="0"/>
+          </a:p>
+        </p:txBody>
+      </p:sp>
+      <p:sp>
+        <p:nvSpPr>
+          <p:cNvPr id="4" name="Text 1"/>
+          <p:cNvSpPr/>
+          <p:nvPr/>
+        </p:nvSpPr>
+        <p:spPr>
+          <a:xfrm>
+            <a:off x="7461041" y="231577"/>
+            <a:ext cx="927071" cy="171450"/>
+          </a:xfrm>
+          <a:prstGeom prst="rect">
+            <a:avLst/>
+          </a:prstGeom>
+          <a:noFill/>
+          <a:ln/>
+        </p:spPr>
+        <p:txBody>
+          <a:bodyPr wrap="square" lIns="0" tIns="0" rIns="0" bIns="0" rtlCol="0" anchor="t"/>
+          <a:lstStyle/>
+          <a:p>
+            <a:pPr algn="ctr" indent="0" marL="0">
+              <a:buNone/>
+            </a:pPr>
+            <a:r>
+              <a:rPr lang="en-US" sz="1150" b="1" dirty="0">
+                <a:solidFill>
+                  <a:srgbClr val="FFFFFF"/>
+                </a:solidFill>
+                <a:latin typeface="Arial" pitchFamily="34" charset="0"/>
+                <a:ea typeface="Arial" pitchFamily="34" charset="-122"/>
+                <a:cs typeface="Arial" pitchFamily="34" charset="-120"/>
+              </a:rPr>
+              <a:t>CHAPTER 05</a:t>
+            </a:r>
+            <a:endParaRPr lang="en-US" sz="1150" dirty="0"/>
+          </a:p>
+        </p:txBody>
+      </p:sp>
+      <p:pic>
+        <p:nvPicPr>
+          <p:cNvPr id="5" name="Image 1" descr="/Users/danwahlin/.copilot/session-state/56a7a0da-def8-48d4-b5e8-0ac3878cb8dd/files/slides-build/icons/FaGithub-1F2328.png">
+            <a:hlinkClick r:id="rId3" tooltip="https://github.com/github/copilot-app-for-beginners/tree/main/05-mcp-plugins"/>
+          </p:cNvPr>
+          <p:cNvPicPr>
+            <a:picLocks noChangeAspect="1"/>
+          </p:cNvPicPr>
+          <p:nvPr/>
+        </p:nvPicPr>
+        <p:blipFill>
+          <a:blip r:embed="rId2"/>
+          <a:stretch>
+            <a:fillRect/>
+          </a:stretch>
+        </p:blipFill>
+        <p:spPr>
+          <a:xfrm>
             <a:off x="8610600" y="165050"/>
             <a:ext cx="304800" cy="304800"/>
           </a:xfrm>
@@ -7843,7 +7721,7 @@
       </p:pic>
       <p:sp>
         <p:nvSpPr>
-          <p:cNvPr id="6" name="Text 3"/>
+          <p:cNvPr id="6" name="Text 2"/>
           <p:cNvSpPr/>
           <p:nvPr/>
         </p:nvSpPr>
@@ -7882,7 +7760,7 @@
       </p:sp>
       <p:sp>
         <p:nvSpPr>
-          <p:cNvPr id="7" name="Text 4"/>
+          <p:cNvPr id="7" name="Text 3"/>
           <p:cNvSpPr/>
           <p:nvPr/>
         </p:nvSpPr>
@@ -7927,7 +7805,7 @@
       </p:sp>
       <p:sp>
         <p:nvSpPr>
-          <p:cNvPr id="8" name="Text 5"/>
+          <p:cNvPr id="8" name="Text 4"/>
           <p:cNvSpPr/>
           <p:nvPr/>
         </p:nvSpPr>
@@ -7972,7 +7850,7 @@
       </p:sp>
       <p:sp>
         <p:nvSpPr>
-          <p:cNvPr id="9" name="Text 6"/>
+          <p:cNvPr id="9" name="Text 5"/>
           <p:cNvSpPr/>
           <p:nvPr/>
         </p:nvSpPr>
@@ -8015,63 +7893,7 @@
       </p:sp>
       <p:pic>
         <p:nvPicPr>
-          <p:cNvPr id="10" name="Image 1" descr="/Users/danwahlin/.copilot/session-state/56a7a0da-def8-48d4-b5e8-0ac3878cb8dd/files/slides-build/img/05-extending-copilot-app.jpg">    </p:cNvPr>
-          <p:cNvPicPr>
-            <a:picLocks noChangeAspect="1"/>
-          </p:cNvPicPr>
-          <p:nvPr/>
-        </p:nvPicPr>
-        <p:blipFill>
-          <a:blip r:embed="rId3"/>
-          <a:stretch>
-            <a:fillRect/>
-          </a:stretch>
-        </p:blipFill>
-        <p:spPr>
-          <a:xfrm>
-            <a:off x="558701" y="1747986"/>
-            <a:ext cx="4089350" cy="2726680"/>
-          </a:xfrm>
-          <a:prstGeom prst="rect">
-            <a:avLst/>
-          </a:prstGeom>
-        </p:spPr>
-      </p:pic>
-      <p:sp>
-        <p:nvSpPr>
-          <p:cNvPr id="11" name="Text 7"/>
-          <p:cNvSpPr/>
-          <p:nvPr/>
-        </p:nvSpPr>
-        <p:spPr>
-          <a:xfrm>
-            <a:off x="5003750" y="1986260"/>
-            <a:ext cx="381000" cy="381000"/>
-          </a:xfrm>
-          <a:prstGeom prst="roundRect">
-            <a:avLst>
-              <a:gd name="adj" fmla="val 23333"/>
-            </a:avLst>
-          </a:prstGeom>
-          <a:solidFill>
-            <a:srgbClr val="FBEFFF"/>
-          </a:solidFill>
-          <a:ln/>
-        </p:spPr>
-        <p:txBody>
-          <a:bodyPr wrap="square" rtlCol="0" anchor="ctr"/>
-          <a:lstStyle/>
-          <a:p>
-            <a:pPr indent="0" marL="0">
-              <a:buNone/>
-            </a:pPr>
-            <a:endParaRPr lang="en-US" dirty="0"/>
-          </a:p>
-        </p:txBody>
-      </p:sp>
-      <p:pic>
-        <p:nvPicPr>
-          <p:cNvPr id="12" name="Image 2" descr="/Users/danwahlin/.copilot/session-state/56a7a0da-def8-48d4-b5e8-0ac3878cb8dd/files/slides-build/icons/GoChecklist-8250DF.png">    </p:cNvPr>
+          <p:cNvPr id="10" name="Image 2" descr="/Users/danwahlin/.copilot/session-state/56a7a0da-def8-48d4-b5e8-0ac3878cb8dd/files/slides-build/img/05-extending-copilot-app.jpg">    </p:cNvPr>
           <p:cNvPicPr>
             <a:picLocks noChangeAspect="1"/>
           </p:cNvPicPr>
@@ -8085,8 +7907,8 @@
         </p:blipFill>
         <p:spPr>
           <a:xfrm>
-            <a:off x="5086350" y="2068860"/>
-            <a:ext cx="215801" cy="215801"/>
+            <a:off x="558701" y="1747986"/>
+            <a:ext cx="4089350" cy="2726680"/>
           </a:xfrm>
           <a:prstGeom prst="rect">
             <a:avLst/>
@@ -8095,128 +7917,13 @@
       </p:pic>
       <p:sp>
         <p:nvSpPr>
-          <p:cNvPr id="13" name="Text 8"/>
-          <p:cNvSpPr/>
-          <p:nvPr/>
-        </p:nvSpPr>
-        <p:spPr>
-          <a:xfrm>
-            <a:off x="5537150" y="1950839"/>
-            <a:ext cx="2410355" cy="228600"/>
-          </a:xfrm>
-          <a:prstGeom prst="rect">
-            <a:avLst/>
-          </a:prstGeom>
-          <a:noFill/>
-          <a:ln/>
-        </p:spPr>
-        <p:txBody>
-          <a:bodyPr wrap="square" lIns="0" tIns="0" rIns="0" bIns="0" rtlCol="0" anchor="t"/>
-          <a:lstStyle/>
-          <a:p>
-            <a:pPr algn="l" indent="0" marL="0">
-              <a:buNone/>
-            </a:pPr>
-            <a:r>
-              <a:rPr lang="en-US" sz="1550" b="1" dirty="0">
-                <a:solidFill>
-                  <a:srgbClr val="1F2328"/>
-                </a:solidFill>
-                <a:latin typeface="Arial" pitchFamily="34" charset="0"/>
-                <a:ea typeface="Arial" pitchFamily="34" charset="-122"/>
-                <a:cs typeface="Arial" pitchFamily="34" charset="-120"/>
-              </a:rPr>
-              <a:t>Skills and agents</a:t>
-            </a:r>
-            <a:endParaRPr lang="en-US" sz="1550" dirty="0"/>
-          </a:p>
-        </p:txBody>
-      </p:sp>
-      <p:sp>
-        <p:nvSpPr>
-          <p:cNvPr id="14" name="Text 9"/>
-          <p:cNvSpPr/>
-          <p:nvPr/>
-        </p:nvSpPr>
-        <p:spPr>
-          <a:xfrm>
-            <a:off x="5537150" y="2204740"/>
-            <a:ext cx="2410355" cy="198090"/>
-          </a:xfrm>
-          <a:prstGeom prst="rect">
-            <a:avLst/>
-          </a:prstGeom>
-          <a:noFill/>
-          <a:ln/>
-        </p:spPr>
-        <p:txBody>
-          <a:bodyPr wrap="square" lIns="0" tIns="0" rIns="0" bIns="0" rtlCol="0" anchor="t"/>
-          <a:lstStyle/>
-          <a:p>
-            <a:pPr algn="l" indent="0" marL="0">
-              <a:lnSpc>
-                <a:spcPts val="1560"/>
-              </a:lnSpc>
-              <a:buNone/>
-            </a:pPr>
-            <a:r>
-              <a:rPr lang="en-US" sz="1350" dirty="0">
-                <a:solidFill>
-                  <a:srgbClr val="59636E"/>
-                </a:solidFill>
-                <a:latin typeface="Arial" pitchFamily="34" charset="0"/>
-                <a:ea typeface="Arial" pitchFamily="34" charset="-122"/>
-                <a:cs typeface="Arial" pitchFamily="34" charset="-120"/>
-              </a:rPr>
-              <a:t>Customize </a:t>
-            </a:r>
-            <a:pPr algn="l" indent="0" marL="0">
-              <a:lnSpc>
-                <a:spcPts val="1560"/>
-              </a:lnSpc>
-              <a:buNone/>
-            </a:pPr>
-            <a:r>
-              <a:rPr lang="en-US" sz="1350" b="1" dirty="0">
-                <a:solidFill>
-                  <a:srgbClr val="59636E"/>
-                </a:solidFill>
-                <a:latin typeface="Arial" pitchFamily="34" charset="0"/>
-                <a:ea typeface="Arial" pitchFamily="34" charset="-122"/>
-                <a:cs typeface="Arial" pitchFamily="34" charset="-120"/>
-              </a:rPr>
-              <a:t>how</a:t>
-            </a:r>
-            <a:pPr algn="l" indent="0" marL="0">
-              <a:lnSpc>
-                <a:spcPts val="1560"/>
-              </a:lnSpc>
-              <a:buNone/>
-            </a:pPr>
-            <a:r>
-              <a:rPr lang="en-US" sz="1350" dirty="0">
-                <a:solidFill>
-                  <a:srgbClr val="59636E"/>
-                </a:solidFill>
-                <a:latin typeface="Arial" pitchFamily="34" charset="0"/>
-                <a:ea typeface="Arial" pitchFamily="34" charset="-122"/>
-                <a:cs typeface="Arial" pitchFamily="34" charset="-120"/>
-              </a:rPr>
-              <a:t> the app works.</a:t>
-            </a:r>
-            <a:endParaRPr lang="en-US" sz="1350" dirty="0"/>
-          </a:p>
-        </p:txBody>
-      </p:sp>
-      <p:sp>
-        <p:nvSpPr>
-          <p:cNvPr id="15" name="Text 10"/>
-          <p:cNvSpPr/>
-          <p:nvPr/>
-        </p:nvSpPr>
-        <p:spPr>
-          <a:xfrm>
-            <a:off x="5003750" y="2920752"/>
+          <p:cNvPr id="11" name="Text 6"/>
+          <p:cNvSpPr/>
+          <p:nvPr/>
+        </p:nvSpPr>
+        <p:spPr>
+          <a:xfrm>
+            <a:off x="5003750" y="1986260"/>
             <a:ext cx="381000" cy="381000"/>
           </a:xfrm>
           <a:prstGeom prst="roundRect">
@@ -8225,7 +7932,7 @@
             </a:avLst>
           </a:prstGeom>
           <a:solidFill>
-            <a:srgbClr val="DDF4FF"/>
+            <a:srgbClr val="FBEFFF"/>
           </a:solidFill>
           <a:ln/>
         </p:spPr>
@@ -8242,7 +7949,7 @@
       </p:sp>
       <p:pic>
         <p:nvPicPr>
-          <p:cNvPr id="16" name="Image 3" descr="/Users/danwahlin/.copilot/session-state/56a7a0da-def8-48d4-b5e8-0ac3878cb8dd/files/slides-build/icons/GoPlug-0969DA.png">    </p:cNvPr>
+          <p:cNvPr id="12" name="Image 3" descr="/Users/danwahlin/.copilot/session-state/56a7a0da-def8-48d4-b5e8-0ac3878cb8dd/files/slides-build/icons/GoChecklist-8250DF.png">    </p:cNvPr>
           <p:cNvPicPr>
             <a:picLocks noChangeAspect="1"/>
           </p:cNvPicPr>
@@ -8256,7 +7963,7 @@
         </p:blipFill>
         <p:spPr>
           <a:xfrm>
-            <a:off x="5086350" y="3003352"/>
+            <a:off x="5086350" y="2068860"/>
             <a:ext cx="215801" cy="215801"/>
           </a:xfrm>
           <a:prstGeom prst="rect">
@@ -8266,14 +7973,14 @@
       </p:pic>
       <p:sp>
         <p:nvSpPr>
-          <p:cNvPr id="17" name="Text 11"/>
-          <p:cNvSpPr/>
-          <p:nvPr/>
-        </p:nvSpPr>
-        <p:spPr>
-          <a:xfrm>
-            <a:off x="5537150" y="2885331"/>
-            <a:ext cx="2449672" cy="228600"/>
+          <p:cNvPr id="13" name="Text 7"/>
+          <p:cNvSpPr/>
+          <p:nvPr/>
+        </p:nvSpPr>
+        <p:spPr>
+          <a:xfrm>
+            <a:off x="5537150" y="1950839"/>
+            <a:ext cx="2410355" cy="228600"/>
           </a:xfrm>
           <a:prstGeom prst="rect">
             <a:avLst/>
@@ -8297,7 +8004,7 @@
                 <a:ea typeface="Arial" pitchFamily="34" charset="-122"/>
                 <a:cs typeface="Arial" pitchFamily="34" charset="-120"/>
               </a:rPr>
-              <a:t>MCP servers</a:t>
+              <a:t>Skills and agents</a:t>
             </a:r>
             <a:endParaRPr lang="en-US" sz="1550" dirty="0"/>
           </a:p>
@@ -8305,14 +8012,14 @@
       </p:sp>
       <p:sp>
         <p:nvSpPr>
-          <p:cNvPr id="18" name="Text 12"/>
-          <p:cNvSpPr/>
-          <p:nvPr/>
-        </p:nvSpPr>
-        <p:spPr>
-          <a:xfrm>
-            <a:off x="5537150" y="3139232"/>
-            <a:ext cx="2449672" cy="198090"/>
+          <p:cNvPr id="14" name="Text 8"/>
+          <p:cNvSpPr/>
+          <p:nvPr/>
+        </p:nvSpPr>
+        <p:spPr>
+          <a:xfrm>
+            <a:off x="5537150" y="2204740"/>
+            <a:ext cx="2410355" cy="198090"/>
           </a:xfrm>
           <a:prstGeom prst="rect">
             <a:avLst/>
@@ -8339,7 +8046,41 @@
                 <a:ea typeface="Arial" pitchFamily="34" charset="-122"/>
                 <a:cs typeface="Arial" pitchFamily="34" charset="-120"/>
               </a:rPr>
-              <a:t>Connect it to services and data.</a:t>
+              <a:t>Customize </a:t>
+            </a:r>
+            <a:pPr algn="l" indent="0" marL="0">
+              <a:lnSpc>
+                <a:spcPts val="1560"/>
+              </a:lnSpc>
+              <a:buNone/>
+            </a:pPr>
+            <a:r>
+              <a:rPr lang="en-US" sz="1350" b="1" dirty="0">
+                <a:solidFill>
+                  <a:srgbClr val="59636E"/>
+                </a:solidFill>
+                <a:latin typeface="Arial" pitchFamily="34" charset="0"/>
+                <a:ea typeface="Arial" pitchFamily="34" charset="-122"/>
+                <a:cs typeface="Arial" pitchFamily="34" charset="-120"/>
+              </a:rPr>
+              <a:t>how</a:t>
+            </a:r>
+            <a:pPr algn="l" indent="0" marL="0">
+              <a:lnSpc>
+                <a:spcPts val="1560"/>
+              </a:lnSpc>
+              <a:buNone/>
+            </a:pPr>
+            <a:r>
+              <a:rPr lang="en-US" sz="1350" dirty="0">
+                <a:solidFill>
+                  <a:srgbClr val="59636E"/>
+                </a:solidFill>
+                <a:latin typeface="Arial" pitchFamily="34" charset="0"/>
+                <a:ea typeface="Arial" pitchFamily="34" charset="-122"/>
+                <a:cs typeface="Arial" pitchFamily="34" charset="-120"/>
+              </a:rPr>
+              <a:t> the app works.</a:t>
             </a:r>
             <a:endParaRPr lang="en-US" sz="1350" dirty="0"/>
           </a:p>
@@ -8347,13 +8088,13 @@
       </p:sp>
       <p:sp>
         <p:nvSpPr>
-          <p:cNvPr id="19" name="Text 13"/>
-          <p:cNvSpPr/>
-          <p:nvPr/>
-        </p:nvSpPr>
-        <p:spPr>
-          <a:xfrm>
-            <a:off x="5003750" y="3855244"/>
+          <p:cNvPr id="15" name="Text 9"/>
+          <p:cNvSpPr/>
+          <p:nvPr/>
+        </p:nvSpPr>
+        <p:spPr>
+          <a:xfrm>
+            <a:off x="5003750" y="2920752"/>
             <a:ext cx="381000" cy="381000"/>
           </a:xfrm>
           <a:prstGeom prst="roundRect">
@@ -8362,7 +8103,7 @@
             </a:avLst>
           </a:prstGeom>
           <a:solidFill>
-            <a:srgbClr val="DAFBE1"/>
+            <a:srgbClr val="DDF4FF"/>
           </a:solidFill>
           <a:ln/>
         </p:spPr>
@@ -8379,7 +8120,7 @@
       </p:sp>
       <p:pic>
         <p:nvPicPr>
-          <p:cNvPr id="20" name="Image 4" descr="/Users/danwahlin/.copilot/session-state/56a7a0da-def8-48d4-b5e8-0ac3878cb8dd/files/slides-build/icons/GoPackage-1A7F37.png">    </p:cNvPr>
+          <p:cNvPr id="16" name="Image 4" descr="/Users/danwahlin/.copilot/session-state/56a7a0da-def8-48d4-b5e8-0ac3878cb8dd/files/slides-build/icons/GoPlug-0969DA.png">    </p:cNvPr>
           <p:cNvPicPr>
             <a:picLocks noChangeAspect="1"/>
           </p:cNvPicPr>
@@ -8393,6 +8134,143 @@
         </p:blipFill>
         <p:spPr>
           <a:xfrm>
+            <a:off x="5086350" y="3003352"/>
+            <a:ext cx="215801" cy="215801"/>
+          </a:xfrm>
+          <a:prstGeom prst="rect">
+            <a:avLst/>
+          </a:prstGeom>
+        </p:spPr>
+      </p:pic>
+      <p:sp>
+        <p:nvSpPr>
+          <p:cNvPr id="17" name="Text 10"/>
+          <p:cNvSpPr/>
+          <p:nvPr/>
+        </p:nvSpPr>
+        <p:spPr>
+          <a:xfrm>
+            <a:off x="5537150" y="2885331"/>
+            <a:ext cx="2449672" cy="228600"/>
+          </a:xfrm>
+          <a:prstGeom prst="rect">
+            <a:avLst/>
+          </a:prstGeom>
+          <a:noFill/>
+          <a:ln/>
+        </p:spPr>
+        <p:txBody>
+          <a:bodyPr wrap="square" lIns="0" tIns="0" rIns="0" bIns="0" rtlCol="0" anchor="t"/>
+          <a:lstStyle/>
+          <a:p>
+            <a:pPr algn="l" indent="0" marL="0">
+              <a:buNone/>
+            </a:pPr>
+            <a:r>
+              <a:rPr lang="en-US" sz="1550" b="1" dirty="0">
+                <a:solidFill>
+                  <a:srgbClr val="1F2328"/>
+                </a:solidFill>
+                <a:latin typeface="Arial" pitchFamily="34" charset="0"/>
+                <a:ea typeface="Arial" pitchFamily="34" charset="-122"/>
+                <a:cs typeface="Arial" pitchFamily="34" charset="-120"/>
+              </a:rPr>
+              <a:t>MCP servers</a:t>
+            </a:r>
+            <a:endParaRPr lang="en-US" sz="1550" dirty="0"/>
+          </a:p>
+        </p:txBody>
+      </p:sp>
+      <p:sp>
+        <p:nvSpPr>
+          <p:cNvPr id="18" name="Text 11"/>
+          <p:cNvSpPr/>
+          <p:nvPr/>
+        </p:nvSpPr>
+        <p:spPr>
+          <a:xfrm>
+            <a:off x="5537150" y="3139232"/>
+            <a:ext cx="2449672" cy="198090"/>
+          </a:xfrm>
+          <a:prstGeom prst="rect">
+            <a:avLst/>
+          </a:prstGeom>
+          <a:noFill/>
+          <a:ln/>
+        </p:spPr>
+        <p:txBody>
+          <a:bodyPr wrap="square" lIns="0" tIns="0" rIns="0" bIns="0" rtlCol="0" anchor="t"/>
+          <a:lstStyle/>
+          <a:p>
+            <a:pPr algn="l" indent="0" marL="0">
+              <a:lnSpc>
+                <a:spcPts val="1560"/>
+              </a:lnSpc>
+              <a:buNone/>
+            </a:pPr>
+            <a:r>
+              <a:rPr lang="en-US" sz="1350" dirty="0">
+                <a:solidFill>
+                  <a:srgbClr val="59636E"/>
+                </a:solidFill>
+                <a:latin typeface="Arial" pitchFamily="34" charset="0"/>
+                <a:ea typeface="Arial" pitchFamily="34" charset="-122"/>
+                <a:cs typeface="Arial" pitchFamily="34" charset="-120"/>
+              </a:rPr>
+              <a:t>Connect it to services and data.</a:t>
+            </a:r>
+            <a:endParaRPr lang="en-US" sz="1350" dirty="0"/>
+          </a:p>
+        </p:txBody>
+      </p:sp>
+      <p:sp>
+        <p:nvSpPr>
+          <p:cNvPr id="19" name="Text 12"/>
+          <p:cNvSpPr/>
+          <p:nvPr/>
+        </p:nvSpPr>
+        <p:spPr>
+          <a:xfrm>
+            <a:off x="5003750" y="3855244"/>
+            <a:ext cx="381000" cy="381000"/>
+          </a:xfrm>
+          <a:prstGeom prst="roundRect">
+            <a:avLst>
+              <a:gd name="adj" fmla="val 23333"/>
+            </a:avLst>
+          </a:prstGeom>
+          <a:solidFill>
+            <a:srgbClr val="DAFBE1"/>
+          </a:solidFill>
+          <a:ln/>
+        </p:spPr>
+        <p:txBody>
+          <a:bodyPr wrap="square" rtlCol="0" anchor="ctr"/>
+          <a:lstStyle/>
+          <a:p>
+            <a:pPr indent="0" marL="0">
+              <a:buNone/>
+            </a:pPr>
+            <a:endParaRPr lang="en-US" dirty="0"/>
+          </a:p>
+        </p:txBody>
+      </p:sp>
+      <p:pic>
+        <p:nvPicPr>
+          <p:cNvPr id="20" name="Image 5" descr="/Users/danwahlin/.copilot/session-state/56a7a0da-def8-48d4-b5e8-0ac3878cb8dd/files/slides-build/icons/GoPackage-1A7F37.png">    </p:cNvPr>
+          <p:cNvPicPr>
+            <a:picLocks noChangeAspect="1"/>
+          </p:cNvPicPr>
+          <p:nvPr/>
+        </p:nvPicPr>
+        <p:blipFill>
+          <a:blip r:embed="rId7"/>
+          <a:stretch>
+            <a:fillRect/>
+          </a:stretch>
+        </p:blipFill>
+        <p:spPr>
+          <a:xfrm>
             <a:off x="5086350" y="3937843"/>
             <a:ext cx="215801" cy="215801"/>
           </a:xfrm>
@@ -8403,7 +8281,7 @@
       </p:pic>
       <p:sp>
         <p:nvSpPr>
-          <p:cNvPr id="21" name="Text 14"/>
+          <p:cNvPr id="21" name="Text 13"/>
           <p:cNvSpPr/>
           <p:nvPr/>
         </p:nvSpPr>
@@ -8442,7 +8320,7 @@
       </p:sp>
       <p:sp>
         <p:nvSpPr>
-          <p:cNvPr id="22" name="Text 15"/>
+          <p:cNvPr id="22" name="Text 14"/>
           <p:cNvSpPr/>
           <p:nvPr/>
         </p:nvSpPr>
@@ -8514,112 +8392,9 @@
           <a:chExt cx="0" cy="0"/>
         </a:xfrm>
       </p:grpSpPr>
-      <p:sp>
-        <p:nvSpPr>
-          <p:cNvPr id="2" name="Text 0"/>
-          <p:cNvSpPr/>
-          <p:nvPr/>
-        </p:nvSpPr>
-        <p:spPr>
-          <a:xfrm>
-            <a:off x="0" y="0"/>
-            <a:ext cx="9144000" cy="76200"/>
-          </a:xfrm>
-          <a:prstGeom prst="rect">
-            <a:avLst/>
-          </a:prstGeom>
-          <a:solidFill>
-            <a:srgbClr val="1A7F37"/>
-          </a:solidFill>
-          <a:ln/>
-        </p:spPr>
-        <p:txBody>
-          <a:bodyPr wrap="square" rtlCol="0" anchor="ctr"/>
-          <a:lstStyle/>
-          <a:p>
-            <a:pPr indent="0" marL="0">
-              <a:buNone/>
-            </a:pPr>
-            <a:endParaRPr lang="en-US" dirty="0"/>
-          </a:p>
-        </p:txBody>
-      </p:sp>
-      <p:sp>
-        <p:nvSpPr>
-          <p:cNvPr id="3" name="Text 1"/>
-          <p:cNvSpPr/>
-          <p:nvPr/>
-        </p:nvSpPr>
-        <p:spPr>
-          <a:xfrm>
-            <a:off x="7340501" y="177701"/>
-            <a:ext cx="1168301" cy="279350"/>
-          </a:xfrm>
-          <a:prstGeom prst="roundRect">
-            <a:avLst>
-              <a:gd name="adj" fmla="val 22731"/>
-            </a:avLst>
-          </a:prstGeom>
-          <a:solidFill>
-            <a:srgbClr val="1A7F37"/>
-          </a:solidFill>
-          <a:ln/>
-        </p:spPr>
-        <p:txBody>
-          <a:bodyPr wrap="square" rtlCol="0" anchor="ctr"/>
-          <a:lstStyle/>
-          <a:p>
-            <a:pPr indent="0" marL="0">
-              <a:buNone/>
-            </a:pPr>
-            <a:endParaRPr lang="en-US" dirty="0"/>
-          </a:p>
-        </p:txBody>
-      </p:sp>
-      <p:sp>
-        <p:nvSpPr>
-          <p:cNvPr id="4" name="Text 2"/>
-          <p:cNvSpPr/>
-          <p:nvPr/>
-        </p:nvSpPr>
-        <p:spPr>
-          <a:xfrm>
-            <a:off x="7461041" y="231577"/>
-            <a:ext cx="927071" cy="171450"/>
-          </a:xfrm>
-          <a:prstGeom prst="rect">
-            <a:avLst/>
-          </a:prstGeom>
-          <a:noFill/>
-          <a:ln/>
-        </p:spPr>
-        <p:txBody>
-          <a:bodyPr wrap="square" lIns="0" tIns="0" rIns="0" bIns="0" rtlCol="0" anchor="t"/>
-          <a:lstStyle/>
-          <a:p>
-            <a:pPr algn="ctr" indent="0" marL="0">
-              <a:buNone/>
-            </a:pPr>
-            <a:r>
-              <a:rPr lang="en-US" sz="1150" b="1" dirty="0">
-                <a:solidFill>
-                  <a:srgbClr val="FFFFFF"/>
-                </a:solidFill>
-                <a:latin typeface="Arial" pitchFamily="34" charset="0"/>
-                <a:ea typeface="Arial" pitchFamily="34" charset="-122"/>
-                <a:cs typeface="Arial" pitchFamily="34" charset="-120"/>
-              </a:rPr>
-              <a:t>CHAPTER 05</a:t>
-            </a:r>
-            <a:endParaRPr lang="en-US" sz="1150" dirty="0"/>
-          </a:p>
-        </p:txBody>
-      </p:sp>
       <p:pic>
         <p:nvPicPr>
-          <p:cNvPr id="5" name="Image 0" descr="/Users/danwahlin/.copilot/session-state/56a7a0da-def8-48d4-b5e8-0ac3878cb8dd/files/slides-build/icons/FaGithub-1F2328.png">
-            <a:hlinkClick r:id="rId2" tooltip="https://github.com/github/copilot-app-for-beginners/tree/main/05-mcp-plugins"/>
-          </p:cNvPr>
+          <p:cNvPr id="2" name="Image 0" descr="/Users/danwahlin/.copilot/session-state/56a7a0da-def8-48d4-b5e8-0ac3878cb8dd/files/slides-build/img/grad-corner.png">    </p:cNvPr>
           <p:cNvPicPr>
             <a:picLocks noChangeAspect="1"/>
           </p:cNvPicPr>
@@ -8633,6 +8408,103 @@
         </p:blipFill>
         <p:spPr>
           <a:xfrm>
+            <a:off x="6349901" y="0"/>
+            <a:ext cx="2793950" cy="1308050"/>
+          </a:xfrm>
+          <a:prstGeom prst="rect">
+            <a:avLst/>
+          </a:prstGeom>
+        </p:spPr>
+      </p:pic>
+      <p:sp>
+        <p:nvSpPr>
+          <p:cNvPr id="3" name="Text 0"/>
+          <p:cNvSpPr/>
+          <p:nvPr/>
+        </p:nvSpPr>
+        <p:spPr>
+          <a:xfrm>
+            <a:off x="7340501" y="177701"/>
+            <a:ext cx="1168301" cy="279350"/>
+          </a:xfrm>
+          <a:prstGeom prst="roundRect">
+            <a:avLst>
+              <a:gd name="adj" fmla="val 22731"/>
+            </a:avLst>
+          </a:prstGeom>
+          <a:solidFill>
+            <a:srgbClr val="1A7F37"/>
+          </a:solidFill>
+          <a:ln/>
+        </p:spPr>
+        <p:txBody>
+          <a:bodyPr wrap="square" rtlCol="0" anchor="ctr"/>
+          <a:lstStyle/>
+          <a:p>
+            <a:pPr indent="0" marL="0">
+              <a:buNone/>
+            </a:pPr>
+            <a:endParaRPr lang="en-US" dirty="0"/>
+          </a:p>
+        </p:txBody>
+      </p:sp>
+      <p:sp>
+        <p:nvSpPr>
+          <p:cNvPr id="4" name="Text 1"/>
+          <p:cNvSpPr/>
+          <p:nvPr/>
+        </p:nvSpPr>
+        <p:spPr>
+          <a:xfrm>
+            <a:off x="7461041" y="231577"/>
+            <a:ext cx="927071" cy="171450"/>
+          </a:xfrm>
+          <a:prstGeom prst="rect">
+            <a:avLst/>
+          </a:prstGeom>
+          <a:noFill/>
+          <a:ln/>
+        </p:spPr>
+        <p:txBody>
+          <a:bodyPr wrap="square" lIns="0" tIns="0" rIns="0" bIns="0" rtlCol="0" anchor="t"/>
+          <a:lstStyle/>
+          <a:p>
+            <a:pPr algn="ctr" indent="0" marL="0">
+              <a:buNone/>
+            </a:pPr>
+            <a:r>
+              <a:rPr lang="en-US" sz="1150" b="1" dirty="0">
+                <a:solidFill>
+                  <a:srgbClr val="FFFFFF"/>
+                </a:solidFill>
+                <a:latin typeface="Arial" pitchFamily="34" charset="0"/>
+                <a:ea typeface="Arial" pitchFamily="34" charset="-122"/>
+                <a:cs typeface="Arial" pitchFamily="34" charset="-120"/>
+              </a:rPr>
+              <a:t>CHAPTER 05</a:t>
+            </a:r>
+            <a:endParaRPr lang="en-US" sz="1150" dirty="0"/>
+          </a:p>
+        </p:txBody>
+      </p:sp>
+      <p:pic>
+        <p:nvPicPr>
+          <p:cNvPr id="5" name="Image 1" descr="/Users/danwahlin/.copilot/session-state/56a7a0da-def8-48d4-b5e8-0ac3878cb8dd/files/slides-build/icons/FaGithub-1F2328.png">
+            <a:hlinkClick r:id="rId3" tooltip="https://github.com/github/copilot-app-for-beginners/tree/main/05-mcp-plugins"/>
+          </p:cNvPr>
+          <p:cNvPicPr>
+            <a:picLocks noChangeAspect="1"/>
+          </p:cNvPicPr>
+          <p:nvPr/>
+        </p:nvPicPr>
+        <p:blipFill>
+          <a:blip r:embed="rId2"/>
+          <a:stretch>
+            <a:fillRect/>
+          </a:stretch>
+        </p:blipFill>
+        <p:spPr>
+          <a:xfrm>
             <a:off x="8610600" y="165050"/>
             <a:ext cx="304800" cy="304800"/>
           </a:xfrm>
@@ -8643,7 +8515,7 @@
       </p:pic>
       <p:sp>
         <p:nvSpPr>
-          <p:cNvPr id="6" name="Text 3"/>
+          <p:cNvPr id="6" name="Text 2"/>
           <p:cNvSpPr/>
           <p:nvPr/>
         </p:nvSpPr>
@@ -8682,7 +8554,7 @@
       </p:sp>
       <p:sp>
         <p:nvSpPr>
-          <p:cNvPr id="7" name="Text 4"/>
+          <p:cNvPr id="7" name="Text 3"/>
           <p:cNvSpPr/>
           <p:nvPr/>
         </p:nvSpPr>
@@ -8727,7 +8599,7 @@
       </p:sp>
       <p:sp>
         <p:nvSpPr>
-          <p:cNvPr id="8" name="Text 5"/>
+          <p:cNvPr id="8" name="Text 4"/>
           <p:cNvSpPr/>
           <p:nvPr/>
         </p:nvSpPr>
@@ -8812,7 +8684,7 @@
       </p:sp>
       <p:sp>
         <p:nvSpPr>
-          <p:cNvPr id="9" name="Text 6"/>
+          <p:cNvPr id="9" name="Text 5"/>
           <p:cNvSpPr/>
           <p:nvPr/>
         </p:nvSpPr>
@@ -8848,7 +8720,7 @@
       </p:sp>
       <p:sp>
         <p:nvSpPr>
-          <p:cNvPr id="10" name="Text 7"/>
+          <p:cNvPr id="10" name="Text 6"/>
           <p:cNvSpPr/>
           <p:nvPr/>
         </p:nvSpPr>
@@ -8880,14 +8752,14 @@
       </p:sp>
       <p:pic>
         <p:nvPicPr>
-          <p:cNvPr id="11" name="Image 1" descr="/Users/danwahlin/.copilot/session-state/56a7a0da-def8-48d4-b5e8-0ac3878cb8dd/files/slides-build/icons/GoPlug-0969DA.png">    </p:cNvPr>
+          <p:cNvPr id="11" name="Image 2" descr="/Users/danwahlin/.copilot/session-state/56a7a0da-def8-48d4-b5e8-0ac3878cb8dd/files/slides-build/icons/GoPlug-0969DA.png">    </p:cNvPr>
           <p:cNvPicPr>
             <a:picLocks noChangeAspect="1"/>
           </p:cNvPicPr>
           <p:nvPr/>
         </p:nvPicPr>
         <p:blipFill>
-          <a:blip r:embed="rId3"/>
+          <a:blip r:embed="rId4"/>
           <a:stretch>
             <a:fillRect/>
           </a:stretch>
@@ -8904,7 +8776,7 @@
       </p:pic>
       <p:sp>
         <p:nvSpPr>
-          <p:cNvPr id="12" name="Text 8"/>
+          <p:cNvPr id="12" name="Text 7"/>
           <p:cNvSpPr/>
           <p:nvPr/>
         </p:nvSpPr>
@@ -8946,7 +8818,7 @@
       </p:sp>
       <p:sp>
         <p:nvSpPr>
-          <p:cNvPr id="13" name="Text 9"/>
+          <p:cNvPr id="13" name="Text 8"/>
           <p:cNvSpPr/>
           <p:nvPr/>
         </p:nvSpPr>
@@ -9022,7 +8894,7 @@
       </p:sp>
       <p:sp>
         <p:nvSpPr>
-          <p:cNvPr id="14" name="Text 10"/>
+          <p:cNvPr id="14" name="Text 9"/>
           <p:cNvSpPr/>
           <p:nvPr/>
         </p:nvSpPr>
@@ -9081,7 +8953,7 @@
       </p:sp>
       <p:sp>
         <p:nvSpPr>
-          <p:cNvPr id="15" name="Text 11"/>
+          <p:cNvPr id="15" name="Text 10"/>
           <p:cNvSpPr/>
           <p:nvPr/>
         </p:nvSpPr>
@@ -9117,7 +8989,7 @@
       </p:sp>
       <p:sp>
         <p:nvSpPr>
-          <p:cNvPr id="16" name="Text 12"/>
+          <p:cNvPr id="16" name="Text 11"/>
           <p:cNvSpPr/>
           <p:nvPr/>
         </p:nvSpPr>
@@ -9149,14 +9021,14 @@
       </p:sp>
       <p:pic>
         <p:nvPicPr>
-          <p:cNvPr id="17" name="Image 2" descr="/Users/danwahlin/.copilot/session-state/56a7a0da-def8-48d4-b5e8-0ac3878cb8dd/files/slides-build/icons/GoPackage-1A7F37.png">    </p:cNvPr>
+          <p:cNvPr id="17" name="Image 3" descr="/Users/danwahlin/.copilot/session-state/56a7a0da-def8-48d4-b5e8-0ac3878cb8dd/files/slides-build/icons/GoPackage-1A7F37.png">    </p:cNvPr>
           <p:cNvPicPr>
             <a:picLocks noChangeAspect="1"/>
           </p:cNvPicPr>
           <p:nvPr/>
         </p:nvPicPr>
         <p:blipFill>
-          <a:blip r:embed="rId4"/>
+          <a:blip r:embed="rId5"/>
           <a:stretch>
             <a:fillRect/>
           </a:stretch>
@@ -9173,7 +9045,7 @@
       </p:pic>
       <p:sp>
         <p:nvSpPr>
-          <p:cNvPr id="18" name="Text 13"/>
+          <p:cNvPr id="18" name="Text 12"/>
           <p:cNvSpPr/>
           <p:nvPr/>
         </p:nvSpPr>
@@ -9215,7 +9087,7 @@
       </p:sp>
       <p:sp>
         <p:nvSpPr>
-          <p:cNvPr id="19" name="Text 14"/>
+          <p:cNvPr id="19" name="Text 13"/>
           <p:cNvSpPr/>
           <p:nvPr/>
         </p:nvSpPr>
@@ -9291,7 +9163,7 @@
       </p:sp>
       <p:sp>
         <p:nvSpPr>
-          <p:cNvPr id="20" name="Text 15"/>
+          <p:cNvPr id="20" name="Text 14"/>
           <p:cNvSpPr/>
           <p:nvPr/>
         </p:nvSpPr>
@@ -9350,7 +9222,7 @@
       </p:sp>
       <p:sp>
         <p:nvSpPr>
-          <p:cNvPr id="21" name="Text 16"/>
+          <p:cNvPr id="21" name="Text 15"/>
           <p:cNvSpPr/>
           <p:nvPr/>
         </p:nvSpPr>
@@ -9386,14 +9258,14 @@
       </p:sp>
       <p:pic>
         <p:nvPicPr>
-          <p:cNvPr id="22" name="Image 3" descr="/Users/danwahlin/.copilot/session-state/56a7a0da-def8-48d4-b5e8-0ac3878cb8dd/files/slides-build/icons/GoAlert-9A6700.png">    </p:cNvPr>
+          <p:cNvPr id="22" name="Image 4" descr="/Users/danwahlin/.copilot/session-state/56a7a0da-def8-48d4-b5e8-0ac3878cb8dd/files/slides-build/icons/GoAlert-9A6700.png">    </p:cNvPr>
           <p:cNvPicPr>
             <a:picLocks noChangeAspect="1"/>
           </p:cNvPicPr>
           <p:nvPr/>
         </p:nvPicPr>
         <p:blipFill>
-          <a:blip r:embed="rId5"/>
+          <a:blip r:embed="rId6"/>
           <a:stretch>
             <a:fillRect/>
           </a:stretch>
@@ -9410,7 +9282,7 @@
       </p:pic>
       <p:sp>
         <p:nvSpPr>
-          <p:cNvPr id="23" name="Text 17"/>
+          <p:cNvPr id="23" name="Text 16"/>
           <p:cNvSpPr/>
           <p:nvPr/>
         </p:nvSpPr>
@@ -9516,112 +9388,9 @@
           <a:chExt cx="0" cy="0"/>
         </a:xfrm>
       </p:grpSpPr>
-      <p:sp>
-        <p:nvSpPr>
-          <p:cNvPr id="2" name="Text 0"/>
-          <p:cNvSpPr/>
-          <p:nvPr/>
-        </p:nvSpPr>
-        <p:spPr>
-          <a:xfrm>
-            <a:off x="0" y="0"/>
-            <a:ext cx="9144000" cy="76200"/>
-          </a:xfrm>
-          <a:prstGeom prst="rect">
-            <a:avLst/>
-          </a:prstGeom>
-          <a:solidFill>
-            <a:srgbClr val="1A7F37"/>
-          </a:solidFill>
-          <a:ln/>
-        </p:spPr>
-        <p:txBody>
-          <a:bodyPr wrap="square" rtlCol="0" anchor="ctr"/>
-          <a:lstStyle/>
-          <a:p>
-            <a:pPr indent="0" marL="0">
-              <a:buNone/>
-            </a:pPr>
-            <a:endParaRPr lang="en-US" dirty="0"/>
-          </a:p>
-        </p:txBody>
-      </p:sp>
-      <p:sp>
-        <p:nvSpPr>
-          <p:cNvPr id="3" name="Text 1"/>
-          <p:cNvSpPr/>
-          <p:nvPr/>
-        </p:nvSpPr>
-        <p:spPr>
-          <a:xfrm>
-            <a:off x="7340501" y="177701"/>
-            <a:ext cx="1168301" cy="279350"/>
-          </a:xfrm>
-          <a:prstGeom prst="roundRect">
-            <a:avLst>
-              <a:gd name="adj" fmla="val 22731"/>
-            </a:avLst>
-          </a:prstGeom>
-          <a:solidFill>
-            <a:srgbClr val="1A7F37"/>
-          </a:solidFill>
-          <a:ln/>
-        </p:spPr>
-        <p:txBody>
-          <a:bodyPr wrap="square" rtlCol="0" anchor="ctr"/>
-          <a:lstStyle/>
-          <a:p>
-            <a:pPr indent="0" marL="0">
-              <a:buNone/>
-            </a:pPr>
-            <a:endParaRPr lang="en-US" dirty="0"/>
-          </a:p>
-        </p:txBody>
-      </p:sp>
-      <p:sp>
-        <p:nvSpPr>
-          <p:cNvPr id="4" name="Text 2"/>
-          <p:cNvSpPr/>
-          <p:nvPr/>
-        </p:nvSpPr>
-        <p:spPr>
-          <a:xfrm>
-            <a:off x="7461041" y="231577"/>
-            <a:ext cx="927071" cy="171450"/>
-          </a:xfrm>
-          <a:prstGeom prst="rect">
-            <a:avLst/>
-          </a:prstGeom>
-          <a:noFill/>
-          <a:ln/>
-        </p:spPr>
-        <p:txBody>
-          <a:bodyPr wrap="square" lIns="0" tIns="0" rIns="0" bIns="0" rtlCol="0" anchor="t"/>
-          <a:lstStyle/>
-          <a:p>
-            <a:pPr algn="ctr" indent="0" marL="0">
-              <a:buNone/>
-            </a:pPr>
-            <a:r>
-              <a:rPr lang="en-US" sz="1150" b="1" dirty="0">
-                <a:solidFill>
-                  <a:srgbClr val="FFFFFF"/>
-                </a:solidFill>
-                <a:latin typeface="Arial" pitchFamily="34" charset="0"/>
-                <a:ea typeface="Arial" pitchFamily="34" charset="-122"/>
-                <a:cs typeface="Arial" pitchFamily="34" charset="-120"/>
-              </a:rPr>
-              <a:t>CHAPTER 05</a:t>
-            </a:r>
-            <a:endParaRPr lang="en-US" sz="1150" dirty="0"/>
-          </a:p>
-        </p:txBody>
-      </p:sp>
       <p:pic>
         <p:nvPicPr>
-          <p:cNvPr id="5" name="Image 0" descr="/Users/danwahlin/.copilot/session-state/56a7a0da-def8-48d4-b5e8-0ac3878cb8dd/files/slides-build/icons/FaGithub-1F2328.png">
-            <a:hlinkClick r:id="rId2" tooltip="https://github.com/github/copilot-app-for-beginners/tree/main/05-mcp-plugins"/>
-          </p:cNvPr>
+          <p:cNvPr id="2" name="Image 0" descr="/Users/danwahlin/.copilot/session-state/56a7a0da-def8-48d4-b5e8-0ac3878cb8dd/files/slides-build/img/grad-corner.png">    </p:cNvPr>
           <p:cNvPicPr>
             <a:picLocks noChangeAspect="1"/>
           </p:cNvPicPr>
@@ -9635,6 +9404,103 @@
         </p:blipFill>
         <p:spPr>
           <a:xfrm>
+            <a:off x="6349901" y="0"/>
+            <a:ext cx="2793950" cy="1308050"/>
+          </a:xfrm>
+          <a:prstGeom prst="rect">
+            <a:avLst/>
+          </a:prstGeom>
+        </p:spPr>
+      </p:pic>
+      <p:sp>
+        <p:nvSpPr>
+          <p:cNvPr id="3" name="Text 0"/>
+          <p:cNvSpPr/>
+          <p:nvPr/>
+        </p:nvSpPr>
+        <p:spPr>
+          <a:xfrm>
+            <a:off x="7340501" y="177701"/>
+            <a:ext cx="1168301" cy="279350"/>
+          </a:xfrm>
+          <a:prstGeom prst="roundRect">
+            <a:avLst>
+              <a:gd name="adj" fmla="val 22731"/>
+            </a:avLst>
+          </a:prstGeom>
+          <a:solidFill>
+            <a:srgbClr val="1A7F37"/>
+          </a:solidFill>
+          <a:ln/>
+        </p:spPr>
+        <p:txBody>
+          <a:bodyPr wrap="square" rtlCol="0" anchor="ctr"/>
+          <a:lstStyle/>
+          <a:p>
+            <a:pPr indent="0" marL="0">
+              <a:buNone/>
+            </a:pPr>
+            <a:endParaRPr lang="en-US" dirty="0"/>
+          </a:p>
+        </p:txBody>
+      </p:sp>
+      <p:sp>
+        <p:nvSpPr>
+          <p:cNvPr id="4" name="Text 1"/>
+          <p:cNvSpPr/>
+          <p:nvPr/>
+        </p:nvSpPr>
+        <p:spPr>
+          <a:xfrm>
+            <a:off x="7461041" y="231577"/>
+            <a:ext cx="927071" cy="171450"/>
+          </a:xfrm>
+          <a:prstGeom prst="rect">
+            <a:avLst/>
+          </a:prstGeom>
+          <a:noFill/>
+          <a:ln/>
+        </p:spPr>
+        <p:txBody>
+          <a:bodyPr wrap="square" lIns="0" tIns="0" rIns="0" bIns="0" rtlCol="0" anchor="t"/>
+          <a:lstStyle/>
+          <a:p>
+            <a:pPr algn="ctr" indent="0" marL="0">
+              <a:buNone/>
+            </a:pPr>
+            <a:r>
+              <a:rPr lang="en-US" sz="1150" b="1" dirty="0">
+                <a:solidFill>
+                  <a:srgbClr val="FFFFFF"/>
+                </a:solidFill>
+                <a:latin typeface="Arial" pitchFamily="34" charset="0"/>
+                <a:ea typeface="Arial" pitchFamily="34" charset="-122"/>
+                <a:cs typeface="Arial" pitchFamily="34" charset="-120"/>
+              </a:rPr>
+              <a:t>CHAPTER 05</a:t>
+            </a:r>
+            <a:endParaRPr lang="en-US" sz="1150" dirty="0"/>
+          </a:p>
+        </p:txBody>
+      </p:sp>
+      <p:pic>
+        <p:nvPicPr>
+          <p:cNvPr id="5" name="Image 1" descr="/Users/danwahlin/.copilot/session-state/56a7a0da-def8-48d4-b5e8-0ac3878cb8dd/files/slides-build/icons/FaGithub-1F2328.png">
+            <a:hlinkClick r:id="rId3" tooltip="https://github.com/github/copilot-app-for-beginners/tree/main/05-mcp-plugins"/>
+          </p:cNvPr>
+          <p:cNvPicPr>
+            <a:picLocks noChangeAspect="1"/>
+          </p:cNvPicPr>
+          <p:nvPr/>
+        </p:nvPicPr>
+        <p:blipFill>
+          <a:blip r:embed="rId2"/>
+          <a:stretch>
+            <a:fillRect/>
+          </a:stretch>
+        </p:blipFill>
+        <p:spPr>
+          <a:xfrm>
             <a:off x="8610600" y="165050"/>
             <a:ext cx="304800" cy="304800"/>
           </a:xfrm>
@@ -9645,7 +9511,7 @@
       </p:pic>
       <p:sp>
         <p:nvSpPr>
-          <p:cNvPr id="6" name="Text 3"/>
+          <p:cNvPr id="6" name="Text 2"/>
           <p:cNvSpPr/>
           <p:nvPr/>
         </p:nvSpPr>
@@ -9684,7 +9550,7 @@
       </p:sp>
       <p:sp>
         <p:nvSpPr>
-          <p:cNvPr id="7" name="Text 4"/>
+          <p:cNvPr id="7" name="Text 3"/>
           <p:cNvSpPr/>
           <p:nvPr/>
         </p:nvSpPr>
@@ -9729,7 +9595,7 @@
       </p:sp>
       <p:sp>
         <p:nvSpPr>
-          <p:cNvPr id="8" name="Text 5"/>
+          <p:cNvPr id="8" name="Text 4"/>
           <p:cNvSpPr/>
           <p:nvPr/>
         </p:nvSpPr>
@@ -9774,7 +9640,7 @@
       </p:sp>
       <p:sp>
         <p:nvSpPr>
-          <p:cNvPr id="9" name="Text 6"/>
+          <p:cNvPr id="9" name="Text 5"/>
           <p:cNvSpPr/>
           <p:nvPr/>
         </p:nvSpPr>
@@ -9817,63 +9683,7 @@
       </p:sp>
       <p:pic>
         <p:nvPicPr>
-          <p:cNvPr id="10" name="Image 1" descr="/Users/danwahlin/.copilot/session-state/56a7a0da-def8-48d4-b5e8-0ac3878cb8dd/files/slides-build/img/05-least-tool-principle.jpg">    </p:cNvPr>
-          <p:cNvPicPr>
-            <a:picLocks noChangeAspect="1"/>
-          </p:cNvPicPr>
-          <p:nvPr/>
-        </p:nvPicPr>
-        <p:blipFill>
-          <a:blip r:embed="rId3"/>
-          <a:stretch>
-            <a:fillRect/>
-          </a:stretch>
-        </p:blipFill>
-        <p:spPr>
-          <a:xfrm>
-            <a:off x="558701" y="1752451"/>
-            <a:ext cx="3962400" cy="2641550"/>
-          </a:xfrm>
-          <a:prstGeom prst="rect">
-            <a:avLst/>
-          </a:prstGeom>
-        </p:spPr>
-      </p:pic>
-      <p:sp>
-        <p:nvSpPr>
-          <p:cNvPr id="11" name="Text 7"/>
-          <p:cNvSpPr/>
-          <p:nvPr/>
-        </p:nvSpPr>
-        <p:spPr>
-          <a:xfrm>
-            <a:off x="4876651" y="2202061"/>
-            <a:ext cx="381000" cy="381000"/>
-          </a:xfrm>
-          <a:prstGeom prst="roundRect">
-            <a:avLst>
-              <a:gd name="adj" fmla="val 23333"/>
-            </a:avLst>
-          </a:prstGeom>
-          <a:solidFill>
-            <a:srgbClr val="DAFBE1"/>
-          </a:solidFill>
-          <a:ln/>
-        </p:spPr>
-        <p:txBody>
-          <a:bodyPr wrap="square" rtlCol="0" anchor="ctr"/>
-          <a:lstStyle/>
-          <a:p>
-            <a:pPr indent="0" marL="0">
-              <a:buNone/>
-            </a:pPr>
-            <a:endParaRPr lang="en-US" dirty="0"/>
-          </a:p>
-        </p:txBody>
-      </p:sp>
-      <p:pic>
-        <p:nvPicPr>
-          <p:cNvPr id="12" name="Image 2" descr="/Users/danwahlin/.copilot/session-state/56a7a0da-def8-48d4-b5e8-0ac3878cb8dd/files/slides-build/icons/GoTools-1A7F37.png">    </p:cNvPr>
+          <p:cNvPr id="10" name="Image 2" descr="/Users/danwahlin/.copilot/session-state/56a7a0da-def8-48d4-b5e8-0ac3878cb8dd/files/slides-build/img/05-least-tool-principle.jpg">    </p:cNvPr>
           <p:cNvPicPr>
             <a:picLocks noChangeAspect="1"/>
           </p:cNvPicPr>
@@ -9887,8 +9697,8 @@
         </p:blipFill>
         <p:spPr>
           <a:xfrm>
-            <a:off x="4959251" y="2284661"/>
-            <a:ext cx="215801" cy="215801"/>
+            <a:off x="558701" y="1752451"/>
+            <a:ext cx="3962400" cy="2641550"/>
           </a:xfrm>
           <a:prstGeom prst="rect">
             <a:avLst/>
@@ -9897,94 +9707,13 @@
       </p:pic>
       <p:sp>
         <p:nvSpPr>
-          <p:cNvPr id="13" name="Text 8"/>
-          <p:cNvSpPr/>
-          <p:nvPr/>
-        </p:nvSpPr>
-        <p:spPr>
-          <a:xfrm>
-            <a:off x="5410051" y="2166640"/>
-            <a:ext cx="3256666" cy="228600"/>
-          </a:xfrm>
-          <a:prstGeom prst="rect">
-            <a:avLst/>
-          </a:prstGeom>
-          <a:noFill/>
-          <a:ln/>
-        </p:spPr>
-        <p:txBody>
-          <a:bodyPr wrap="square" lIns="0" tIns="0" rIns="0" bIns="0" rtlCol="0" anchor="t"/>
-          <a:lstStyle/>
-          <a:p>
-            <a:pPr algn="l" indent="0" marL="0">
-              <a:buNone/>
-            </a:pPr>
-            <a:r>
-              <a:rPr lang="en-US" sz="1550" b="1" dirty="0">
-                <a:solidFill>
-                  <a:srgbClr val="1F2328"/>
-                </a:solidFill>
-                <a:latin typeface="Arial" pitchFamily="34" charset="0"/>
-                <a:ea typeface="Arial" pitchFamily="34" charset="-122"/>
-                <a:cs typeface="Arial" pitchFamily="34" charset="-120"/>
-              </a:rPr>
-              <a:t>Start with what you have</a:t>
-            </a:r>
-            <a:endParaRPr lang="en-US" sz="1550" dirty="0"/>
-          </a:p>
-        </p:txBody>
-      </p:sp>
-      <p:sp>
-        <p:nvSpPr>
-          <p:cNvPr id="14" name="Text 9"/>
-          <p:cNvSpPr/>
-          <p:nvPr/>
-        </p:nvSpPr>
-        <p:spPr>
-          <a:xfrm>
-            <a:off x="5410051" y="2420541"/>
-            <a:ext cx="3256666" cy="198090"/>
-          </a:xfrm>
-          <a:prstGeom prst="rect">
-            <a:avLst/>
-          </a:prstGeom>
-          <a:noFill/>
-          <a:ln/>
-        </p:spPr>
-        <p:txBody>
-          <a:bodyPr wrap="square" lIns="0" tIns="0" rIns="0" bIns="0" rtlCol="0" anchor="t"/>
-          <a:lstStyle/>
-          <a:p>
-            <a:pPr algn="l" indent="0" marL="0">
-              <a:lnSpc>
-                <a:spcPts val="1560"/>
-              </a:lnSpc>
-              <a:buNone/>
-            </a:pPr>
-            <a:r>
-              <a:rPr lang="en-US" sz="1350" dirty="0">
-                <a:solidFill>
-                  <a:srgbClr val="59636E"/>
-                </a:solidFill>
-                <a:latin typeface="Arial" pitchFamily="34" charset="0"/>
-                <a:ea typeface="Arial" pitchFamily="34" charset="-122"/>
-                <a:cs typeface="Arial" pitchFamily="34" charset="-120"/>
-              </a:rPr>
-              <a:t>The app already reads and searches files.</a:t>
-            </a:r>
-            <a:endParaRPr lang="en-US" sz="1350" dirty="0"/>
-          </a:p>
-        </p:txBody>
-      </p:sp>
-      <p:sp>
-        <p:nvSpPr>
-          <p:cNvPr id="15" name="Text 10"/>
-          <p:cNvSpPr/>
-          <p:nvPr/>
-        </p:nvSpPr>
-        <p:spPr>
-          <a:xfrm>
-            <a:off x="4876651" y="2882652"/>
+          <p:cNvPr id="11" name="Text 6"/>
+          <p:cNvSpPr/>
+          <p:nvPr/>
+        </p:nvSpPr>
+        <p:spPr>
+          <a:xfrm>
+            <a:off x="4876651" y="2202061"/>
             <a:ext cx="381000" cy="381000"/>
           </a:xfrm>
           <a:prstGeom prst="roundRect">
@@ -10010,7 +9739,7 @@
       </p:sp>
       <p:pic>
         <p:nvPicPr>
-          <p:cNvPr id="16" name="Image 3" descr="/Users/danwahlin/.copilot/session-state/56a7a0da-def8-48d4-b5e8-0ac3878cb8dd/files/slides-build/icons/GoPlug-1A7F37.png">    </p:cNvPr>
+          <p:cNvPr id="12" name="Image 3" descr="/Users/danwahlin/.copilot/session-state/56a7a0da-def8-48d4-b5e8-0ac3878cb8dd/files/slides-build/icons/GoTools-1A7F37.png">    </p:cNvPr>
           <p:cNvPicPr>
             <a:picLocks noChangeAspect="1"/>
           </p:cNvPicPr>
@@ -10024,7 +9753,7 @@
         </p:blipFill>
         <p:spPr>
           <a:xfrm>
-            <a:off x="4959251" y="2965252"/>
+            <a:off x="4959251" y="2284661"/>
             <a:ext cx="215801" cy="215801"/>
           </a:xfrm>
           <a:prstGeom prst="rect">
@@ -10034,14 +9763,14 @@
       </p:pic>
       <p:sp>
         <p:nvSpPr>
-          <p:cNvPr id="17" name="Text 11"/>
-          <p:cNvSpPr/>
-          <p:nvPr/>
-        </p:nvSpPr>
-        <p:spPr>
-          <a:xfrm>
-            <a:off x="5410051" y="2847231"/>
-            <a:ext cx="2821897" cy="228600"/>
+          <p:cNvPr id="13" name="Text 7"/>
+          <p:cNvSpPr/>
+          <p:nvPr/>
+        </p:nvSpPr>
+        <p:spPr>
+          <a:xfrm>
+            <a:off x="5410051" y="2166640"/>
+            <a:ext cx="3256666" cy="228600"/>
           </a:xfrm>
           <a:prstGeom prst="rect">
             <a:avLst/>
@@ -10065,7 +9794,7 @@
                 <a:ea typeface="Arial" pitchFamily="34" charset="-122"/>
                 <a:cs typeface="Arial" pitchFamily="34" charset="-120"/>
               </a:rPr>
-              <a:t>Add only what the task needs</a:t>
+              <a:t>Start with what you have</a:t>
             </a:r>
             <a:endParaRPr lang="en-US" sz="1550" dirty="0"/>
           </a:p>
@@ -10073,14 +9802,14 @@
       </p:sp>
       <p:sp>
         <p:nvSpPr>
-          <p:cNvPr id="18" name="Text 12"/>
-          <p:cNvSpPr/>
-          <p:nvPr/>
-        </p:nvSpPr>
-        <p:spPr>
-          <a:xfrm>
-            <a:off x="5410051" y="3101132"/>
-            <a:ext cx="2821897" cy="198090"/>
+          <p:cNvPr id="14" name="Text 8"/>
+          <p:cNvSpPr/>
+          <p:nvPr/>
+        </p:nvSpPr>
+        <p:spPr>
+          <a:xfrm>
+            <a:off x="5410051" y="2420541"/>
+            <a:ext cx="3256666" cy="198090"/>
           </a:xfrm>
           <a:prstGeom prst="rect">
             <a:avLst/>
@@ -10107,7 +9836,7 @@
                 <a:ea typeface="Arial" pitchFamily="34" charset="-122"/>
                 <a:cs typeface="Arial" pitchFamily="34" charset="-120"/>
               </a:rPr>
-              <a:t>One connection per service.</a:t>
+              <a:t>The app already reads and searches files.</a:t>
             </a:r>
             <a:endParaRPr lang="en-US" sz="1350" dirty="0"/>
           </a:p>
@@ -10115,13 +9844,13 @@
       </p:sp>
       <p:sp>
         <p:nvSpPr>
-          <p:cNvPr id="19" name="Text 13"/>
-          <p:cNvSpPr/>
-          <p:nvPr/>
-        </p:nvSpPr>
-        <p:spPr>
-          <a:xfrm>
-            <a:off x="4876651" y="3563243"/>
+          <p:cNvPr id="15" name="Text 9"/>
+          <p:cNvSpPr/>
+          <p:nvPr/>
+        </p:nvSpPr>
+        <p:spPr>
+          <a:xfrm>
+            <a:off x="4876651" y="2882652"/>
             <a:ext cx="381000" cy="381000"/>
           </a:xfrm>
           <a:prstGeom prst="roundRect">
@@ -10147,7 +9876,7 @@
       </p:sp>
       <p:pic>
         <p:nvPicPr>
-          <p:cNvPr id="20" name="Image 4" descr="/Users/danwahlin/.copilot/session-state/56a7a0da-def8-48d4-b5e8-0ac3878cb8dd/files/slides-build/icons/GoShieldCheck-1A7F37.png">    </p:cNvPr>
+          <p:cNvPr id="16" name="Image 4" descr="/Users/danwahlin/.copilot/session-state/56a7a0da-def8-48d4-b5e8-0ac3878cb8dd/files/slides-build/icons/GoPlug-1A7F37.png">    </p:cNvPr>
           <p:cNvPicPr>
             <a:picLocks noChangeAspect="1"/>
           </p:cNvPicPr>
@@ -10161,6 +9890,143 @@
         </p:blipFill>
         <p:spPr>
           <a:xfrm>
+            <a:off x="4959251" y="2965252"/>
+            <a:ext cx="215801" cy="215801"/>
+          </a:xfrm>
+          <a:prstGeom prst="rect">
+            <a:avLst/>
+          </a:prstGeom>
+        </p:spPr>
+      </p:pic>
+      <p:sp>
+        <p:nvSpPr>
+          <p:cNvPr id="17" name="Text 10"/>
+          <p:cNvSpPr/>
+          <p:nvPr/>
+        </p:nvSpPr>
+        <p:spPr>
+          <a:xfrm>
+            <a:off x="5410051" y="2847231"/>
+            <a:ext cx="2821897" cy="228600"/>
+          </a:xfrm>
+          <a:prstGeom prst="rect">
+            <a:avLst/>
+          </a:prstGeom>
+          <a:noFill/>
+          <a:ln/>
+        </p:spPr>
+        <p:txBody>
+          <a:bodyPr wrap="square" lIns="0" tIns="0" rIns="0" bIns="0" rtlCol="0" anchor="t"/>
+          <a:lstStyle/>
+          <a:p>
+            <a:pPr algn="l" indent="0" marL="0">
+              <a:buNone/>
+            </a:pPr>
+            <a:r>
+              <a:rPr lang="en-US" sz="1550" b="1" dirty="0">
+                <a:solidFill>
+                  <a:srgbClr val="1F2328"/>
+                </a:solidFill>
+                <a:latin typeface="Arial" pitchFamily="34" charset="0"/>
+                <a:ea typeface="Arial" pitchFamily="34" charset="-122"/>
+                <a:cs typeface="Arial" pitchFamily="34" charset="-120"/>
+              </a:rPr>
+              <a:t>Add only what the task needs</a:t>
+            </a:r>
+            <a:endParaRPr lang="en-US" sz="1550" dirty="0"/>
+          </a:p>
+        </p:txBody>
+      </p:sp>
+      <p:sp>
+        <p:nvSpPr>
+          <p:cNvPr id="18" name="Text 11"/>
+          <p:cNvSpPr/>
+          <p:nvPr/>
+        </p:nvSpPr>
+        <p:spPr>
+          <a:xfrm>
+            <a:off x="5410051" y="3101132"/>
+            <a:ext cx="2821897" cy="198090"/>
+          </a:xfrm>
+          <a:prstGeom prst="rect">
+            <a:avLst/>
+          </a:prstGeom>
+          <a:noFill/>
+          <a:ln/>
+        </p:spPr>
+        <p:txBody>
+          <a:bodyPr wrap="square" lIns="0" tIns="0" rIns="0" bIns="0" rtlCol="0" anchor="t"/>
+          <a:lstStyle/>
+          <a:p>
+            <a:pPr algn="l" indent="0" marL="0">
+              <a:lnSpc>
+                <a:spcPts val="1560"/>
+              </a:lnSpc>
+              <a:buNone/>
+            </a:pPr>
+            <a:r>
+              <a:rPr lang="en-US" sz="1350" dirty="0">
+                <a:solidFill>
+                  <a:srgbClr val="59636E"/>
+                </a:solidFill>
+                <a:latin typeface="Arial" pitchFamily="34" charset="0"/>
+                <a:ea typeface="Arial" pitchFamily="34" charset="-122"/>
+                <a:cs typeface="Arial" pitchFamily="34" charset="-120"/>
+              </a:rPr>
+              <a:t>One connection per service.</a:t>
+            </a:r>
+            <a:endParaRPr lang="en-US" sz="1350" dirty="0"/>
+          </a:p>
+        </p:txBody>
+      </p:sp>
+      <p:sp>
+        <p:nvSpPr>
+          <p:cNvPr id="19" name="Text 12"/>
+          <p:cNvSpPr/>
+          <p:nvPr/>
+        </p:nvSpPr>
+        <p:spPr>
+          <a:xfrm>
+            <a:off x="4876651" y="3563243"/>
+            <a:ext cx="381000" cy="381000"/>
+          </a:xfrm>
+          <a:prstGeom prst="roundRect">
+            <a:avLst>
+              <a:gd name="adj" fmla="val 23333"/>
+            </a:avLst>
+          </a:prstGeom>
+          <a:solidFill>
+            <a:srgbClr val="DAFBE1"/>
+          </a:solidFill>
+          <a:ln/>
+        </p:spPr>
+        <p:txBody>
+          <a:bodyPr wrap="square" rtlCol="0" anchor="ctr"/>
+          <a:lstStyle/>
+          <a:p>
+            <a:pPr indent="0" marL="0">
+              <a:buNone/>
+            </a:pPr>
+            <a:endParaRPr lang="en-US" dirty="0"/>
+          </a:p>
+        </p:txBody>
+      </p:sp>
+      <p:pic>
+        <p:nvPicPr>
+          <p:cNvPr id="20" name="Image 5" descr="/Users/danwahlin/.copilot/session-state/56a7a0da-def8-48d4-b5e8-0ac3878cb8dd/files/slides-build/icons/GoShieldCheck-1A7F37.png">    </p:cNvPr>
+          <p:cNvPicPr>
+            <a:picLocks noChangeAspect="1"/>
+          </p:cNvPicPr>
+          <p:nvPr/>
+        </p:nvPicPr>
+        <p:blipFill>
+          <a:blip r:embed="rId7"/>
+          <a:stretch>
+            <a:fillRect/>
+          </a:stretch>
+        </p:blipFill>
+        <p:spPr>
+          <a:xfrm>
             <a:off x="4959251" y="3645843"/>
             <a:ext cx="215801" cy="215801"/>
           </a:xfrm>
@@ -10171,7 +10037,7 @@
       </p:pic>
       <p:sp>
         <p:nvSpPr>
-          <p:cNvPr id="21" name="Text 14"/>
+          <p:cNvPr id="21" name="Text 13"/>
           <p:cNvSpPr/>
           <p:nvPr/>
         </p:nvSpPr>
@@ -10210,7 +10076,7 @@
       </p:sp>
       <p:sp>
         <p:nvSpPr>
-          <p:cNvPr id="22" name="Text 15"/>
+          <p:cNvPr id="22" name="Text 14"/>
           <p:cNvSpPr/>
           <p:nvPr/>
         </p:nvSpPr>
@@ -10384,82 +10250,9 @@
           </a:p>
         </p:txBody>
       </p:sp>
-      <p:sp>
-        <p:nvSpPr>
-          <p:cNvPr id="5" name="Text 3"/>
-          <p:cNvSpPr/>
-          <p:nvPr/>
-        </p:nvSpPr>
-        <p:spPr>
-          <a:xfrm>
-            <a:off x="7340501" y="177701"/>
-            <a:ext cx="1168301" cy="279350"/>
-          </a:xfrm>
-          <a:prstGeom prst="roundRect">
-            <a:avLst>
-              <a:gd name="adj" fmla="val 22731"/>
-            </a:avLst>
-          </a:prstGeom>
-          <a:solidFill>
-            <a:srgbClr val="1A7F37"/>
-          </a:solidFill>
-          <a:ln/>
-        </p:spPr>
-        <p:txBody>
-          <a:bodyPr wrap="square" rtlCol="0" anchor="ctr"/>
-          <a:lstStyle/>
-          <a:p>
-            <a:pPr indent="0" marL="0">
-              <a:buNone/>
-            </a:pPr>
-            <a:endParaRPr lang="en-US" dirty="0"/>
-          </a:p>
-        </p:txBody>
-      </p:sp>
-      <p:sp>
-        <p:nvSpPr>
-          <p:cNvPr id="6" name="Text 4"/>
-          <p:cNvSpPr/>
-          <p:nvPr/>
-        </p:nvSpPr>
-        <p:spPr>
-          <a:xfrm>
-            <a:off x="7461041" y="231577"/>
-            <a:ext cx="927071" cy="171450"/>
-          </a:xfrm>
-          <a:prstGeom prst="rect">
-            <a:avLst/>
-          </a:prstGeom>
-          <a:noFill/>
-          <a:ln/>
-        </p:spPr>
-        <p:txBody>
-          <a:bodyPr wrap="square" lIns="0" tIns="0" rIns="0" bIns="0" rtlCol="0" anchor="t"/>
-          <a:lstStyle/>
-          <a:p>
-            <a:pPr algn="ctr" indent="0" marL="0">
-              <a:buNone/>
-            </a:pPr>
-            <a:r>
-              <a:rPr lang="en-US" sz="1150" b="1" dirty="0">
-                <a:solidFill>
-                  <a:srgbClr val="FFFFFF"/>
-                </a:solidFill>
-                <a:latin typeface="Arial" pitchFamily="34" charset="0"/>
-                <a:ea typeface="Arial" pitchFamily="34" charset="-122"/>
-                <a:cs typeface="Arial" pitchFamily="34" charset="-120"/>
-              </a:rPr>
-              <a:t>CHAPTER 05</a:t>
-            </a:r>
-            <a:endParaRPr lang="en-US" sz="1150" dirty="0"/>
-          </a:p>
-        </p:txBody>
-      </p:sp>
       <p:pic>
         <p:nvPicPr>
-          <p:cNvPr id="7" name="Image 0" descr="/Users/danwahlin/.copilot/session-state/56a7a0da-def8-48d4-b5e8-0ac3878cb8dd/files/slides-build/icons/FaGithub-1F2328.png">
-            <a:hlinkClick r:id="rId2" tooltip="https://github.com/github/copilot-app-for-beginners/tree/main/05-mcp-plugins"/>
-          </p:cNvPr>
+          <p:cNvPr id="5" name="Image 0" descr="/Users/danwahlin/.copilot/session-state/56a7a0da-def8-48d4-b5e8-0ac3878cb8dd/files/slides-build/img/grad-corner.png">    </p:cNvPr>
           <p:cNvPicPr>
             <a:picLocks noChangeAspect="1"/>
           </p:cNvPicPr>
@@ -10473,6 +10266,103 @@
         </p:blipFill>
         <p:spPr>
           <a:xfrm>
+            <a:off x="6349901" y="0"/>
+            <a:ext cx="2793950" cy="1308050"/>
+          </a:xfrm>
+          <a:prstGeom prst="rect">
+            <a:avLst/>
+          </a:prstGeom>
+        </p:spPr>
+      </p:pic>
+      <p:sp>
+        <p:nvSpPr>
+          <p:cNvPr id="6" name="Text 3"/>
+          <p:cNvSpPr/>
+          <p:nvPr/>
+        </p:nvSpPr>
+        <p:spPr>
+          <a:xfrm>
+            <a:off x="7340501" y="177701"/>
+            <a:ext cx="1168301" cy="279350"/>
+          </a:xfrm>
+          <a:prstGeom prst="roundRect">
+            <a:avLst>
+              <a:gd name="adj" fmla="val 22731"/>
+            </a:avLst>
+          </a:prstGeom>
+          <a:solidFill>
+            <a:srgbClr val="1A7F37"/>
+          </a:solidFill>
+          <a:ln/>
+        </p:spPr>
+        <p:txBody>
+          <a:bodyPr wrap="square" rtlCol="0" anchor="ctr"/>
+          <a:lstStyle/>
+          <a:p>
+            <a:pPr indent="0" marL="0">
+              <a:buNone/>
+            </a:pPr>
+            <a:endParaRPr lang="en-US" dirty="0"/>
+          </a:p>
+        </p:txBody>
+      </p:sp>
+      <p:sp>
+        <p:nvSpPr>
+          <p:cNvPr id="7" name="Text 4"/>
+          <p:cNvSpPr/>
+          <p:nvPr/>
+        </p:nvSpPr>
+        <p:spPr>
+          <a:xfrm>
+            <a:off x="7461041" y="231577"/>
+            <a:ext cx="927071" cy="171450"/>
+          </a:xfrm>
+          <a:prstGeom prst="rect">
+            <a:avLst/>
+          </a:prstGeom>
+          <a:noFill/>
+          <a:ln/>
+        </p:spPr>
+        <p:txBody>
+          <a:bodyPr wrap="square" lIns="0" tIns="0" rIns="0" bIns="0" rtlCol="0" anchor="t"/>
+          <a:lstStyle/>
+          <a:p>
+            <a:pPr algn="ctr" indent="0" marL="0">
+              <a:buNone/>
+            </a:pPr>
+            <a:r>
+              <a:rPr lang="en-US" sz="1150" b="1" dirty="0">
+                <a:solidFill>
+                  <a:srgbClr val="FFFFFF"/>
+                </a:solidFill>
+                <a:latin typeface="Arial" pitchFamily="34" charset="0"/>
+                <a:ea typeface="Arial" pitchFamily="34" charset="-122"/>
+                <a:cs typeface="Arial" pitchFamily="34" charset="-120"/>
+              </a:rPr>
+              <a:t>CHAPTER 05</a:t>
+            </a:r>
+            <a:endParaRPr lang="en-US" sz="1150" dirty="0"/>
+          </a:p>
+        </p:txBody>
+      </p:sp>
+      <p:pic>
+        <p:nvPicPr>
+          <p:cNvPr id="8" name="Image 1" descr="/Users/danwahlin/.copilot/session-state/56a7a0da-def8-48d4-b5e8-0ac3878cb8dd/files/slides-build/icons/FaGithub-1F2328.png">
+            <a:hlinkClick r:id="rId3" tooltip="https://github.com/github/copilot-app-for-beginners/tree/main/05-mcp-plugins"/>
+          </p:cNvPr>
+          <p:cNvPicPr>
+            <a:picLocks noChangeAspect="1"/>
+          </p:cNvPicPr>
+          <p:nvPr/>
+        </p:nvPicPr>
+        <p:blipFill>
+          <a:blip r:embed="rId2"/>
+          <a:stretch>
+            <a:fillRect/>
+          </a:stretch>
+        </p:blipFill>
+        <p:spPr>
+          <a:xfrm>
             <a:off x="8610600" y="165050"/>
             <a:ext cx="304800" cy="304800"/>
           </a:xfrm>
@@ -10483,7 +10373,7 @@
       </p:pic>
       <p:sp>
         <p:nvSpPr>
-          <p:cNvPr id="8" name="Text 5"/>
+          <p:cNvPr id="9" name="Text 5"/>
           <p:cNvSpPr/>
           <p:nvPr/>
         </p:nvSpPr>
@@ -10522,7 +10412,7 @@
       </p:sp>
       <p:sp>
         <p:nvSpPr>
-          <p:cNvPr id="9" name="Text 6"/>
+          <p:cNvPr id="10" name="Text 6"/>
           <p:cNvSpPr/>
           <p:nvPr/>
         </p:nvSpPr>
@@ -10567,7 +10457,7 @@
       </p:sp>
       <p:sp>
         <p:nvSpPr>
-          <p:cNvPr id="10" name="Text 7"/>
+          <p:cNvPr id="11" name="Text 7"/>
           <p:cNvSpPr/>
           <p:nvPr/>
         </p:nvSpPr>
@@ -10599,7 +10489,7 @@
       </p:sp>
       <p:sp>
         <p:nvSpPr>
-          <p:cNvPr id="11" name="Text 8"/>
+          <p:cNvPr id="12" name="Text 8"/>
           <p:cNvSpPr/>
           <p:nvPr/>
         </p:nvSpPr>
@@ -10671,112 +10561,9 @@
           <a:chExt cx="0" cy="0"/>
         </a:xfrm>
       </p:grpSpPr>
-      <p:sp>
-        <p:nvSpPr>
-          <p:cNvPr id="2" name="Text 0"/>
-          <p:cNvSpPr/>
-          <p:nvPr/>
-        </p:nvSpPr>
-        <p:spPr>
-          <a:xfrm>
-            <a:off x="0" y="0"/>
-            <a:ext cx="9144000" cy="76200"/>
-          </a:xfrm>
-          <a:prstGeom prst="rect">
-            <a:avLst/>
-          </a:prstGeom>
-          <a:solidFill>
-            <a:srgbClr val="9A6700"/>
-          </a:solidFill>
-          <a:ln/>
-        </p:spPr>
-        <p:txBody>
-          <a:bodyPr wrap="square" rtlCol="0" anchor="ctr"/>
-          <a:lstStyle/>
-          <a:p>
-            <a:pPr indent="0" marL="0">
-              <a:buNone/>
-            </a:pPr>
-            <a:endParaRPr lang="en-US" dirty="0"/>
-          </a:p>
-        </p:txBody>
-      </p:sp>
-      <p:sp>
-        <p:nvSpPr>
-          <p:cNvPr id="3" name="Text 1"/>
-          <p:cNvSpPr/>
-          <p:nvPr/>
-        </p:nvSpPr>
-        <p:spPr>
-          <a:xfrm>
-            <a:off x="7340501" y="177701"/>
-            <a:ext cx="1168301" cy="279350"/>
-          </a:xfrm>
-          <a:prstGeom prst="roundRect">
-            <a:avLst>
-              <a:gd name="adj" fmla="val 22731"/>
-            </a:avLst>
-          </a:prstGeom>
-          <a:solidFill>
-            <a:srgbClr val="1A7F37"/>
-          </a:solidFill>
-          <a:ln/>
-        </p:spPr>
-        <p:txBody>
-          <a:bodyPr wrap="square" rtlCol="0" anchor="ctr"/>
-          <a:lstStyle/>
-          <a:p>
-            <a:pPr indent="0" marL="0">
-              <a:buNone/>
-            </a:pPr>
-            <a:endParaRPr lang="en-US" dirty="0"/>
-          </a:p>
-        </p:txBody>
-      </p:sp>
-      <p:sp>
-        <p:nvSpPr>
-          <p:cNvPr id="4" name="Text 2"/>
-          <p:cNvSpPr/>
-          <p:nvPr/>
-        </p:nvSpPr>
-        <p:spPr>
-          <a:xfrm>
-            <a:off x="7461041" y="231577"/>
-            <a:ext cx="927071" cy="171450"/>
-          </a:xfrm>
-          <a:prstGeom prst="rect">
-            <a:avLst/>
-          </a:prstGeom>
-          <a:noFill/>
-          <a:ln/>
-        </p:spPr>
-        <p:txBody>
-          <a:bodyPr wrap="square" lIns="0" tIns="0" rIns="0" bIns="0" rtlCol="0" anchor="t"/>
-          <a:lstStyle/>
-          <a:p>
-            <a:pPr algn="ctr" indent="0" marL="0">
-              <a:buNone/>
-            </a:pPr>
-            <a:r>
-              <a:rPr lang="en-US" sz="1150" b="1" dirty="0">
-                <a:solidFill>
-                  <a:srgbClr val="FFFFFF"/>
-                </a:solidFill>
-                <a:latin typeface="Arial" pitchFamily="34" charset="0"/>
-                <a:ea typeface="Arial" pitchFamily="34" charset="-122"/>
-                <a:cs typeface="Arial" pitchFamily="34" charset="-120"/>
-              </a:rPr>
-              <a:t>CHAPTER 05</a:t>
-            </a:r>
-            <a:endParaRPr lang="en-US" sz="1150" dirty="0"/>
-          </a:p>
-        </p:txBody>
-      </p:sp>
       <p:pic>
         <p:nvPicPr>
-          <p:cNvPr id="5" name="Image 0" descr="/Users/danwahlin/.copilot/session-state/56a7a0da-def8-48d4-b5e8-0ac3878cb8dd/files/slides-build/icons/FaGithub-1F2328.png">
-            <a:hlinkClick r:id="rId2" tooltip="https://github.com/github/copilot-app-for-beginners/tree/main/05-mcp-plugins"/>
-          </p:cNvPr>
+          <p:cNvPr id="2" name="Image 0" descr="/Users/danwahlin/.copilot/session-state/56a7a0da-def8-48d4-b5e8-0ac3878cb8dd/files/slides-build/img/grad-corner.png">    </p:cNvPr>
           <p:cNvPicPr>
             <a:picLocks noChangeAspect="1"/>
           </p:cNvPicPr>
@@ -10790,6 +10577,103 @@
         </p:blipFill>
         <p:spPr>
           <a:xfrm>
+            <a:off x="6349901" y="0"/>
+            <a:ext cx="2793950" cy="1308050"/>
+          </a:xfrm>
+          <a:prstGeom prst="rect">
+            <a:avLst/>
+          </a:prstGeom>
+        </p:spPr>
+      </p:pic>
+      <p:sp>
+        <p:nvSpPr>
+          <p:cNvPr id="3" name="Text 0"/>
+          <p:cNvSpPr/>
+          <p:nvPr/>
+        </p:nvSpPr>
+        <p:spPr>
+          <a:xfrm>
+            <a:off x="7340501" y="177701"/>
+            <a:ext cx="1168301" cy="279350"/>
+          </a:xfrm>
+          <a:prstGeom prst="roundRect">
+            <a:avLst>
+              <a:gd name="adj" fmla="val 22731"/>
+            </a:avLst>
+          </a:prstGeom>
+          <a:solidFill>
+            <a:srgbClr val="1A7F37"/>
+          </a:solidFill>
+          <a:ln/>
+        </p:spPr>
+        <p:txBody>
+          <a:bodyPr wrap="square" rtlCol="0" anchor="ctr"/>
+          <a:lstStyle/>
+          <a:p>
+            <a:pPr indent="0" marL="0">
+              <a:buNone/>
+            </a:pPr>
+            <a:endParaRPr lang="en-US" dirty="0"/>
+          </a:p>
+        </p:txBody>
+      </p:sp>
+      <p:sp>
+        <p:nvSpPr>
+          <p:cNvPr id="4" name="Text 1"/>
+          <p:cNvSpPr/>
+          <p:nvPr/>
+        </p:nvSpPr>
+        <p:spPr>
+          <a:xfrm>
+            <a:off x="7461041" y="231577"/>
+            <a:ext cx="927071" cy="171450"/>
+          </a:xfrm>
+          <a:prstGeom prst="rect">
+            <a:avLst/>
+          </a:prstGeom>
+          <a:noFill/>
+          <a:ln/>
+        </p:spPr>
+        <p:txBody>
+          <a:bodyPr wrap="square" lIns="0" tIns="0" rIns="0" bIns="0" rtlCol="0" anchor="t"/>
+          <a:lstStyle/>
+          <a:p>
+            <a:pPr algn="ctr" indent="0" marL="0">
+              <a:buNone/>
+            </a:pPr>
+            <a:r>
+              <a:rPr lang="en-US" sz="1150" b="1" dirty="0">
+                <a:solidFill>
+                  <a:srgbClr val="FFFFFF"/>
+                </a:solidFill>
+                <a:latin typeface="Arial" pitchFamily="34" charset="0"/>
+                <a:ea typeface="Arial" pitchFamily="34" charset="-122"/>
+                <a:cs typeface="Arial" pitchFamily="34" charset="-120"/>
+              </a:rPr>
+              <a:t>CHAPTER 05</a:t>
+            </a:r>
+            <a:endParaRPr lang="en-US" sz="1150" dirty="0"/>
+          </a:p>
+        </p:txBody>
+      </p:sp>
+      <p:pic>
+        <p:nvPicPr>
+          <p:cNvPr id="5" name="Image 1" descr="/Users/danwahlin/.copilot/session-state/56a7a0da-def8-48d4-b5e8-0ac3878cb8dd/files/slides-build/icons/FaGithub-1F2328.png">
+            <a:hlinkClick r:id="rId3" tooltip="https://github.com/github/copilot-app-for-beginners/tree/main/05-mcp-plugins"/>
+          </p:cNvPr>
+          <p:cNvPicPr>
+            <a:picLocks noChangeAspect="1"/>
+          </p:cNvPicPr>
+          <p:nvPr/>
+        </p:nvPicPr>
+        <p:blipFill>
+          <a:blip r:embed="rId2"/>
+          <a:stretch>
+            <a:fillRect/>
+          </a:stretch>
+        </p:blipFill>
+        <p:spPr>
+          <a:xfrm>
             <a:off x="8610600" y="165050"/>
             <a:ext cx="304800" cy="304800"/>
           </a:xfrm>
@@ -10800,7 +10684,7 @@
       </p:pic>
       <p:sp>
         <p:nvSpPr>
-          <p:cNvPr id="6" name="Text 3"/>
+          <p:cNvPr id="6" name="Text 2"/>
           <p:cNvSpPr/>
           <p:nvPr/>
         </p:nvSpPr>
@@ -10839,7 +10723,7 @@
       </p:sp>
       <p:sp>
         <p:nvSpPr>
-          <p:cNvPr id="7" name="Text 4"/>
+          <p:cNvPr id="7" name="Text 3"/>
           <p:cNvSpPr/>
           <p:nvPr/>
         </p:nvSpPr>
@@ -10884,7 +10768,7 @@
       </p:sp>
       <p:sp>
         <p:nvSpPr>
-          <p:cNvPr id="8" name="Text 5"/>
+          <p:cNvPr id="8" name="Text 4"/>
           <p:cNvSpPr/>
           <p:nvPr/>
         </p:nvSpPr>
@@ -10929,7 +10813,7 @@
       </p:sp>
       <p:sp>
         <p:nvSpPr>
-          <p:cNvPr id="9" name="Text 6"/>
+          <p:cNvPr id="9" name="Text 5"/>
           <p:cNvSpPr/>
           <p:nvPr/>
         </p:nvSpPr>
@@ -10972,63 +10856,7 @@
       </p:sp>
       <p:pic>
         <p:nvPicPr>
-          <p:cNvPr id="10" name="Image 1" descr="/Users/danwahlin/.copilot/session-state/56a7a0da-def8-48d4-b5e8-0ac3878cb8dd/files/slides-build/img/05-browser-extensions-analogy.jpg">    </p:cNvPr>
-          <p:cNvPicPr>
-            <a:picLocks noChangeAspect="1"/>
-          </p:cNvPicPr>
-          <p:nvPr/>
-        </p:nvPicPr>
-        <p:blipFill>
-          <a:blip r:embed="rId3"/>
-          <a:stretch>
-            <a:fillRect/>
-          </a:stretch>
-        </p:blipFill>
-        <p:spPr>
-          <a:xfrm>
-            <a:off x="558701" y="1747986"/>
-            <a:ext cx="4089350" cy="2726680"/>
-          </a:xfrm>
-          <a:prstGeom prst="rect">
-            <a:avLst/>
-          </a:prstGeom>
-        </p:spPr>
-      </p:pic>
-      <p:sp>
-        <p:nvSpPr>
-          <p:cNvPr id="11" name="Text 7"/>
-          <p:cNvSpPr/>
-          <p:nvPr/>
-        </p:nvSpPr>
-        <p:spPr>
-          <a:xfrm>
-            <a:off x="5003750" y="1986260"/>
-            <a:ext cx="381000" cy="381000"/>
-          </a:xfrm>
-          <a:prstGeom prst="roundRect">
-            <a:avLst>
-              <a:gd name="adj" fmla="val 23333"/>
-            </a:avLst>
-          </a:prstGeom>
-          <a:solidFill>
-            <a:srgbClr val="DDF4FF"/>
-          </a:solidFill>
-          <a:ln/>
-        </p:spPr>
-        <p:txBody>
-          <a:bodyPr wrap="square" rtlCol="0" anchor="ctr"/>
-          <a:lstStyle/>
-          <a:p>
-            <a:pPr indent="0" marL="0">
-              <a:buNone/>
-            </a:pPr>
-            <a:endParaRPr lang="en-US" dirty="0"/>
-          </a:p>
-        </p:txBody>
-      </p:sp>
-      <p:pic>
-        <p:nvPicPr>
-          <p:cNvPr id="12" name="Image 2" descr="/Users/danwahlin/.copilot/session-state/56a7a0da-def8-48d4-b5e8-0ac3878cb8dd/files/slides-build/icons/GoPlug-0969DA.png">    </p:cNvPr>
+          <p:cNvPr id="10" name="Image 2" descr="/Users/danwahlin/.copilot/session-state/56a7a0da-def8-48d4-b5e8-0ac3878cb8dd/files/slides-build/img/05-browser-extensions-analogy.jpg">    </p:cNvPr>
           <p:cNvPicPr>
             <a:picLocks noChangeAspect="1"/>
           </p:cNvPicPr>
@@ -11042,8 +10870,8 @@
         </p:blipFill>
         <p:spPr>
           <a:xfrm>
-            <a:off x="5086350" y="2068860"/>
-            <a:ext cx="215801" cy="215801"/>
+            <a:off x="558701" y="1747986"/>
+            <a:ext cx="4089350" cy="2726680"/>
           </a:xfrm>
           <a:prstGeom prst="rect">
             <a:avLst/>
@@ -11052,94 +10880,13 @@
       </p:pic>
       <p:sp>
         <p:nvSpPr>
-          <p:cNvPr id="13" name="Text 8"/>
-          <p:cNvSpPr/>
-          <p:nvPr/>
-        </p:nvSpPr>
-        <p:spPr>
-          <a:xfrm>
-            <a:off x="5537150" y="1950839"/>
-            <a:ext cx="2420678" cy="228600"/>
-          </a:xfrm>
-          <a:prstGeom prst="rect">
-            <a:avLst/>
-          </a:prstGeom>
-          <a:noFill/>
-          <a:ln/>
-        </p:spPr>
-        <p:txBody>
-          <a:bodyPr wrap="square" lIns="0" tIns="0" rIns="0" bIns="0" rtlCol="0" anchor="t"/>
-          <a:lstStyle/>
-          <a:p>
-            <a:pPr algn="l" indent="0" marL="0">
-              <a:buNone/>
-            </a:pPr>
-            <a:r>
-              <a:rPr lang="en-US" sz="1550" b="1" dirty="0">
-                <a:solidFill>
-                  <a:srgbClr val="1F2328"/>
-                </a:solidFill>
-                <a:latin typeface="Arial" pitchFamily="34" charset="0"/>
-                <a:ea typeface="Arial" pitchFamily="34" charset="-122"/>
-                <a:cs typeface="Arial" pitchFamily="34" charset="-120"/>
-              </a:rPr>
-              <a:t>The server supplies tools</a:t>
-            </a:r>
-            <a:endParaRPr lang="en-US" sz="1550" dirty="0"/>
-          </a:p>
-        </p:txBody>
-      </p:sp>
-      <p:sp>
-        <p:nvSpPr>
-          <p:cNvPr id="14" name="Text 9"/>
-          <p:cNvSpPr/>
-          <p:nvPr/>
-        </p:nvSpPr>
-        <p:spPr>
-          <a:xfrm>
-            <a:off x="5537150" y="2204740"/>
-            <a:ext cx="2420678" cy="198090"/>
-          </a:xfrm>
-          <a:prstGeom prst="rect">
-            <a:avLst/>
-          </a:prstGeom>
-          <a:noFill/>
-          <a:ln/>
-        </p:spPr>
-        <p:txBody>
-          <a:bodyPr wrap="square" lIns="0" tIns="0" rIns="0" bIns="0" rtlCol="0" anchor="t"/>
-          <a:lstStyle/>
-          <a:p>
-            <a:pPr algn="l" indent="0" marL="0">
-              <a:lnSpc>
-                <a:spcPts val="1560"/>
-              </a:lnSpc>
-              <a:buNone/>
-            </a:pPr>
-            <a:r>
-              <a:rPr lang="en-US" sz="1350" dirty="0">
-                <a:solidFill>
-                  <a:srgbClr val="59636E"/>
-                </a:solidFill>
-                <a:latin typeface="Arial" pitchFamily="34" charset="0"/>
-                <a:ea typeface="Arial" pitchFamily="34" charset="-122"/>
-                <a:cs typeface="Arial" pitchFamily="34" charset="-120"/>
-              </a:rPr>
-              <a:t>Local or hosted at a service.</a:t>
-            </a:r>
-            <a:endParaRPr lang="en-US" sz="1350" dirty="0"/>
-          </a:p>
-        </p:txBody>
-      </p:sp>
-      <p:sp>
-        <p:nvSpPr>
-          <p:cNvPr id="15" name="Text 10"/>
-          <p:cNvSpPr/>
-          <p:nvPr/>
-        </p:nvSpPr>
-        <p:spPr>
-          <a:xfrm>
-            <a:off x="5003750" y="2920752"/>
+          <p:cNvPr id="11" name="Text 6"/>
+          <p:cNvSpPr/>
+          <p:nvPr/>
+        </p:nvSpPr>
+        <p:spPr>
+          <a:xfrm>
+            <a:off x="5003750" y="1986260"/>
             <a:ext cx="381000" cy="381000"/>
           </a:xfrm>
           <a:prstGeom prst="roundRect">
@@ -11165,7 +10912,7 @@
       </p:sp>
       <p:pic>
         <p:nvPicPr>
-          <p:cNvPr id="16" name="Image 3" descr="/Users/danwahlin/.copilot/session-state/56a7a0da-def8-48d4-b5e8-0ac3878cb8dd/files/slides-build/icons/GoBook-0969DA.png">    </p:cNvPr>
+          <p:cNvPr id="12" name="Image 3" descr="/Users/danwahlin/.copilot/session-state/56a7a0da-def8-48d4-b5e8-0ac3878cb8dd/files/slides-build/icons/GoPlug-0969DA.png">    </p:cNvPr>
           <p:cNvPicPr>
             <a:picLocks noChangeAspect="1"/>
           </p:cNvPicPr>
@@ -11179,7 +10926,7 @@
         </p:blipFill>
         <p:spPr>
           <a:xfrm>
-            <a:off x="5086350" y="3003352"/>
+            <a:off x="5086350" y="2068860"/>
             <a:ext cx="215801" cy="215801"/>
           </a:xfrm>
           <a:prstGeom prst="rect">
@@ -11189,14 +10936,14 @@
       </p:pic>
       <p:sp>
         <p:nvSpPr>
-          <p:cNvPr id="17" name="Text 11"/>
-          <p:cNvSpPr/>
-          <p:nvPr/>
-        </p:nvSpPr>
-        <p:spPr>
-          <a:xfrm>
-            <a:off x="5537150" y="2885331"/>
-            <a:ext cx="2333086" cy="228600"/>
+          <p:cNvPr id="13" name="Text 7"/>
+          <p:cNvSpPr/>
+          <p:nvPr/>
+        </p:nvSpPr>
+        <p:spPr>
+          <a:xfrm>
+            <a:off x="5537150" y="1950839"/>
+            <a:ext cx="2420678" cy="228600"/>
           </a:xfrm>
           <a:prstGeom prst="rect">
             <a:avLst/>
@@ -11220,7 +10967,7 @@
                 <a:ea typeface="Arial" pitchFamily="34" charset="-122"/>
                 <a:cs typeface="Arial" pitchFamily="34" charset="-120"/>
               </a:rPr>
-              <a:t>Context7 supplies docs</a:t>
+              <a:t>The server supplies tools</a:t>
             </a:r>
             <a:endParaRPr lang="en-US" sz="1550" dirty="0"/>
           </a:p>
@@ -11228,14 +10975,14 @@
       </p:sp>
       <p:sp>
         <p:nvSpPr>
-          <p:cNvPr id="18" name="Text 12"/>
-          <p:cNvSpPr/>
-          <p:nvPr/>
-        </p:nvSpPr>
-        <p:spPr>
-          <a:xfrm>
-            <a:off x="5537150" y="3139232"/>
-            <a:ext cx="2333086" cy="198090"/>
+          <p:cNvPr id="14" name="Text 8"/>
+          <p:cNvSpPr/>
+          <p:nvPr/>
+        </p:nvSpPr>
+        <p:spPr>
+          <a:xfrm>
+            <a:off x="5537150" y="2204740"/>
+            <a:ext cx="2420678" cy="198090"/>
           </a:xfrm>
           <a:prstGeom prst="rect">
             <a:avLst/>
@@ -11262,7 +11009,7 @@
                 <a:ea typeface="Arial" pitchFamily="34" charset="-122"/>
                 <a:cs typeface="Arial" pitchFamily="34" charset="-120"/>
               </a:rPr>
-              <a:t>Current React documentation.</a:t>
+              <a:t>Local or hosted at a service.</a:t>
             </a:r>
             <a:endParaRPr lang="en-US" sz="1350" dirty="0"/>
           </a:p>
@@ -11270,13 +11017,13 @@
       </p:sp>
       <p:sp>
         <p:nvSpPr>
-          <p:cNvPr id="19" name="Text 13"/>
-          <p:cNvSpPr/>
-          <p:nvPr/>
-        </p:nvSpPr>
-        <p:spPr>
-          <a:xfrm>
-            <a:off x="5003750" y="3855244"/>
+          <p:cNvPr id="15" name="Text 9"/>
+          <p:cNvSpPr/>
+          <p:nvPr/>
+        </p:nvSpPr>
+        <p:spPr>
+          <a:xfrm>
+            <a:off x="5003750" y="2920752"/>
             <a:ext cx="381000" cy="381000"/>
           </a:xfrm>
           <a:prstGeom prst="roundRect">
@@ -11302,7 +11049,7 @@
       </p:sp>
       <p:pic>
         <p:nvPicPr>
-          <p:cNvPr id="20" name="Image 4" descr="/Users/danwahlin/.copilot/session-state/56a7a0da-def8-48d4-b5e8-0ac3878cb8dd/files/slides-build/icons/GoPackage-0969DA.png">    </p:cNvPr>
+          <p:cNvPr id="16" name="Image 4" descr="/Users/danwahlin/.copilot/session-state/56a7a0da-def8-48d4-b5e8-0ac3878cb8dd/files/slides-build/icons/GoBook-0969DA.png">    </p:cNvPr>
           <p:cNvPicPr>
             <a:picLocks noChangeAspect="1"/>
           </p:cNvPicPr>
@@ -11316,6 +11063,143 @@
         </p:blipFill>
         <p:spPr>
           <a:xfrm>
+            <a:off x="5086350" y="3003352"/>
+            <a:ext cx="215801" cy="215801"/>
+          </a:xfrm>
+          <a:prstGeom prst="rect">
+            <a:avLst/>
+          </a:prstGeom>
+        </p:spPr>
+      </p:pic>
+      <p:sp>
+        <p:nvSpPr>
+          <p:cNvPr id="17" name="Text 10"/>
+          <p:cNvSpPr/>
+          <p:nvPr/>
+        </p:nvSpPr>
+        <p:spPr>
+          <a:xfrm>
+            <a:off x="5537150" y="2885331"/>
+            <a:ext cx="2333086" cy="228600"/>
+          </a:xfrm>
+          <a:prstGeom prst="rect">
+            <a:avLst/>
+          </a:prstGeom>
+          <a:noFill/>
+          <a:ln/>
+        </p:spPr>
+        <p:txBody>
+          <a:bodyPr wrap="square" lIns="0" tIns="0" rIns="0" bIns="0" rtlCol="0" anchor="t"/>
+          <a:lstStyle/>
+          <a:p>
+            <a:pPr algn="l" indent="0" marL="0">
+              <a:buNone/>
+            </a:pPr>
+            <a:r>
+              <a:rPr lang="en-US" sz="1550" b="1" dirty="0">
+                <a:solidFill>
+                  <a:srgbClr val="1F2328"/>
+                </a:solidFill>
+                <a:latin typeface="Arial" pitchFamily="34" charset="0"/>
+                <a:ea typeface="Arial" pitchFamily="34" charset="-122"/>
+                <a:cs typeface="Arial" pitchFamily="34" charset="-120"/>
+              </a:rPr>
+              <a:t>Context7 supplies docs</a:t>
+            </a:r>
+            <a:endParaRPr lang="en-US" sz="1550" dirty="0"/>
+          </a:p>
+        </p:txBody>
+      </p:sp>
+      <p:sp>
+        <p:nvSpPr>
+          <p:cNvPr id="18" name="Text 11"/>
+          <p:cNvSpPr/>
+          <p:nvPr/>
+        </p:nvSpPr>
+        <p:spPr>
+          <a:xfrm>
+            <a:off x="5537150" y="3139232"/>
+            <a:ext cx="2333086" cy="198090"/>
+          </a:xfrm>
+          <a:prstGeom prst="rect">
+            <a:avLst/>
+          </a:prstGeom>
+          <a:noFill/>
+          <a:ln/>
+        </p:spPr>
+        <p:txBody>
+          <a:bodyPr wrap="square" lIns="0" tIns="0" rIns="0" bIns="0" rtlCol="0" anchor="t"/>
+          <a:lstStyle/>
+          <a:p>
+            <a:pPr algn="l" indent="0" marL="0">
+              <a:lnSpc>
+                <a:spcPts val="1560"/>
+              </a:lnSpc>
+              <a:buNone/>
+            </a:pPr>
+            <a:r>
+              <a:rPr lang="en-US" sz="1350" dirty="0">
+                <a:solidFill>
+                  <a:srgbClr val="59636E"/>
+                </a:solidFill>
+                <a:latin typeface="Arial" pitchFamily="34" charset="0"/>
+                <a:ea typeface="Arial" pitchFamily="34" charset="-122"/>
+                <a:cs typeface="Arial" pitchFamily="34" charset="-120"/>
+              </a:rPr>
+              <a:t>Current React documentation.</a:t>
+            </a:r>
+            <a:endParaRPr lang="en-US" sz="1350" dirty="0"/>
+          </a:p>
+        </p:txBody>
+      </p:sp>
+      <p:sp>
+        <p:nvSpPr>
+          <p:cNvPr id="19" name="Text 12"/>
+          <p:cNvSpPr/>
+          <p:nvPr/>
+        </p:nvSpPr>
+        <p:spPr>
+          <a:xfrm>
+            <a:off x="5003750" y="3855244"/>
+            <a:ext cx="381000" cy="381000"/>
+          </a:xfrm>
+          <a:prstGeom prst="roundRect">
+            <a:avLst>
+              <a:gd name="adj" fmla="val 23333"/>
+            </a:avLst>
+          </a:prstGeom>
+          <a:solidFill>
+            <a:srgbClr val="DDF4FF"/>
+          </a:solidFill>
+          <a:ln/>
+        </p:spPr>
+        <p:txBody>
+          <a:bodyPr wrap="square" rtlCol="0" anchor="ctr"/>
+          <a:lstStyle/>
+          <a:p>
+            <a:pPr indent="0" marL="0">
+              <a:buNone/>
+            </a:pPr>
+            <a:endParaRPr lang="en-US" dirty="0"/>
+          </a:p>
+        </p:txBody>
+      </p:sp>
+      <p:pic>
+        <p:nvPicPr>
+          <p:cNvPr id="20" name="Image 5" descr="/Users/danwahlin/.copilot/session-state/56a7a0da-def8-48d4-b5e8-0ac3878cb8dd/files/slides-build/icons/GoPackage-0969DA.png">    </p:cNvPr>
+          <p:cNvPicPr>
+            <a:picLocks noChangeAspect="1"/>
+          </p:cNvPicPr>
+          <p:nvPr/>
+        </p:nvPicPr>
+        <p:blipFill>
+          <a:blip r:embed="rId7"/>
+          <a:stretch>
+            <a:fillRect/>
+          </a:stretch>
+        </p:blipFill>
+        <p:spPr>
+          <a:xfrm>
             <a:off x="5086350" y="3937843"/>
             <a:ext cx="215801" cy="215801"/>
           </a:xfrm>
@@ -11326,7 +11210,7 @@
       </p:pic>
       <p:sp>
         <p:nvSpPr>
-          <p:cNvPr id="21" name="Text 14"/>
+          <p:cNvPr id="21" name="Text 13"/>
           <p:cNvSpPr/>
           <p:nvPr/>
         </p:nvSpPr>
@@ -11365,7 +11249,7 @@
       </p:sp>
       <p:sp>
         <p:nvSpPr>
-          <p:cNvPr id="22" name="Text 15"/>
+          <p:cNvPr id="22" name="Text 14"/>
           <p:cNvSpPr/>
           <p:nvPr/>
         </p:nvSpPr>
@@ -11437,112 +11321,9 @@
           <a:chExt cx="0" cy="0"/>
         </a:xfrm>
       </p:grpSpPr>
-      <p:sp>
-        <p:nvSpPr>
-          <p:cNvPr id="2" name="Text 0"/>
-          <p:cNvSpPr/>
-          <p:nvPr/>
-        </p:nvSpPr>
-        <p:spPr>
-          <a:xfrm>
-            <a:off x="0" y="0"/>
-            <a:ext cx="9144000" cy="76200"/>
-          </a:xfrm>
-          <a:prstGeom prst="rect">
-            <a:avLst/>
-          </a:prstGeom>
-          <a:solidFill>
-            <a:srgbClr val="0969DA"/>
-          </a:solidFill>
-          <a:ln/>
-        </p:spPr>
-        <p:txBody>
-          <a:bodyPr wrap="square" rtlCol="0" anchor="ctr"/>
-          <a:lstStyle/>
-          <a:p>
-            <a:pPr indent="0" marL="0">
-              <a:buNone/>
-            </a:pPr>
-            <a:endParaRPr lang="en-US" dirty="0"/>
-          </a:p>
-        </p:txBody>
-      </p:sp>
-      <p:sp>
-        <p:nvSpPr>
-          <p:cNvPr id="3" name="Text 1"/>
-          <p:cNvSpPr/>
-          <p:nvPr/>
-        </p:nvSpPr>
-        <p:spPr>
-          <a:xfrm>
-            <a:off x="7340501" y="177701"/>
-            <a:ext cx="1168301" cy="279350"/>
-          </a:xfrm>
-          <a:prstGeom prst="roundRect">
-            <a:avLst>
-              <a:gd name="adj" fmla="val 22731"/>
-            </a:avLst>
-          </a:prstGeom>
-          <a:solidFill>
-            <a:srgbClr val="1A7F37"/>
-          </a:solidFill>
-          <a:ln/>
-        </p:spPr>
-        <p:txBody>
-          <a:bodyPr wrap="square" rtlCol="0" anchor="ctr"/>
-          <a:lstStyle/>
-          <a:p>
-            <a:pPr indent="0" marL="0">
-              <a:buNone/>
-            </a:pPr>
-            <a:endParaRPr lang="en-US" dirty="0"/>
-          </a:p>
-        </p:txBody>
-      </p:sp>
-      <p:sp>
-        <p:nvSpPr>
-          <p:cNvPr id="4" name="Text 2"/>
-          <p:cNvSpPr/>
-          <p:nvPr/>
-        </p:nvSpPr>
-        <p:spPr>
-          <a:xfrm>
-            <a:off x="7461041" y="231577"/>
-            <a:ext cx="927071" cy="171450"/>
-          </a:xfrm>
-          <a:prstGeom prst="rect">
-            <a:avLst/>
-          </a:prstGeom>
-          <a:noFill/>
-          <a:ln/>
-        </p:spPr>
-        <p:txBody>
-          <a:bodyPr wrap="square" lIns="0" tIns="0" rIns="0" bIns="0" rtlCol="0" anchor="t"/>
-          <a:lstStyle/>
-          <a:p>
-            <a:pPr algn="ctr" indent="0" marL="0">
-              <a:buNone/>
-            </a:pPr>
-            <a:r>
-              <a:rPr lang="en-US" sz="1150" b="1" dirty="0">
-                <a:solidFill>
-                  <a:srgbClr val="FFFFFF"/>
-                </a:solidFill>
-                <a:latin typeface="Arial" pitchFamily="34" charset="0"/>
-                <a:ea typeface="Arial" pitchFamily="34" charset="-122"/>
-                <a:cs typeface="Arial" pitchFamily="34" charset="-120"/>
-              </a:rPr>
-              <a:t>CHAPTER 05</a:t>
-            </a:r>
-            <a:endParaRPr lang="en-US" sz="1150" dirty="0"/>
-          </a:p>
-        </p:txBody>
-      </p:sp>
       <p:pic>
         <p:nvPicPr>
-          <p:cNvPr id="5" name="Image 0" descr="/Users/danwahlin/.copilot/session-state/56a7a0da-def8-48d4-b5e8-0ac3878cb8dd/files/slides-build/icons/FaGithub-1F2328.png">
-            <a:hlinkClick r:id="rId2" tooltip="https://github.com/github/copilot-app-for-beginners/tree/main/05-mcp-plugins"/>
-          </p:cNvPr>
+          <p:cNvPr id="2" name="Image 0" descr="/Users/danwahlin/.copilot/session-state/56a7a0da-def8-48d4-b5e8-0ac3878cb8dd/files/slides-build/img/grad-corner.png">    </p:cNvPr>
           <p:cNvPicPr>
             <a:picLocks noChangeAspect="1"/>
           </p:cNvPicPr>
@@ -11556,6 +11337,103 @@
         </p:blipFill>
         <p:spPr>
           <a:xfrm>
+            <a:off x="6349901" y="0"/>
+            <a:ext cx="2793950" cy="1308050"/>
+          </a:xfrm>
+          <a:prstGeom prst="rect">
+            <a:avLst/>
+          </a:prstGeom>
+        </p:spPr>
+      </p:pic>
+      <p:sp>
+        <p:nvSpPr>
+          <p:cNvPr id="3" name="Text 0"/>
+          <p:cNvSpPr/>
+          <p:nvPr/>
+        </p:nvSpPr>
+        <p:spPr>
+          <a:xfrm>
+            <a:off x="7340501" y="177701"/>
+            <a:ext cx="1168301" cy="279350"/>
+          </a:xfrm>
+          <a:prstGeom prst="roundRect">
+            <a:avLst>
+              <a:gd name="adj" fmla="val 22731"/>
+            </a:avLst>
+          </a:prstGeom>
+          <a:solidFill>
+            <a:srgbClr val="1A7F37"/>
+          </a:solidFill>
+          <a:ln/>
+        </p:spPr>
+        <p:txBody>
+          <a:bodyPr wrap="square" rtlCol="0" anchor="ctr"/>
+          <a:lstStyle/>
+          <a:p>
+            <a:pPr indent="0" marL="0">
+              <a:buNone/>
+            </a:pPr>
+            <a:endParaRPr lang="en-US" dirty="0"/>
+          </a:p>
+        </p:txBody>
+      </p:sp>
+      <p:sp>
+        <p:nvSpPr>
+          <p:cNvPr id="4" name="Text 1"/>
+          <p:cNvSpPr/>
+          <p:nvPr/>
+        </p:nvSpPr>
+        <p:spPr>
+          <a:xfrm>
+            <a:off x="7461041" y="231577"/>
+            <a:ext cx="927071" cy="171450"/>
+          </a:xfrm>
+          <a:prstGeom prst="rect">
+            <a:avLst/>
+          </a:prstGeom>
+          <a:noFill/>
+          <a:ln/>
+        </p:spPr>
+        <p:txBody>
+          <a:bodyPr wrap="square" lIns="0" tIns="0" rIns="0" bIns="0" rtlCol="0" anchor="t"/>
+          <a:lstStyle/>
+          <a:p>
+            <a:pPr algn="ctr" indent="0" marL="0">
+              <a:buNone/>
+            </a:pPr>
+            <a:r>
+              <a:rPr lang="en-US" sz="1150" b="1" dirty="0">
+                <a:solidFill>
+                  <a:srgbClr val="FFFFFF"/>
+                </a:solidFill>
+                <a:latin typeface="Arial" pitchFamily="34" charset="0"/>
+                <a:ea typeface="Arial" pitchFamily="34" charset="-122"/>
+                <a:cs typeface="Arial" pitchFamily="34" charset="-120"/>
+              </a:rPr>
+              <a:t>CHAPTER 05</a:t>
+            </a:r>
+            <a:endParaRPr lang="en-US" sz="1150" dirty="0"/>
+          </a:p>
+        </p:txBody>
+      </p:sp>
+      <p:pic>
+        <p:nvPicPr>
+          <p:cNvPr id="5" name="Image 1" descr="/Users/danwahlin/.copilot/session-state/56a7a0da-def8-48d4-b5e8-0ac3878cb8dd/files/slides-build/icons/FaGithub-1F2328.png">
+            <a:hlinkClick r:id="rId3" tooltip="https://github.com/github/copilot-app-for-beginners/tree/main/05-mcp-plugins"/>
+          </p:cNvPr>
+          <p:cNvPicPr>
+            <a:picLocks noChangeAspect="1"/>
+          </p:cNvPicPr>
+          <p:nvPr/>
+        </p:nvPicPr>
+        <p:blipFill>
+          <a:blip r:embed="rId2"/>
+          <a:stretch>
+            <a:fillRect/>
+          </a:stretch>
+        </p:blipFill>
+        <p:spPr>
+          <a:xfrm>
             <a:off x="8610600" y="165050"/>
             <a:ext cx="304800" cy="304800"/>
           </a:xfrm>
@@ -11566,7 +11444,7 @@
       </p:pic>
       <p:sp>
         <p:nvSpPr>
-          <p:cNvPr id="6" name="Text 3"/>
+          <p:cNvPr id="6" name="Text 2"/>
           <p:cNvSpPr/>
           <p:nvPr/>
         </p:nvSpPr>
@@ -11605,7 +11483,7 @@
       </p:sp>
       <p:sp>
         <p:nvSpPr>
-          <p:cNvPr id="7" name="Text 4"/>
+          <p:cNvPr id="7" name="Text 3"/>
           <p:cNvSpPr/>
           <p:nvPr/>
         </p:nvSpPr>
@@ -11650,7 +11528,7 @@
       </p:sp>
       <p:sp>
         <p:nvSpPr>
-          <p:cNvPr id="8" name="Text 5"/>
+          <p:cNvPr id="8" name="Text 4"/>
           <p:cNvSpPr/>
           <p:nvPr/>
         </p:nvSpPr>
@@ -11695,7 +11573,7 @@
       </p:sp>
       <p:sp>
         <p:nvSpPr>
-          <p:cNvPr id="9" name="Text 6"/>
+          <p:cNvPr id="9" name="Text 5"/>
           <p:cNvSpPr/>
           <p:nvPr/>
         </p:nvSpPr>
@@ -11738,14 +11616,14 @@
       </p:sp>
       <p:pic>
         <p:nvPicPr>
-          <p:cNvPr id="10" name="Image 1" descr="/Users/danwahlin/.copilot/session-state/56a7a0da-def8-48d4-b5e8-0ac3878cb8dd/files/slides-build/img/05-context7-crop.png">    </p:cNvPr>
+          <p:cNvPr id="10" name="Image 2" descr="/Users/danwahlin/.copilot/session-state/56a7a0da-def8-48d4-b5e8-0ac3878cb8dd/files/slides-build/img/05-context7-crop.png">    </p:cNvPr>
           <p:cNvPicPr>
             <a:picLocks noChangeAspect="1"/>
           </p:cNvPicPr>
           <p:nvPr/>
         </p:nvPicPr>
         <p:blipFill>
-          <a:blip r:embed="rId3"/>
+          <a:blip r:embed="rId4"/>
           <a:stretch>
             <a:fillRect/>
           </a:stretch>
@@ -11762,7 +11640,7 @@
       </p:pic>
       <p:sp>
         <p:nvSpPr>
-          <p:cNvPr id="11" name="Text 7"/>
+          <p:cNvPr id="11" name="Text 6"/>
           <p:cNvSpPr/>
           <p:nvPr/>
         </p:nvSpPr>
@@ -11798,7 +11676,7 @@
       </p:sp>
       <p:sp>
         <p:nvSpPr>
-          <p:cNvPr id="12" name="Text 8"/>
+          <p:cNvPr id="12" name="Text 7"/>
           <p:cNvSpPr/>
           <p:nvPr/>
         </p:nvSpPr>
@@ -11830,7 +11708,7 @@
       </p:sp>
       <p:sp>
         <p:nvSpPr>
-          <p:cNvPr id="13" name="Text 9"/>
+          <p:cNvPr id="13" name="Text 8"/>
           <p:cNvSpPr/>
           <p:nvPr/>
         </p:nvSpPr>
@@ -11869,7 +11747,7 @@
       </p:sp>
       <p:sp>
         <p:nvSpPr>
-          <p:cNvPr id="14" name="Text 10"/>
+          <p:cNvPr id="14" name="Text 9"/>
           <p:cNvSpPr/>
           <p:nvPr/>
         </p:nvSpPr>
@@ -11911,7 +11789,7 @@
       </p:sp>
       <p:sp>
         <p:nvSpPr>
-          <p:cNvPr id="15" name="Text 11"/>
+          <p:cNvPr id="15" name="Text 10"/>
           <p:cNvSpPr/>
           <p:nvPr/>
         </p:nvSpPr>
@@ -12021,7 +11899,7 @@
       </p:sp>
       <p:sp>
         <p:nvSpPr>
-          <p:cNvPr id="16" name="Text 12"/>
+          <p:cNvPr id="16" name="Text 11"/>
           <p:cNvSpPr/>
           <p:nvPr/>
         </p:nvSpPr>
@@ -12057,7 +11935,7 @@
       </p:sp>
       <p:sp>
         <p:nvSpPr>
-          <p:cNvPr id="17" name="Text 13"/>
+          <p:cNvPr id="17" name="Text 12"/>
           <p:cNvSpPr/>
           <p:nvPr/>
         </p:nvSpPr>
@@ -12089,7 +11967,7 @@
       </p:sp>
       <p:sp>
         <p:nvSpPr>
-          <p:cNvPr id="18" name="Text 14"/>
+          <p:cNvPr id="18" name="Text 13"/>
           <p:cNvSpPr/>
           <p:nvPr/>
         </p:nvSpPr>
@@ -12128,7 +12006,7 @@
       </p:sp>
       <p:sp>
         <p:nvSpPr>
-          <p:cNvPr id="19" name="Text 15"/>
+          <p:cNvPr id="19" name="Text 14"/>
           <p:cNvSpPr/>
           <p:nvPr/>
         </p:nvSpPr>
@@ -12170,7 +12048,7 @@
       </p:sp>
       <p:sp>
         <p:nvSpPr>
-          <p:cNvPr id="20" name="Text 16"/>
+          <p:cNvPr id="20" name="Text 15"/>
           <p:cNvSpPr/>
           <p:nvPr/>
         </p:nvSpPr>
@@ -12229,7 +12107,7 @@
       </p:sp>
       <p:sp>
         <p:nvSpPr>
-          <p:cNvPr id="21" name="Text 17"/>
+          <p:cNvPr id="21" name="Text 16"/>
           <p:cNvSpPr/>
           <p:nvPr/>
         </p:nvSpPr>
@@ -12265,7 +12143,7 @@
       </p:sp>
       <p:sp>
         <p:nvSpPr>
-          <p:cNvPr id="22" name="Text 18"/>
+          <p:cNvPr id="22" name="Text 17"/>
           <p:cNvSpPr/>
           <p:nvPr/>
         </p:nvSpPr>
@@ -12297,7 +12175,7 @@
       </p:sp>
       <p:sp>
         <p:nvSpPr>
-          <p:cNvPr id="23" name="Text 19"/>
+          <p:cNvPr id="23" name="Text 18"/>
           <p:cNvSpPr/>
           <p:nvPr/>
         </p:nvSpPr>
@@ -12336,7 +12214,7 @@
       </p:sp>
       <p:sp>
         <p:nvSpPr>
-          <p:cNvPr id="24" name="Text 20"/>
+          <p:cNvPr id="24" name="Text 19"/>
           <p:cNvSpPr/>
           <p:nvPr/>
         </p:nvSpPr>
@@ -12378,7 +12256,7 @@
       </p:sp>
       <p:sp>
         <p:nvSpPr>
-          <p:cNvPr id="25" name="Text 21"/>
+          <p:cNvPr id="25" name="Text 20"/>
           <p:cNvSpPr/>
           <p:nvPr/>
         </p:nvSpPr>
@@ -12450,112 +12328,9 @@
           <a:chExt cx="0" cy="0"/>
         </a:xfrm>
       </p:grpSpPr>
-      <p:sp>
-        <p:nvSpPr>
-          <p:cNvPr id="2" name="Text 0"/>
-          <p:cNvSpPr/>
-          <p:nvPr/>
-        </p:nvSpPr>
-        <p:spPr>
-          <a:xfrm>
-            <a:off x="0" y="0"/>
-            <a:ext cx="9144000" cy="76200"/>
-          </a:xfrm>
-          <a:prstGeom prst="rect">
-            <a:avLst/>
-          </a:prstGeom>
-          <a:solidFill>
-            <a:srgbClr val="0969DA"/>
-          </a:solidFill>
-          <a:ln/>
-        </p:spPr>
-        <p:txBody>
-          <a:bodyPr wrap="square" rtlCol="0" anchor="ctr"/>
-          <a:lstStyle/>
-          <a:p>
-            <a:pPr indent="0" marL="0">
-              <a:buNone/>
-            </a:pPr>
-            <a:endParaRPr lang="en-US" dirty="0"/>
-          </a:p>
-        </p:txBody>
-      </p:sp>
-      <p:sp>
-        <p:nvSpPr>
-          <p:cNvPr id="3" name="Text 1"/>
-          <p:cNvSpPr/>
-          <p:nvPr/>
-        </p:nvSpPr>
-        <p:spPr>
-          <a:xfrm>
-            <a:off x="7340501" y="177701"/>
-            <a:ext cx="1168301" cy="279350"/>
-          </a:xfrm>
-          <a:prstGeom prst="roundRect">
-            <a:avLst>
-              <a:gd name="adj" fmla="val 22731"/>
-            </a:avLst>
-          </a:prstGeom>
-          <a:solidFill>
-            <a:srgbClr val="1A7F37"/>
-          </a:solidFill>
-          <a:ln/>
-        </p:spPr>
-        <p:txBody>
-          <a:bodyPr wrap="square" rtlCol="0" anchor="ctr"/>
-          <a:lstStyle/>
-          <a:p>
-            <a:pPr indent="0" marL="0">
-              <a:buNone/>
-            </a:pPr>
-            <a:endParaRPr lang="en-US" dirty="0"/>
-          </a:p>
-        </p:txBody>
-      </p:sp>
-      <p:sp>
-        <p:nvSpPr>
-          <p:cNvPr id="4" name="Text 2"/>
-          <p:cNvSpPr/>
-          <p:nvPr/>
-        </p:nvSpPr>
-        <p:spPr>
-          <a:xfrm>
-            <a:off x="7461041" y="231577"/>
-            <a:ext cx="927071" cy="171450"/>
-          </a:xfrm>
-          <a:prstGeom prst="rect">
-            <a:avLst/>
-          </a:prstGeom>
-          <a:noFill/>
-          <a:ln/>
-        </p:spPr>
-        <p:txBody>
-          <a:bodyPr wrap="square" lIns="0" tIns="0" rIns="0" bIns="0" rtlCol="0" anchor="t"/>
-          <a:lstStyle/>
-          <a:p>
-            <a:pPr algn="ctr" indent="0" marL="0">
-              <a:buNone/>
-            </a:pPr>
-            <a:r>
-              <a:rPr lang="en-US" sz="1150" b="1" dirty="0">
-                <a:solidFill>
-                  <a:srgbClr val="FFFFFF"/>
-                </a:solidFill>
-                <a:latin typeface="Arial" pitchFamily="34" charset="0"/>
-                <a:ea typeface="Arial" pitchFamily="34" charset="-122"/>
-                <a:cs typeface="Arial" pitchFamily="34" charset="-120"/>
-              </a:rPr>
-              <a:t>CHAPTER 05</a:t>
-            </a:r>
-            <a:endParaRPr lang="en-US" sz="1150" dirty="0"/>
-          </a:p>
-        </p:txBody>
-      </p:sp>
       <p:pic>
         <p:nvPicPr>
-          <p:cNvPr id="5" name="Image 0" descr="/Users/danwahlin/.copilot/session-state/56a7a0da-def8-48d4-b5e8-0ac3878cb8dd/files/slides-build/icons/FaGithub-1F2328.png">
-            <a:hlinkClick r:id="rId2" tooltip="https://github.com/github/copilot-app-for-beginners/tree/main/05-mcp-plugins"/>
-          </p:cNvPr>
+          <p:cNvPr id="2" name="Image 0" descr="/Users/danwahlin/.copilot/session-state/56a7a0da-def8-48d4-b5e8-0ac3878cb8dd/files/slides-build/img/grad-corner.png">    </p:cNvPr>
           <p:cNvPicPr>
             <a:picLocks noChangeAspect="1"/>
           </p:cNvPicPr>
@@ -12569,6 +12344,103 @@
         </p:blipFill>
         <p:spPr>
           <a:xfrm>
+            <a:off x="6349901" y="0"/>
+            <a:ext cx="2793950" cy="1308050"/>
+          </a:xfrm>
+          <a:prstGeom prst="rect">
+            <a:avLst/>
+          </a:prstGeom>
+        </p:spPr>
+      </p:pic>
+      <p:sp>
+        <p:nvSpPr>
+          <p:cNvPr id="3" name="Text 0"/>
+          <p:cNvSpPr/>
+          <p:nvPr/>
+        </p:nvSpPr>
+        <p:spPr>
+          <a:xfrm>
+            <a:off x="7340501" y="177701"/>
+            <a:ext cx="1168301" cy="279350"/>
+          </a:xfrm>
+          <a:prstGeom prst="roundRect">
+            <a:avLst>
+              <a:gd name="adj" fmla="val 22731"/>
+            </a:avLst>
+          </a:prstGeom>
+          <a:solidFill>
+            <a:srgbClr val="1A7F37"/>
+          </a:solidFill>
+          <a:ln/>
+        </p:spPr>
+        <p:txBody>
+          <a:bodyPr wrap="square" rtlCol="0" anchor="ctr"/>
+          <a:lstStyle/>
+          <a:p>
+            <a:pPr indent="0" marL="0">
+              <a:buNone/>
+            </a:pPr>
+            <a:endParaRPr lang="en-US" dirty="0"/>
+          </a:p>
+        </p:txBody>
+      </p:sp>
+      <p:sp>
+        <p:nvSpPr>
+          <p:cNvPr id="4" name="Text 1"/>
+          <p:cNvSpPr/>
+          <p:nvPr/>
+        </p:nvSpPr>
+        <p:spPr>
+          <a:xfrm>
+            <a:off x="7461041" y="231577"/>
+            <a:ext cx="927071" cy="171450"/>
+          </a:xfrm>
+          <a:prstGeom prst="rect">
+            <a:avLst/>
+          </a:prstGeom>
+          <a:noFill/>
+          <a:ln/>
+        </p:spPr>
+        <p:txBody>
+          <a:bodyPr wrap="square" lIns="0" tIns="0" rIns="0" bIns="0" rtlCol="0" anchor="t"/>
+          <a:lstStyle/>
+          <a:p>
+            <a:pPr algn="ctr" indent="0" marL="0">
+              <a:buNone/>
+            </a:pPr>
+            <a:r>
+              <a:rPr lang="en-US" sz="1150" b="1" dirty="0">
+                <a:solidFill>
+                  <a:srgbClr val="FFFFFF"/>
+                </a:solidFill>
+                <a:latin typeface="Arial" pitchFamily="34" charset="0"/>
+                <a:ea typeface="Arial" pitchFamily="34" charset="-122"/>
+                <a:cs typeface="Arial" pitchFamily="34" charset="-120"/>
+              </a:rPr>
+              <a:t>CHAPTER 05</a:t>
+            </a:r>
+            <a:endParaRPr lang="en-US" sz="1150" dirty="0"/>
+          </a:p>
+        </p:txBody>
+      </p:sp>
+      <p:pic>
+        <p:nvPicPr>
+          <p:cNvPr id="5" name="Image 1" descr="/Users/danwahlin/.copilot/session-state/56a7a0da-def8-48d4-b5e8-0ac3878cb8dd/files/slides-build/icons/FaGithub-1F2328.png">
+            <a:hlinkClick r:id="rId3" tooltip="https://github.com/github/copilot-app-for-beginners/tree/main/05-mcp-plugins"/>
+          </p:cNvPr>
+          <p:cNvPicPr>
+            <a:picLocks noChangeAspect="1"/>
+          </p:cNvPicPr>
+          <p:nvPr/>
+        </p:nvPicPr>
+        <p:blipFill>
+          <a:blip r:embed="rId2"/>
+          <a:stretch>
+            <a:fillRect/>
+          </a:stretch>
+        </p:blipFill>
+        <p:spPr>
+          <a:xfrm>
             <a:off x="8610600" y="165050"/>
             <a:ext cx="304800" cy="304800"/>
           </a:xfrm>
@@ -12579,7 +12451,7 @@
       </p:pic>
       <p:sp>
         <p:nvSpPr>
-          <p:cNvPr id="6" name="Text 3"/>
+          <p:cNvPr id="6" name="Text 2"/>
           <p:cNvSpPr/>
           <p:nvPr/>
         </p:nvSpPr>
@@ -12618,7 +12490,7 @@
       </p:sp>
       <p:sp>
         <p:nvSpPr>
-          <p:cNvPr id="7" name="Text 4"/>
+          <p:cNvPr id="7" name="Text 3"/>
           <p:cNvSpPr/>
           <p:nvPr/>
         </p:nvSpPr>
@@ -12663,7 +12535,7 @@
       </p:sp>
       <p:sp>
         <p:nvSpPr>
-          <p:cNvPr id="8" name="Text 5"/>
+          <p:cNvPr id="8" name="Text 4"/>
           <p:cNvSpPr/>
           <p:nvPr/>
         </p:nvSpPr>
@@ -12708,7 +12580,7 @@
       </p:sp>
       <p:sp>
         <p:nvSpPr>
-          <p:cNvPr id="9" name="Text 6"/>
+          <p:cNvPr id="9" name="Text 5"/>
           <p:cNvSpPr/>
           <p:nvPr/>
         </p:nvSpPr>
@@ -12740,194 +12612,7 @@
       </p:sp>
       <p:pic>
         <p:nvPicPr>
-          <p:cNvPr id="10" name="Image 1" descr="/Users/danwahlin/.copilot/session-state/56a7a0da-def8-48d4-b5e8-0ac3878cb8dd/files/slides-build/icons/GoGlobe-0969DA.png">    </p:cNvPr>
-          <p:cNvPicPr>
-            <a:picLocks noChangeAspect="1"/>
-          </p:cNvPicPr>
-          <p:nvPr/>
-        </p:nvPicPr>
-        <p:blipFill>
-          <a:blip r:embed="rId3"/>
-          <a:stretch>
-            <a:fillRect/>
-          </a:stretch>
-        </p:blipFill>
-        <p:spPr>
-          <a:xfrm>
-            <a:off x="590550" y="1657350"/>
-            <a:ext cx="215801" cy="215801"/>
-          </a:xfrm>
-          <a:prstGeom prst="rect">
-            <a:avLst/>
-          </a:prstGeom>
-        </p:spPr>
-      </p:pic>
-      <p:sp>
-        <p:nvSpPr>
-          <p:cNvPr id="11" name="Text 7"/>
-          <p:cNvSpPr/>
-          <p:nvPr/>
-        </p:nvSpPr>
-        <p:spPr>
-          <a:xfrm>
-            <a:off x="1041350" y="1650950"/>
-            <a:ext cx="2442537" cy="228600"/>
-          </a:xfrm>
-          <a:prstGeom prst="rect">
-            <a:avLst/>
-          </a:prstGeom>
-          <a:noFill/>
-          <a:ln/>
-        </p:spPr>
-        <p:txBody>
-          <a:bodyPr wrap="square" lIns="0" tIns="0" rIns="0" bIns="0" rtlCol="0" anchor="t"/>
-          <a:lstStyle/>
-          <a:p>
-            <a:pPr algn="l" indent="0" marL="0">
-              <a:buNone/>
-            </a:pPr>
-            <a:r>
-              <a:rPr lang="en-US" sz="1550" b="1" dirty="0">
-                <a:solidFill>
-                  <a:srgbClr val="1F2328"/>
-                </a:solidFill>
-                <a:latin typeface="Arial" pitchFamily="34" charset="0"/>
-                <a:ea typeface="Arial" pitchFamily="34" charset="-122"/>
-                <a:cs typeface="Arial" pitchFamily="34" charset="-120"/>
-              </a:rPr>
-              <a:t>Step 1 · Goes to Context7</a:t>
-            </a:r>
-            <a:endParaRPr lang="en-US" sz="1550" dirty="0"/>
-          </a:p>
-        </p:txBody>
-      </p:sp>
-      <p:sp>
-        <p:nvSpPr>
-          <p:cNvPr id="12" name="Text 8"/>
-          <p:cNvSpPr/>
-          <p:nvPr/>
-        </p:nvSpPr>
-        <p:spPr>
-          <a:xfrm>
-            <a:off x="507950" y="2108150"/>
-            <a:ext cx="3936950" cy="1383953"/>
-          </a:xfrm>
-          <a:prstGeom prst="roundRect">
-            <a:avLst>
-              <a:gd name="adj" fmla="val 5506"/>
-            </a:avLst>
-          </a:prstGeom>
-          <a:solidFill>
-            <a:srgbClr val="FFFFFF"/>
-          </a:solidFill>
-          <a:ln/>
-        </p:spPr>
-        <p:txBody>
-          <a:bodyPr wrap="square" rtlCol="0" anchor="ctr"/>
-          <a:lstStyle/>
-          <a:p>
-            <a:pPr indent="0" marL="0">
-              <a:buNone/>
-            </a:pPr>
-            <a:endParaRPr lang="en-US" dirty="0"/>
-          </a:p>
-        </p:txBody>
-      </p:sp>
-      <p:sp>
-        <p:nvSpPr>
-          <p:cNvPr id="13" name="Shape 9"/>
-          <p:cNvSpPr/>
-          <p:nvPr/>
-        </p:nvSpPr>
-        <p:spPr>
-          <a:xfrm>
-            <a:off x="507950" y="2112913"/>
-            <a:ext cx="3936950" cy="0"/>
-          </a:xfrm>
-          <a:prstGeom prst="line">
-            <a:avLst/>
-          </a:prstGeom>
-          <a:noFill/>
-          <a:ln w="9525">
-            <a:solidFill>
-              <a:srgbClr val="9CD7FF"/>
-            </a:solidFill>
-            <a:prstDash val="solid"/>
-          </a:ln>
-        </p:spPr>
-      </p:sp>
-      <p:sp>
-        <p:nvSpPr>
-          <p:cNvPr id="14" name="Shape 10"/>
-          <p:cNvSpPr/>
-          <p:nvPr/>
-        </p:nvSpPr>
-        <p:spPr>
-          <a:xfrm>
-            <a:off x="4440138" y="2108150"/>
-            <a:ext cx="0" cy="1383953"/>
-          </a:xfrm>
-          <a:prstGeom prst="line">
-            <a:avLst/>
-          </a:prstGeom>
-          <a:noFill/>
-          <a:ln w="9525">
-            <a:solidFill>
-              <a:srgbClr val="9CD7FF"/>
-            </a:solidFill>
-            <a:prstDash val="solid"/>
-          </a:ln>
-        </p:spPr>
-      </p:sp>
-      <p:sp>
-        <p:nvSpPr>
-          <p:cNvPr id="15" name="Shape 11"/>
-          <p:cNvSpPr/>
-          <p:nvPr/>
-        </p:nvSpPr>
-        <p:spPr>
-          <a:xfrm>
-            <a:off x="507950" y="3487341"/>
-            <a:ext cx="3936950" cy="0"/>
-          </a:xfrm>
-          <a:prstGeom prst="line">
-            <a:avLst/>
-          </a:prstGeom>
-          <a:noFill/>
-          <a:ln w="9525">
-            <a:solidFill>
-              <a:srgbClr val="9CD7FF"/>
-            </a:solidFill>
-            <a:prstDash val="solid"/>
-          </a:ln>
-        </p:spPr>
-      </p:sp>
-      <p:sp>
-        <p:nvSpPr>
-          <p:cNvPr id="16" name="Shape 12"/>
-          <p:cNvSpPr/>
-          <p:nvPr/>
-        </p:nvSpPr>
-        <p:spPr>
-          <a:xfrm>
-            <a:off x="531763" y="2108150"/>
-            <a:ext cx="0" cy="1383953"/>
-          </a:xfrm>
-          <a:prstGeom prst="line">
-            <a:avLst/>
-          </a:prstGeom>
-          <a:noFill/>
-          <a:ln w="47625">
-            <a:solidFill>
-              <a:srgbClr val="0969DA"/>
-            </a:solidFill>
-            <a:prstDash val="solid"/>
-          </a:ln>
-        </p:spPr>
-      </p:sp>
-      <p:pic>
-        <p:nvPicPr>
-          <p:cNvPr id="17" name="Image 2" descr="/Users/danwahlin/.copilot/session-state/56a7a0da-def8-48d4-b5e8-0ac3878cb8dd/files/slides-build/icons/GoCopilot-0969DA.png">    </p:cNvPr>
+          <p:cNvPr id="10" name="Image 2" descr="/Users/danwahlin/.copilot/session-state/56a7a0da-def8-48d4-b5e8-0ac3878cb8dd/files/slides-build/icons/GoGlobe-0969DA.png">    </p:cNvPr>
           <p:cNvPicPr>
             <a:picLocks noChangeAspect="1"/>
           </p:cNvPicPr>
@@ -12941,8 +12626,8 @@
         </p:blipFill>
         <p:spPr>
           <a:xfrm>
-            <a:off x="733276" y="2247751"/>
-            <a:ext cx="165050" cy="165050"/>
+            <a:off x="590550" y="1657350"/>
+            <a:ext cx="215801" cy="215801"/>
           </a:xfrm>
           <a:prstGeom prst="rect">
             <a:avLst/>
@@ -12951,72 +12636,30 @@
       </p:pic>
       <p:sp>
         <p:nvSpPr>
-          <p:cNvPr id="18" name="Text 13"/>
-          <p:cNvSpPr/>
-          <p:nvPr/>
-        </p:nvSpPr>
-        <p:spPr>
-          <a:xfrm>
-            <a:off x="974527" y="2244626"/>
-            <a:ext cx="637276" cy="171450"/>
-          </a:xfrm>
-          <a:prstGeom prst="rect">
-            <a:avLst/>
-          </a:prstGeom>
-          <a:noFill/>
-          <a:ln/>
-        </p:spPr>
-        <p:txBody>
-          <a:bodyPr wrap="square" lIns="0" tIns="0" rIns="0" bIns="0" rtlCol="0" anchor="t"/>
-          <a:lstStyle/>
-          <a:p>
-            <a:pPr algn="l" indent="0" marL="0">
-              <a:buNone/>
-            </a:pPr>
-            <a:r>
-              <a:rPr lang="en-US" sz="1150" b="1" dirty="0">
-                <a:solidFill>
-                  <a:srgbClr val="0969DA"/>
-                </a:solidFill>
-                <a:latin typeface="Arial" pitchFamily="34" charset="0"/>
-                <a:ea typeface="Arial" pitchFamily="34" charset="-122"/>
-                <a:cs typeface="Arial" pitchFamily="34" charset="-120"/>
-              </a:rPr>
-              <a:t>PROMPT</a:t>
-            </a:r>
-            <a:endParaRPr lang="en-US" sz="1150" dirty="0"/>
-          </a:p>
-        </p:txBody>
-      </p:sp>
-      <p:sp>
-        <p:nvSpPr>
-          <p:cNvPr id="19" name="Text 14"/>
-          <p:cNvSpPr/>
-          <p:nvPr/>
-        </p:nvSpPr>
-        <p:spPr>
-          <a:xfrm>
-            <a:off x="733276" y="2466826"/>
-            <a:ext cx="3594887" cy="888802"/>
-          </a:xfrm>
-          <a:prstGeom prst="rect">
-            <a:avLst/>
-          </a:prstGeom>
-          <a:noFill/>
-          <a:ln/>
-        </p:spPr>
-        <p:txBody>
-          <a:bodyPr wrap="square" lIns="0" tIns="0" rIns="0" bIns="0" rtlCol="0" anchor="t"/>
-          <a:lstStyle/>
-          <a:p>
-            <a:pPr algn="l" indent="0" marL="0">
-              <a:lnSpc>
-                <a:spcPts val="1750"/>
-              </a:lnSpc>
-              <a:buNone/>
-            </a:pPr>
-            <a:r>
-              <a:rPr lang="en-US" sz="1400" dirty="0">
+          <p:cNvPr id="11" name="Text 6"/>
+          <p:cNvSpPr/>
+          <p:nvPr/>
+        </p:nvSpPr>
+        <p:spPr>
+          <a:xfrm>
+            <a:off x="1041350" y="1650950"/>
+            <a:ext cx="2442537" cy="228600"/>
+          </a:xfrm>
+          <a:prstGeom prst="rect">
+            <a:avLst/>
+          </a:prstGeom>
+          <a:noFill/>
+          <a:ln/>
+        </p:spPr>
+        <p:txBody>
+          <a:bodyPr wrap="square" lIns="0" tIns="0" rIns="0" bIns="0" rtlCol="0" anchor="t"/>
+          <a:lstStyle/>
+          <a:p>
+            <a:pPr algn="l" indent="0" marL="0">
+              <a:buNone/>
+            </a:pPr>
+            <a:r>
+              <a:rPr lang="en-US" sz="1550" b="1" dirty="0">
                 <a:solidFill>
                   <a:srgbClr val="1F2328"/>
                 </a:solidFill>
@@ -13024,30 +12667,30 @@
                 <a:ea typeface="Arial" pitchFamily="34" charset="-122"/>
                 <a:cs typeface="Arial" pitchFamily="34" charset="-120"/>
               </a:rPr>
-              <a:t>Use the Context7 MCP tools to find React guidance on input labels: nested labels vs. htmlFor and id. Include source links. Do not send repository code.</a:t>
-            </a:r>
-            <a:endParaRPr lang="en-US" sz="1400" dirty="0"/>
-          </a:p>
-        </p:txBody>
-      </p:sp>
-      <p:sp>
-        <p:nvSpPr>
-          <p:cNvPr id="20" name="Text 15"/>
-          <p:cNvSpPr/>
-          <p:nvPr/>
-        </p:nvSpPr>
-        <p:spPr>
-          <a:xfrm>
-            <a:off x="4698802" y="1574750"/>
-            <a:ext cx="381000" cy="381000"/>
+              <a:t>Step 1 · Goes to Context7</a:t>
+            </a:r>
+            <a:endParaRPr lang="en-US" sz="1550" dirty="0"/>
+          </a:p>
+        </p:txBody>
+      </p:sp>
+      <p:sp>
+        <p:nvSpPr>
+          <p:cNvPr id="12" name="Text 7"/>
+          <p:cNvSpPr/>
+          <p:nvPr/>
+        </p:nvSpPr>
+        <p:spPr>
+          <a:xfrm>
+            <a:off x="507950" y="2108150"/>
+            <a:ext cx="3936950" cy="1383953"/>
           </a:xfrm>
           <a:prstGeom prst="roundRect">
             <a:avLst>
-              <a:gd name="adj" fmla="val 23333"/>
+              <a:gd name="adj" fmla="val 5506"/>
             </a:avLst>
           </a:prstGeom>
           <a:solidFill>
-            <a:srgbClr val="DAFBE1"/>
+            <a:srgbClr val="FFFFFF"/>
           </a:solidFill>
           <a:ln/>
         </p:spPr>
@@ -13061,10 +12704,102 @@
             <a:endParaRPr lang="en-US" dirty="0"/>
           </a:p>
         </p:txBody>
+      </p:sp>
+      <p:sp>
+        <p:nvSpPr>
+          <p:cNvPr id="13" name="Shape 8"/>
+          <p:cNvSpPr/>
+          <p:nvPr/>
+        </p:nvSpPr>
+        <p:spPr>
+          <a:xfrm>
+            <a:off x="507950" y="2112913"/>
+            <a:ext cx="3936950" cy="0"/>
+          </a:xfrm>
+          <a:prstGeom prst="line">
+            <a:avLst/>
+          </a:prstGeom>
+          <a:noFill/>
+          <a:ln w="9525">
+            <a:solidFill>
+              <a:srgbClr val="9CD7FF"/>
+            </a:solidFill>
+            <a:prstDash val="solid"/>
+          </a:ln>
+        </p:spPr>
+      </p:sp>
+      <p:sp>
+        <p:nvSpPr>
+          <p:cNvPr id="14" name="Shape 9"/>
+          <p:cNvSpPr/>
+          <p:nvPr/>
+        </p:nvSpPr>
+        <p:spPr>
+          <a:xfrm>
+            <a:off x="4440138" y="2108150"/>
+            <a:ext cx="0" cy="1383953"/>
+          </a:xfrm>
+          <a:prstGeom prst="line">
+            <a:avLst/>
+          </a:prstGeom>
+          <a:noFill/>
+          <a:ln w="9525">
+            <a:solidFill>
+              <a:srgbClr val="9CD7FF"/>
+            </a:solidFill>
+            <a:prstDash val="solid"/>
+          </a:ln>
+        </p:spPr>
+      </p:sp>
+      <p:sp>
+        <p:nvSpPr>
+          <p:cNvPr id="15" name="Shape 10"/>
+          <p:cNvSpPr/>
+          <p:nvPr/>
+        </p:nvSpPr>
+        <p:spPr>
+          <a:xfrm>
+            <a:off x="507950" y="3487341"/>
+            <a:ext cx="3936950" cy="0"/>
+          </a:xfrm>
+          <a:prstGeom prst="line">
+            <a:avLst/>
+          </a:prstGeom>
+          <a:noFill/>
+          <a:ln w="9525">
+            <a:solidFill>
+              <a:srgbClr val="9CD7FF"/>
+            </a:solidFill>
+            <a:prstDash val="solid"/>
+          </a:ln>
+        </p:spPr>
+      </p:sp>
+      <p:sp>
+        <p:nvSpPr>
+          <p:cNvPr id="16" name="Shape 11"/>
+          <p:cNvSpPr/>
+          <p:nvPr/>
+        </p:nvSpPr>
+        <p:spPr>
+          <a:xfrm>
+            <a:off x="531763" y="2108150"/>
+            <a:ext cx="0" cy="1383953"/>
+          </a:xfrm>
+          <a:prstGeom prst="line">
+            <a:avLst/>
+          </a:prstGeom>
+          <a:noFill/>
+          <a:ln w="47625">
+            <a:solidFill>
+              <a:srgbClr val="0969DA"/>
+            </a:solidFill>
+            <a:prstDash val="solid"/>
+          </a:ln>
+        </p:spPr>
       </p:sp>
       <p:pic>
         <p:nvPicPr>
-          <p:cNvPr id="21" name="Image 3" descr="/Users/danwahlin/.copilot/session-state/56a7a0da-def8-48d4-b5e8-0ac3878cb8dd/files/slides-build/icons/GoLock-1A7F37.png">    </p:cNvPr>
+          <p:cNvPr id="17" name="Image 3" descr="/Users/danwahlin/.copilot/session-state/56a7a0da-def8-48d4-b5e8-0ac3878cb8dd/files/slides-build/icons/GoCopilot-0969DA.png">    </p:cNvPr>
           <p:cNvPicPr>
             <a:picLocks noChangeAspect="1"/>
           </p:cNvPicPr>
@@ -13078,8 +12813,8 @@
         </p:blipFill>
         <p:spPr>
           <a:xfrm>
-            <a:off x="4781401" y="1657350"/>
-            <a:ext cx="215801" cy="215801"/>
+            <a:off x="733276" y="2247751"/>
+            <a:ext cx="165050" cy="165050"/>
           </a:xfrm>
           <a:prstGeom prst="rect">
             <a:avLst/>
@@ -13088,30 +12823,72 @@
       </p:pic>
       <p:sp>
         <p:nvSpPr>
-          <p:cNvPr id="22" name="Text 16"/>
-          <p:cNvSpPr/>
-          <p:nvPr/>
-        </p:nvSpPr>
-        <p:spPr>
-          <a:xfrm>
-            <a:off x="5232202" y="1650950"/>
-            <a:ext cx="1829550" cy="228600"/>
-          </a:xfrm>
-          <a:prstGeom prst="rect">
-            <a:avLst/>
-          </a:prstGeom>
-          <a:noFill/>
-          <a:ln/>
-        </p:spPr>
-        <p:txBody>
-          <a:bodyPr wrap="square" lIns="0" tIns="0" rIns="0" bIns="0" rtlCol="0" anchor="t"/>
-          <a:lstStyle/>
-          <a:p>
-            <a:pPr algn="l" indent="0" marL="0">
-              <a:buNone/>
-            </a:pPr>
-            <a:r>
-              <a:rPr lang="en-US" sz="1550" b="1" dirty="0">
+          <p:cNvPr id="18" name="Text 12"/>
+          <p:cNvSpPr/>
+          <p:nvPr/>
+        </p:nvSpPr>
+        <p:spPr>
+          <a:xfrm>
+            <a:off x="974527" y="2244626"/>
+            <a:ext cx="637276" cy="171450"/>
+          </a:xfrm>
+          <a:prstGeom prst="rect">
+            <a:avLst/>
+          </a:prstGeom>
+          <a:noFill/>
+          <a:ln/>
+        </p:spPr>
+        <p:txBody>
+          <a:bodyPr wrap="square" lIns="0" tIns="0" rIns="0" bIns="0" rtlCol="0" anchor="t"/>
+          <a:lstStyle/>
+          <a:p>
+            <a:pPr algn="l" indent="0" marL="0">
+              <a:buNone/>
+            </a:pPr>
+            <a:r>
+              <a:rPr lang="en-US" sz="1150" b="1" dirty="0">
+                <a:solidFill>
+                  <a:srgbClr val="0969DA"/>
+                </a:solidFill>
+                <a:latin typeface="Arial" pitchFamily="34" charset="0"/>
+                <a:ea typeface="Arial" pitchFamily="34" charset="-122"/>
+                <a:cs typeface="Arial" pitchFamily="34" charset="-120"/>
+              </a:rPr>
+              <a:t>PROMPT</a:t>
+            </a:r>
+            <a:endParaRPr lang="en-US" sz="1150" dirty="0"/>
+          </a:p>
+        </p:txBody>
+      </p:sp>
+      <p:sp>
+        <p:nvSpPr>
+          <p:cNvPr id="19" name="Text 13"/>
+          <p:cNvSpPr/>
+          <p:nvPr/>
+        </p:nvSpPr>
+        <p:spPr>
+          <a:xfrm>
+            <a:off x="733276" y="2466826"/>
+            <a:ext cx="3594887" cy="888802"/>
+          </a:xfrm>
+          <a:prstGeom prst="rect">
+            <a:avLst/>
+          </a:prstGeom>
+          <a:noFill/>
+          <a:ln/>
+        </p:spPr>
+        <p:txBody>
+          <a:bodyPr wrap="square" lIns="0" tIns="0" rIns="0" bIns="0" rtlCol="0" anchor="t"/>
+          <a:lstStyle/>
+          <a:p>
+            <a:pPr algn="l" indent="0" marL="0">
+              <a:lnSpc>
+                <a:spcPts val="1750"/>
+              </a:lnSpc>
+              <a:buNone/>
+            </a:pPr>
+            <a:r>
+              <a:rPr lang="en-US" sz="1400" dirty="0">
                 <a:solidFill>
                   <a:srgbClr val="1F2328"/>
                 </a:solidFill>
@@ -13119,30 +12896,30 @@
                 <a:ea typeface="Arial" pitchFamily="34" charset="-122"/>
                 <a:cs typeface="Arial" pitchFamily="34" charset="-120"/>
               </a:rPr>
-              <a:t>Step 2 · Stays local</a:t>
-            </a:r>
-            <a:endParaRPr lang="en-US" sz="1550" dirty="0"/>
-          </a:p>
-        </p:txBody>
-      </p:sp>
-      <p:sp>
-        <p:nvSpPr>
-          <p:cNvPr id="23" name="Text 17"/>
-          <p:cNvSpPr/>
-          <p:nvPr/>
-        </p:nvSpPr>
-        <p:spPr>
-          <a:xfrm>
-            <a:off x="4698802" y="2108150"/>
-            <a:ext cx="3937099" cy="1383953"/>
+              <a:t>Use the Context7 MCP tools to find React guidance on input labels: nested labels vs. htmlFor and id. Include source links. Do not send repository code.</a:t>
+            </a:r>
+            <a:endParaRPr lang="en-US" sz="1400" dirty="0"/>
+          </a:p>
+        </p:txBody>
+      </p:sp>
+      <p:sp>
+        <p:nvSpPr>
+          <p:cNvPr id="20" name="Text 14"/>
+          <p:cNvSpPr/>
+          <p:nvPr/>
+        </p:nvSpPr>
+        <p:spPr>
+          <a:xfrm>
+            <a:off x="4698802" y="1574750"/>
+            <a:ext cx="381000" cy="381000"/>
           </a:xfrm>
           <a:prstGeom prst="roundRect">
             <a:avLst>
-              <a:gd name="adj" fmla="val 5506"/>
+              <a:gd name="adj" fmla="val 23333"/>
             </a:avLst>
           </a:prstGeom>
           <a:solidFill>
-            <a:srgbClr val="FFFFFF"/>
+            <a:srgbClr val="DAFBE1"/>
           </a:solidFill>
           <a:ln/>
         </p:spPr>
@@ -13156,102 +12933,10 @@
             <a:endParaRPr lang="en-US" dirty="0"/>
           </a:p>
         </p:txBody>
-      </p:sp>
-      <p:sp>
-        <p:nvSpPr>
-          <p:cNvPr id="24" name="Shape 18"/>
-          <p:cNvSpPr/>
-          <p:nvPr/>
-        </p:nvSpPr>
-        <p:spPr>
-          <a:xfrm>
-            <a:off x="4698802" y="2112913"/>
-            <a:ext cx="3937099" cy="0"/>
-          </a:xfrm>
-          <a:prstGeom prst="line">
-            <a:avLst/>
-          </a:prstGeom>
-          <a:noFill/>
-          <a:ln w="9525">
-            <a:solidFill>
-              <a:srgbClr val="8CE7A5"/>
-            </a:solidFill>
-            <a:prstDash val="solid"/>
-          </a:ln>
-        </p:spPr>
-      </p:sp>
-      <p:sp>
-        <p:nvSpPr>
-          <p:cNvPr id="25" name="Shape 19"/>
-          <p:cNvSpPr/>
-          <p:nvPr/>
-        </p:nvSpPr>
-        <p:spPr>
-          <a:xfrm>
-            <a:off x="8631138" y="2108150"/>
-            <a:ext cx="0" cy="1383953"/>
-          </a:xfrm>
-          <a:prstGeom prst="line">
-            <a:avLst/>
-          </a:prstGeom>
-          <a:noFill/>
-          <a:ln w="9525">
-            <a:solidFill>
-              <a:srgbClr val="8CE7A5"/>
-            </a:solidFill>
-            <a:prstDash val="solid"/>
-          </a:ln>
-        </p:spPr>
-      </p:sp>
-      <p:sp>
-        <p:nvSpPr>
-          <p:cNvPr id="26" name="Shape 20"/>
-          <p:cNvSpPr/>
-          <p:nvPr/>
-        </p:nvSpPr>
-        <p:spPr>
-          <a:xfrm>
-            <a:off x="4698802" y="3487341"/>
-            <a:ext cx="3937099" cy="0"/>
-          </a:xfrm>
-          <a:prstGeom prst="line">
-            <a:avLst/>
-          </a:prstGeom>
-          <a:noFill/>
-          <a:ln w="9525">
-            <a:solidFill>
-              <a:srgbClr val="8CE7A5"/>
-            </a:solidFill>
-            <a:prstDash val="solid"/>
-          </a:ln>
-        </p:spPr>
-      </p:sp>
-      <p:sp>
-        <p:nvSpPr>
-          <p:cNvPr id="27" name="Shape 21"/>
-          <p:cNvSpPr/>
-          <p:nvPr/>
-        </p:nvSpPr>
-        <p:spPr>
-          <a:xfrm>
-            <a:off x="4722614" y="2108150"/>
-            <a:ext cx="0" cy="1383953"/>
-          </a:xfrm>
-          <a:prstGeom prst="line">
-            <a:avLst/>
-          </a:prstGeom>
-          <a:noFill/>
-          <a:ln w="47625">
-            <a:solidFill>
-              <a:srgbClr val="1A7F37"/>
-            </a:solidFill>
-            <a:prstDash val="solid"/>
-          </a:ln>
-        </p:spPr>
       </p:sp>
       <p:pic>
         <p:nvPicPr>
-          <p:cNvPr id="28" name="Image 4" descr="/Users/danwahlin/.copilot/session-state/56a7a0da-def8-48d4-b5e8-0ac3878cb8dd/files/slides-build/icons/GoCopilot-1A7F37.png">    </p:cNvPr>
+          <p:cNvPr id="21" name="Image 4" descr="/Users/danwahlin/.copilot/session-state/56a7a0da-def8-48d4-b5e8-0ac3878cb8dd/files/slides-build/icons/GoLock-1A7F37.png">    </p:cNvPr>
           <p:cNvPicPr>
             <a:picLocks noChangeAspect="1"/>
           </p:cNvPicPr>
@@ -13265,6 +12950,193 @@
         </p:blipFill>
         <p:spPr>
           <a:xfrm>
+            <a:off x="4781401" y="1657350"/>
+            <a:ext cx="215801" cy="215801"/>
+          </a:xfrm>
+          <a:prstGeom prst="rect">
+            <a:avLst/>
+          </a:prstGeom>
+        </p:spPr>
+      </p:pic>
+      <p:sp>
+        <p:nvSpPr>
+          <p:cNvPr id="22" name="Text 15"/>
+          <p:cNvSpPr/>
+          <p:nvPr/>
+        </p:nvSpPr>
+        <p:spPr>
+          <a:xfrm>
+            <a:off x="5232202" y="1650950"/>
+            <a:ext cx="1829550" cy="228600"/>
+          </a:xfrm>
+          <a:prstGeom prst="rect">
+            <a:avLst/>
+          </a:prstGeom>
+          <a:noFill/>
+          <a:ln/>
+        </p:spPr>
+        <p:txBody>
+          <a:bodyPr wrap="square" lIns="0" tIns="0" rIns="0" bIns="0" rtlCol="0" anchor="t"/>
+          <a:lstStyle/>
+          <a:p>
+            <a:pPr algn="l" indent="0" marL="0">
+              <a:buNone/>
+            </a:pPr>
+            <a:r>
+              <a:rPr lang="en-US" sz="1550" b="1" dirty="0">
+                <a:solidFill>
+                  <a:srgbClr val="1F2328"/>
+                </a:solidFill>
+                <a:latin typeface="Arial" pitchFamily="34" charset="0"/>
+                <a:ea typeface="Arial" pitchFamily="34" charset="-122"/>
+                <a:cs typeface="Arial" pitchFamily="34" charset="-120"/>
+              </a:rPr>
+              <a:t>Step 2 · Stays local</a:t>
+            </a:r>
+            <a:endParaRPr lang="en-US" sz="1550" dirty="0"/>
+          </a:p>
+        </p:txBody>
+      </p:sp>
+      <p:sp>
+        <p:nvSpPr>
+          <p:cNvPr id="23" name="Text 16"/>
+          <p:cNvSpPr/>
+          <p:nvPr/>
+        </p:nvSpPr>
+        <p:spPr>
+          <a:xfrm>
+            <a:off x="4698802" y="2108150"/>
+            <a:ext cx="3937099" cy="1383953"/>
+          </a:xfrm>
+          <a:prstGeom prst="roundRect">
+            <a:avLst>
+              <a:gd name="adj" fmla="val 5506"/>
+            </a:avLst>
+          </a:prstGeom>
+          <a:solidFill>
+            <a:srgbClr val="FFFFFF"/>
+          </a:solidFill>
+          <a:ln/>
+        </p:spPr>
+        <p:txBody>
+          <a:bodyPr wrap="square" rtlCol="0" anchor="ctr"/>
+          <a:lstStyle/>
+          <a:p>
+            <a:pPr indent="0" marL="0">
+              <a:buNone/>
+            </a:pPr>
+            <a:endParaRPr lang="en-US" dirty="0"/>
+          </a:p>
+        </p:txBody>
+      </p:sp>
+      <p:sp>
+        <p:nvSpPr>
+          <p:cNvPr id="24" name="Shape 17"/>
+          <p:cNvSpPr/>
+          <p:nvPr/>
+        </p:nvSpPr>
+        <p:spPr>
+          <a:xfrm>
+            <a:off x="4698802" y="2112913"/>
+            <a:ext cx="3937099" cy="0"/>
+          </a:xfrm>
+          <a:prstGeom prst="line">
+            <a:avLst/>
+          </a:prstGeom>
+          <a:noFill/>
+          <a:ln w="9525">
+            <a:solidFill>
+              <a:srgbClr val="8CE7A5"/>
+            </a:solidFill>
+            <a:prstDash val="solid"/>
+          </a:ln>
+        </p:spPr>
+      </p:sp>
+      <p:sp>
+        <p:nvSpPr>
+          <p:cNvPr id="25" name="Shape 18"/>
+          <p:cNvSpPr/>
+          <p:nvPr/>
+        </p:nvSpPr>
+        <p:spPr>
+          <a:xfrm>
+            <a:off x="8631138" y="2108150"/>
+            <a:ext cx="0" cy="1383953"/>
+          </a:xfrm>
+          <a:prstGeom prst="line">
+            <a:avLst/>
+          </a:prstGeom>
+          <a:noFill/>
+          <a:ln w="9525">
+            <a:solidFill>
+              <a:srgbClr val="8CE7A5"/>
+            </a:solidFill>
+            <a:prstDash val="solid"/>
+          </a:ln>
+        </p:spPr>
+      </p:sp>
+      <p:sp>
+        <p:nvSpPr>
+          <p:cNvPr id="26" name="Shape 19"/>
+          <p:cNvSpPr/>
+          <p:nvPr/>
+        </p:nvSpPr>
+        <p:spPr>
+          <a:xfrm>
+            <a:off x="4698802" y="3487341"/>
+            <a:ext cx="3937099" cy="0"/>
+          </a:xfrm>
+          <a:prstGeom prst="line">
+            <a:avLst/>
+          </a:prstGeom>
+          <a:noFill/>
+          <a:ln w="9525">
+            <a:solidFill>
+              <a:srgbClr val="8CE7A5"/>
+            </a:solidFill>
+            <a:prstDash val="solid"/>
+          </a:ln>
+        </p:spPr>
+      </p:sp>
+      <p:sp>
+        <p:nvSpPr>
+          <p:cNvPr id="27" name="Shape 20"/>
+          <p:cNvSpPr/>
+          <p:nvPr/>
+        </p:nvSpPr>
+        <p:spPr>
+          <a:xfrm>
+            <a:off x="4722614" y="2108150"/>
+            <a:ext cx="0" cy="1383953"/>
+          </a:xfrm>
+          <a:prstGeom prst="line">
+            <a:avLst/>
+          </a:prstGeom>
+          <a:noFill/>
+          <a:ln w="47625">
+            <a:solidFill>
+              <a:srgbClr val="1A7F37"/>
+            </a:solidFill>
+            <a:prstDash val="solid"/>
+          </a:ln>
+        </p:spPr>
+      </p:sp>
+      <p:pic>
+        <p:nvPicPr>
+          <p:cNvPr id="28" name="Image 5" descr="/Users/danwahlin/.copilot/session-state/56a7a0da-def8-48d4-b5e8-0ac3878cb8dd/files/slides-build/icons/GoCopilot-1A7F37.png">    </p:cNvPr>
+          <p:cNvPicPr>
+            <a:picLocks noChangeAspect="1"/>
+          </p:cNvPicPr>
+          <p:nvPr/>
+        </p:nvPicPr>
+        <p:blipFill>
+          <a:blip r:embed="rId7"/>
+          <a:stretch>
+            <a:fillRect/>
+          </a:stretch>
+        </p:blipFill>
+        <p:spPr>
+          <a:xfrm>
             <a:off x="4924127" y="2247751"/>
             <a:ext cx="165050" cy="165050"/>
           </a:xfrm>
@@ -13275,7 +13147,7 @@
       </p:pic>
       <p:sp>
         <p:nvSpPr>
-          <p:cNvPr id="29" name="Text 22"/>
+          <p:cNvPr id="29" name="Text 21"/>
           <p:cNvSpPr/>
           <p:nvPr/>
         </p:nvSpPr>
@@ -13314,7 +13186,7 @@
       </p:sp>
       <p:sp>
         <p:nvSpPr>
-          <p:cNvPr id="30" name="Text 23"/>
+          <p:cNvPr id="30" name="Text 22"/>
           <p:cNvSpPr/>
           <p:nvPr/>
         </p:nvSpPr>
@@ -13356,7 +13228,7 @@
       </p:sp>
       <p:sp>
         <p:nvSpPr>
-          <p:cNvPr id="31" name="Text 24"/>
+          <p:cNvPr id="31" name="Text 23"/>
           <p:cNvSpPr/>
           <p:nvPr/>
         </p:nvSpPr>
@@ -13392,14 +13264,14 @@
       </p:sp>
       <p:pic>
         <p:nvPicPr>
-          <p:cNvPr id="32" name="Image 5" descr="/Users/danwahlin/.copilot/session-state/56a7a0da-def8-48d4-b5e8-0ac3878cb8dd/files/slides-build/icons/GoCheckCircle-1A7F37.png">    </p:cNvPr>
+          <p:cNvPr id="32" name="Image 6" descr="/Users/danwahlin/.copilot/session-state/56a7a0da-def8-48d4-b5e8-0ac3878cb8dd/files/slides-build/icons/GoCheckCircle-1A7F37.png">    </p:cNvPr>
           <p:cNvPicPr>
             <a:picLocks noChangeAspect="1"/>
           </p:cNvPicPr>
           <p:nvPr/>
         </p:nvPicPr>
         <p:blipFill>
-          <a:blip r:embed="rId7"/>
+          <a:blip r:embed="rId8"/>
           <a:stretch>
             <a:fillRect/>
           </a:stretch>
@@ -13416,7 +13288,7 @@
       </p:pic>
       <p:sp>
         <p:nvSpPr>
-          <p:cNvPr id="33" name="Text 25"/>
+          <p:cNvPr id="33" name="Text 24"/>
           <p:cNvSpPr/>
           <p:nvPr/>
         </p:nvSpPr>

--- a/slides/05-mcp-plugins.pptx
+++ b/slides/05-mcp-plugins.pptx
@@ -3013,12 +3013,12 @@
         </p:nvSpPr>
         <p:spPr>
           <a:xfrm>
-            <a:off x="2132856" y="1577876"/>
-            <a:ext cx="4877991" cy="1771650"/>
+            <a:off x="507950" y="1574750"/>
+            <a:ext cx="8127950" cy="1222177"/>
           </a:xfrm>
           <a:prstGeom prst="roundRect">
             <a:avLst>
-              <a:gd name="adj" fmla="val 4301"/>
+              <a:gd name="adj" fmla="val 10391"/>
             </a:avLst>
           </a:prstGeom>
           <a:solidFill>
@@ -3048,9 +3048,64 @@
           </a:p>
         </p:txBody>
       </p:sp>
+      <p:sp>
+        <p:nvSpPr>
+          <p:cNvPr id="10" name="Text 6"/>
+          <p:cNvSpPr/>
+          <p:nvPr/>
+        </p:nvSpPr>
+        <p:spPr>
+          <a:xfrm>
+            <a:off x="517475" y="1584275"/>
+            <a:ext cx="8108900" cy="412552"/>
+          </a:xfrm>
+          <a:prstGeom prst="roundRect">
+            <a:avLst>
+              <a:gd name="adj" fmla="val 30784"/>
+            </a:avLst>
+          </a:prstGeom>
+          <a:solidFill>
+            <a:srgbClr val="F6F8FA"/>
+          </a:solidFill>
+          <a:ln/>
+        </p:spPr>
+        <p:txBody>
+          <a:bodyPr wrap="square" rtlCol="0" anchor="ctr"/>
+          <a:lstStyle/>
+          <a:p>
+            <a:pPr indent="0" marL="0">
+              <a:buNone/>
+            </a:pPr>
+            <a:endParaRPr lang="en-US" dirty="0"/>
+          </a:p>
+        </p:txBody>
+      </p:sp>
+      <p:sp>
+        <p:nvSpPr>
+          <p:cNvPr id="11" name="Shape 7"/>
+          <p:cNvSpPr/>
+          <p:nvPr/>
+        </p:nvSpPr>
+        <p:spPr>
+          <a:xfrm>
+            <a:off x="517475" y="1992064"/>
+            <a:ext cx="8108900" cy="0"/>
+          </a:xfrm>
+          <a:prstGeom prst="line">
+            <a:avLst/>
+          </a:prstGeom>
+          <a:noFill/>
+          <a:ln w="9525">
+            <a:solidFill>
+              <a:srgbClr val="D1D9E0"/>
+            </a:solidFill>
+            <a:prstDash val="solid"/>
+          </a:ln>
+        </p:spPr>
+      </p:sp>
       <p:pic>
         <p:nvPicPr>
-          <p:cNvPr id="10" name="Image 2" descr="/Users/danwahlin/.copilot/session-state/56a7a0da-def8-48d4-b5e8-0ac3878cb8dd/files/slides-build/img/05-plugins-crop.png">    </p:cNvPr>
+          <p:cNvPr id="12" name="Image 2" descr="/Users/danwahlin/.copilot/session-state/56a7a0da-def8-48d4-b5e8-0ac3878cb8dd/files/slides-build/icons/GoChevronDown-59636E.png">    </p:cNvPr>
           <p:cNvPicPr>
             <a:picLocks noChangeAspect="1"/>
           </p:cNvPicPr>
@@ -3064,8 +3119,8 @@
         </p:blipFill>
         <p:spPr>
           <a:xfrm>
-            <a:off x="2180481" y="1625501"/>
-            <a:ext cx="4782741" cy="1676400"/>
+            <a:off x="695176" y="1709589"/>
+            <a:ext cx="152400" cy="152400"/>
           </a:xfrm>
           <a:prstGeom prst="rect">
             <a:avLst/>
@@ -3074,13 +3129,300 @@
       </p:pic>
       <p:sp>
         <p:nvSpPr>
-          <p:cNvPr id="11" name="Text 6"/>
-          <p:cNvSpPr/>
-          <p:nvPr/>
-        </p:nvSpPr>
-        <p:spPr>
-          <a:xfrm>
-            <a:off x="507950" y="3530352"/>
+          <p:cNvPr id="13" name="Text 8"/>
+          <p:cNvSpPr/>
+          <p:nvPr/>
+        </p:nvSpPr>
+        <p:spPr>
+          <a:xfrm>
+            <a:off x="949077" y="1685776"/>
+            <a:ext cx="1418767" cy="200025"/>
+          </a:xfrm>
+          <a:prstGeom prst="rect">
+            <a:avLst/>
+          </a:prstGeom>
+          <a:noFill/>
+          <a:ln/>
+        </p:spPr>
+        <p:txBody>
+          <a:bodyPr wrap="square" lIns="0" tIns="0" rIns="0" bIns="0" rtlCol="0" anchor="t"/>
+          <a:lstStyle/>
+          <a:p>
+            <a:pPr algn="l" indent="0" marL="0">
+              <a:buNone/>
+            </a:pPr>
+            <a:r>
+              <a:rPr lang="en-US" sz="1350" b="1" dirty="0">
+                <a:solidFill>
+                  <a:srgbClr val="1F2328"/>
+                </a:solidFill>
+                <a:latin typeface="Arial" pitchFamily="34" charset="0"/>
+                <a:ea typeface="Arial" pitchFamily="34" charset="-122"/>
+                <a:cs typeface="Arial" pitchFamily="34" charset="-120"/>
+              </a:rPr>
+              <a:t>awesome-copilot</a:t>
+            </a:r>
+            <a:endParaRPr lang="en-US" sz="1350" dirty="0"/>
+          </a:p>
+        </p:txBody>
+      </p:sp>
+      <p:sp>
+        <p:nvSpPr>
+          <p:cNvPr id="14" name="Text 9"/>
+          <p:cNvSpPr/>
+          <p:nvPr/>
+        </p:nvSpPr>
+        <p:spPr>
+          <a:xfrm>
+            <a:off x="2441525" y="1690539"/>
+            <a:ext cx="881682" cy="190500"/>
+          </a:xfrm>
+          <a:prstGeom prst="rect">
+            <a:avLst/>
+          </a:prstGeom>
+          <a:noFill/>
+          <a:ln/>
+        </p:spPr>
+        <p:txBody>
+          <a:bodyPr wrap="square" lIns="0" tIns="0" rIns="0" bIns="0" rtlCol="0" anchor="t"/>
+          <a:lstStyle/>
+          <a:p>
+            <a:pPr algn="l" indent="0" marL="0">
+              <a:buNone/>
+            </a:pPr>
+            <a:r>
+              <a:rPr lang="en-US" sz="1250" dirty="0">
+                <a:solidFill>
+                  <a:srgbClr val="59636E"/>
+                </a:solidFill>
+                <a:latin typeface="Arial" pitchFamily="34" charset="0"/>
+                <a:ea typeface="Arial" pitchFamily="34" charset="-122"/>
+                <a:cs typeface="Arial" pitchFamily="34" charset="-120"/>
+              </a:rPr>
+              <a:t>Marketplace</a:t>
+            </a:r>
+            <a:endParaRPr lang="en-US" sz="1250" dirty="0"/>
+          </a:p>
+        </p:txBody>
+      </p:sp>
+      <p:sp>
+        <p:nvSpPr>
+          <p:cNvPr id="15" name="Text 10"/>
+          <p:cNvSpPr/>
+          <p:nvPr/>
+        </p:nvSpPr>
+        <p:spPr>
+          <a:xfrm>
+            <a:off x="695176" y="2176165"/>
+            <a:ext cx="431750" cy="431750"/>
+          </a:xfrm>
+          <a:prstGeom prst="roundRect">
+            <a:avLst>
+              <a:gd name="adj" fmla="val 20591"/>
+            </a:avLst>
+          </a:prstGeom>
+          <a:solidFill>
+            <a:srgbClr val="FBEFFF"/>
+          </a:solidFill>
+          <a:ln/>
+        </p:spPr>
+        <p:txBody>
+          <a:bodyPr wrap="square" rtlCol="0" anchor="ctr"/>
+          <a:lstStyle/>
+          <a:p>
+            <a:pPr indent="0" marL="0">
+              <a:buNone/>
+            </a:pPr>
+            <a:endParaRPr lang="en-US" dirty="0"/>
+          </a:p>
+        </p:txBody>
+      </p:sp>
+      <p:pic>
+        <p:nvPicPr>
+          <p:cNvPr id="16" name="Image 3" descr="/Users/danwahlin/.copilot/session-state/56a7a0da-def8-48d4-b5e8-0ac3878cb8dd/files/slides-build/icons/GoPlug-8250DF.png">    </p:cNvPr>
+          <p:cNvPicPr>
+            <a:picLocks noChangeAspect="1"/>
+          </p:cNvPicPr>
+          <p:nvPr/>
+        </p:nvPicPr>
+        <p:blipFill>
+          <a:blip r:embed="rId5"/>
+          <a:stretch>
+            <a:fillRect/>
+          </a:stretch>
+        </p:blipFill>
+        <p:spPr>
+          <a:xfrm>
+            <a:off x="790426" y="2271415"/>
+            <a:ext cx="241250" cy="241250"/>
+          </a:xfrm>
+          <a:prstGeom prst="rect">
+            <a:avLst/>
+          </a:prstGeom>
+        </p:spPr>
+      </p:pic>
+      <p:sp>
+        <p:nvSpPr>
+          <p:cNvPr id="17" name="Text 11"/>
+          <p:cNvSpPr/>
+          <p:nvPr/>
+        </p:nvSpPr>
+        <p:spPr>
+          <a:xfrm>
+            <a:off x="1304627" y="2149227"/>
+            <a:ext cx="6043496" cy="247650"/>
+          </a:xfrm>
+          <a:prstGeom prst="rect">
+            <a:avLst/>
+          </a:prstGeom>
+          <a:noFill/>
+          <a:ln/>
+        </p:spPr>
+        <p:txBody>
+          <a:bodyPr wrap="square" lIns="0" tIns="0" rIns="0" bIns="0" rtlCol="0" anchor="t"/>
+          <a:lstStyle/>
+          <a:p>
+            <a:pPr algn="l" indent="0" marL="0">
+              <a:buNone/>
+            </a:pPr>
+            <a:r>
+              <a:rPr lang="en-US" sz="1650" b="1" dirty="0">
+                <a:solidFill>
+                  <a:srgbClr val="1F2328"/>
+                </a:solidFill>
+                <a:latin typeface="Arial" pitchFamily="34" charset="0"/>
+                <a:ea typeface="Arial" pitchFamily="34" charset="-122"/>
+                <a:cs typeface="Arial" pitchFamily="34" charset="-120"/>
+              </a:rPr>
+              <a:t>modern-web-guidance</a:t>
+            </a:r>
+            <a:endParaRPr lang="en-US" sz="1650" dirty="0"/>
+          </a:p>
+        </p:txBody>
+      </p:sp>
+      <p:sp>
+        <p:nvSpPr>
+          <p:cNvPr id="18" name="Text 12"/>
+          <p:cNvSpPr/>
+          <p:nvPr/>
+        </p:nvSpPr>
+        <p:spPr>
+          <a:xfrm>
+            <a:off x="1304627" y="2434977"/>
+            <a:ext cx="6043496" cy="200025"/>
+          </a:xfrm>
+          <a:prstGeom prst="rect">
+            <a:avLst/>
+          </a:prstGeom>
+          <a:noFill/>
+          <a:ln/>
+        </p:spPr>
+        <p:txBody>
+          <a:bodyPr wrap="square" lIns="0" tIns="0" rIns="0" bIns="0" rtlCol="0" anchor="t"/>
+          <a:lstStyle/>
+          <a:p>
+            <a:pPr algn="l" indent="0" marL="0">
+              <a:buNone/>
+            </a:pPr>
+            <a:r>
+              <a:rPr lang="en-US" sz="1350" dirty="0">
+                <a:solidFill>
+                  <a:srgbClr val="59636E"/>
+                </a:solidFill>
+                <a:latin typeface="Arial" pitchFamily="34" charset="0"/>
+                <a:ea typeface="Arial" pitchFamily="34" charset="-122"/>
+                <a:cs typeface="Arial" pitchFamily="34" charset="-120"/>
+              </a:rPr>
+              <a:t>A skill and CLI tool that help agents build web apps with modern, secure APIs.</a:t>
+            </a:r>
+            <a:endParaRPr lang="en-US" sz="1350" dirty="0"/>
+          </a:p>
+        </p:txBody>
+      </p:sp>
+      <p:sp>
+        <p:nvSpPr>
+          <p:cNvPr id="19" name="Text 13"/>
+          <p:cNvSpPr/>
+          <p:nvPr/>
+        </p:nvSpPr>
+        <p:spPr>
+          <a:xfrm>
+            <a:off x="7407325" y="2214414"/>
+            <a:ext cx="1041350" cy="355402"/>
+          </a:xfrm>
+          <a:prstGeom prst="roundRect">
+            <a:avLst>
+              <a:gd name="adj" fmla="val 21441"/>
+            </a:avLst>
+          </a:prstGeom>
+          <a:solidFill>
+            <a:srgbClr val="FFFFFF"/>
+          </a:solidFill>
+          <a:ln w="9525">
+            <a:solidFill>
+              <a:srgbClr val="D1D9E0"/>
+            </a:solidFill>
+          </a:ln>
+        </p:spPr>
+        <p:txBody>
+          <a:bodyPr wrap="square" rtlCol="0" anchor="ctr"/>
+          <a:lstStyle/>
+          <a:p>
+            <a:pPr indent="0" marL="0">
+              <a:buNone/>
+            </a:pPr>
+            <a:endParaRPr lang="en-US" dirty="0"/>
+          </a:p>
+        </p:txBody>
+      </p:sp>
+      <p:sp>
+        <p:nvSpPr>
+          <p:cNvPr id="20" name="Text 14"/>
+          <p:cNvSpPr/>
+          <p:nvPr/>
+        </p:nvSpPr>
+        <p:spPr>
+          <a:xfrm>
+            <a:off x="7594550" y="2287339"/>
+            <a:ext cx="680237" cy="209550"/>
+          </a:xfrm>
+          <a:prstGeom prst="rect">
+            <a:avLst/>
+          </a:prstGeom>
+          <a:noFill/>
+          <a:ln/>
+        </p:spPr>
+        <p:txBody>
+          <a:bodyPr wrap="square" lIns="0" tIns="0" rIns="0" bIns="0" rtlCol="0" anchor="t"/>
+          <a:lstStyle/>
+          <a:p>
+            <a:pPr algn="l" indent="0" marL="0">
+              <a:buNone/>
+            </a:pPr>
+            <a:r>
+              <a:rPr lang="en-US" sz="1400" b="1" dirty="0">
+                <a:solidFill>
+                  <a:srgbClr val="1F2328"/>
+                </a:solidFill>
+                <a:latin typeface="Arial" pitchFamily="34" charset="0"/>
+                <a:ea typeface="Arial" pitchFamily="34" charset="-122"/>
+                <a:cs typeface="Arial" pitchFamily="34" charset="-120"/>
+              </a:rPr>
+              <a:t>+ Install</a:t>
+            </a:r>
+            <a:endParaRPr lang="en-US" sz="1400" dirty="0"/>
+          </a:p>
+        </p:txBody>
+      </p:sp>
+      <p:sp>
+        <p:nvSpPr>
+          <p:cNvPr id="21" name="Text 15"/>
+          <p:cNvSpPr/>
+          <p:nvPr/>
+        </p:nvSpPr>
+        <p:spPr>
+          <a:xfrm>
+            <a:off x="507950" y="2974628"/>
             <a:ext cx="2607618" cy="1127671"/>
           </a:xfrm>
           <a:prstGeom prst="roundRect">
@@ -3110,13 +3452,13 @@
       </p:sp>
       <p:sp>
         <p:nvSpPr>
-          <p:cNvPr id="12" name="Text 7"/>
-          <p:cNvSpPr/>
-          <p:nvPr/>
-        </p:nvSpPr>
-        <p:spPr>
-          <a:xfrm>
-            <a:off x="669875" y="3692277"/>
+          <p:cNvPr id="22" name="Text 16"/>
+          <p:cNvSpPr/>
+          <p:nvPr/>
+        </p:nvSpPr>
+        <p:spPr>
+          <a:xfrm>
+            <a:off x="669875" y="3136553"/>
             <a:ext cx="279350" cy="279350"/>
           </a:xfrm>
           <a:prstGeom prst="roundRect">
@@ -3142,13 +3484,13 @@
       </p:sp>
       <p:sp>
         <p:nvSpPr>
-          <p:cNvPr id="13" name="Text 8"/>
-          <p:cNvSpPr/>
-          <p:nvPr/>
-        </p:nvSpPr>
-        <p:spPr>
-          <a:xfrm>
-            <a:off x="764540" y="3736628"/>
+          <p:cNvPr id="23" name="Text 17"/>
+          <p:cNvSpPr/>
+          <p:nvPr/>
+        </p:nvSpPr>
+        <p:spPr>
+          <a:xfrm>
+            <a:off x="764540" y="3180904"/>
             <a:ext cx="90020" cy="190500"/>
           </a:xfrm>
           <a:prstGeom prst="rect">
@@ -3181,13 +3523,13 @@
       </p:sp>
       <p:sp>
         <p:nvSpPr>
-          <p:cNvPr id="14" name="Text 9"/>
-          <p:cNvSpPr/>
-          <p:nvPr/>
-        </p:nvSpPr>
-        <p:spPr>
-          <a:xfrm>
-            <a:off x="1063526" y="3717578"/>
+          <p:cNvPr id="24" name="Text 18"/>
+          <p:cNvSpPr/>
+          <p:nvPr/>
+        </p:nvSpPr>
+        <p:spPr>
+          <a:xfrm>
+            <a:off x="1063526" y="3161854"/>
             <a:ext cx="641071" cy="228600"/>
           </a:xfrm>
           <a:prstGeom prst="rect">
@@ -3223,13 +3565,13 @@
       </p:sp>
       <p:sp>
         <p:nvSpPr>
-          <p:cNvPr id="15" name="Text 10"/>
-          <p:cNvSpPr/>
-          <p:nvPr/>
-        </p:nvSpPr>
-        <p:spPr>
-          <a:xfrm>
-            <a:off x="669875" y="4047827"/>
+          <p:cNvPr id="25" name="Text 19"/>
+          <p:cNvSpPr/>
+          <p:nvPr/>
+        </p:nvSpPr>
+        <p:spPr>
+          <a:xfrm>
+            <a:off x="669875" y="3492103"/>
             <a:ext cx="2329443" cy="429220"/>
           </a:xfrm>
           <a:prstGeom prst="rect">
@@ -3299,13 +3641,13 @@
       </p:sp>
       <p:sp>
         <p:nvSpPr>
-          <p:cNvPr id="16" name="Text 11"/>
-          <p:cNvSpPr/>
-          <p:nvPr/>
-        </p:nvSpPr>
-        <p:spPr>
-          <a:xfrm>
-            <a:off x="3267968" y="3530352"/>
+          <p:cNvPr id="26" name="Text 20"/>
+          <p:cNvSpPr/>
+          <p:nvPr/>
+        </p:nvSpPr>
+        <p:spPr>
+          <a:xfrm>
+            <a:off x="3267968" y="2974628"/>
             <a:ext cx="2607766" cy="1127671"/>
           </a:xfrm>
           <a:prstGeom prst="roundRect">
@@ -3335,13 +3677,13 @@
       </p:sp>
       <p:sp>
         <p:nvSpPr>
-          <p:cNvPr id="17" name="Text 12"/>
-          <p:cNvSpPr/>
-          <p:nvPr/>
-        </p:nvSpPr>
-        <p:spPr>
-          <a:xfrm>
-            <a:off x="3429893" y="3692277"/>
+          <p:cNvPr id="27" name="Text 21"/>
+          <p:cNvSpPr/>
+          <p:nvPr/>
+        </p:nvSpPr>
+        <p:spPr>
+          <a:xfrm>
+            <a:off x="3429893" y="3136553"/>
             <a:ext cx="279350" cy="279350"/>
           </a:xfrm>
           <a:prstGeom prst="roundRect">
@@ -3367,13 +3709,13 @@
       </p:sp>
       <p:sp>
         <p:nvSpPr>
-          <p:cNvPr id="18" name="Text 13"/>
-          <p:cNvSpPr/>
-          <p:nvPr/>
-        </p:nvSpPr>
-        <p:spPr>
-          <a:xfrm>
-            <a:off x="3524558" y="3736628"/>
+          <p:cNvPr id="28" name="Text 22"/>
+          <p:cNvSpPr/>
+          <p:nvPr/>
+        </p:nvSpPr>
+        <p:spPr>
+          <a:xfrm>
+            <a:off x="3524558" y="3180904"/>
             <a:ext cx="90020" cy="190500"/>
           </a:xfrm>
           <a:prstGeom prst="rect">
@@ -3406,13 +3748,13 @@
       </p:sp>
       <p:sp>
         <p:nvSpPr>
-          <p:cNvPr id="19" name="Text 14"/>
-          <p:cNvSpPr/>
-          <p:nvPr/>
-        </p:nvSpPr>
-        <p:spPr>
-          <a:xfrm>
-            <a:off x="3823543" y="3717578"/>
+          <p:cNvPr id="29" name="Text 23"/>
+          <p:cNvSpPr/>
+          <p:nvPr/>
+        </p:nvSpPr>
+        <p:spPr>
+          <a:xfrm>
+            <a:off x="3823543" y="3161854"/>
             <a:ext cx="1781883" cy="228600"/>
           </a:xfrm>
           <a:prstGeom prst="rect">
@@ -3448,13 +3790,13 @@
       </p:sp>
       <p:sp>
         <p:nvSpPr>
-          <p:cNvPr id="20" name="Text 15"/>
-          <p:cNvSpPr/>
-          <p:nvPr/>
-        </p:nvSpPr>
-        <p:spPr>
-          <a:xfrm>
-            <a:off x="3429893" y="4047827"/>
+          <p:cNvPr id="30" name="Text 24"/>
+          <p:cNvSpPr/>
+          <p:nvPr/>
+        </p:nvSpPr>
+        <p:spPr>
+          <a:xfrm>
+            <a:off x="3429893" y="3492103"/>
             <a:ext cx="2329595" cy="448270"/>
           </a:xfrm>
           <a:prstGeom prst="rect">
@@ -3490,13 +3832,13 @@
       </p:sp>
       <p:sp>
         <p:nvSpPr>
-          <p:cNvPr id="21" name="Text 16"/>
-          <p:cNvSpPr/>
-          <p:nvPr/>
-        </p:nvSpPr>
-        <p:spPr>
-          <a:xfrm>
-            <a:off x="6028134" y="3530352"/>
+          <p:cNvPr id="31" name="Text 25"/>
+          <p:cNvSpPr/>
+          <p:nvPr/>
+        </p:nvSpPr>
+        <p:spPr>
+          <a:xfrm>
+            <a:off x="6028134" y="2974628"/>
             <a:ext cx="2607766" cy="1127671"/>
           </a:xfrm>
           <a:prstGeom prst="roundRect">
@@ -3526,13 +3868,13 @@
       </p:sp>
       <p:sp>
         <p:nvSpPr>
-          <p:cNvPr id="22" name="Text 17"/>
-          <p:cNvSpPr/>
-          <p:nvPr/>
-        </p:nvSpPr>
-        <p:spPr>
-          <a:xfrm>
-            <a:off x="6190059" y="3692277"/>
+          <p:cNvPr id="32" name="Text 26"/>
+          <p:cNvSpPr/>
+          <p:nvPr/>
+        </p:nvSpPr>
+        <p:spPr>
+          <a:xfrm>
+            <a:off x="6190059" y="3136553"/>
             <a:ext cx="279350" cy="279350"/>
           </a:xfrm>
           <a:prstGeom prst="roundRect">
@@ -3558,13 +3900,13 @@
       </p:sp>
       <p:sp>
         <p:nvSpPr>
-          <p:cNvPr id="23" name="Text 18"/>
-          <p:cNvSpPr/>
-          <p:nvPr/>
-        </p:nvSpPr>
-        <p:spPr>
-          <a:xfrm>
-            <a:off x="6284724" y="3736628"/>
+          <p:cNvPr id="33" name="Text 27"/>
+          <p:cNvSpPr/>
+          <p:nvPr/>
+        </p:nvSpPr>
+        <p:spPr>
+          <a:xfrm>
+            <a:off x="6284724" y="3180904"/>
             <a:ext cx="90020" cy="190500"/>
           </a:xfrm>
           <a:prstGeom prst="rect">
@@ -3597,13 +3939,13 @@
       </p:sp>
       <p:sp>
         <p:nvSpPr>
-          <p:cNvPr id="24" name="Text 19"/>
-          <p:cNvSpPr/>
-          <p:nvPr/>
-        </p:nvSpPr>
-        <p:spPr>
-          <a:xfrm>
-            <a:off x="6583710" y="3717578"/>
+          <p:cNvPr id="34" name="Text 28"/>
+          <p:cNvSpPr/>
+          <p:nvPr/>
+        </p:nvSpPr>
+        <p:spPr>
+          <a:xfrm>
+            <a:off x="6583710" y="3161854"/>
             <a:ext cx="1900291" cy="228600"/>
           </a:xfrm>
           <a:prstGeom prst="rect">
@@ -3639,13 +3981,13 @@
       </p:sp>
       <p:sp>
         <p:nvSpPr>
-          <p:cNvPr id="25" name="Text 20"/>
-          <p:cNvSpPr/>
-          <p:nvPr/>
-        </p:nvSpPr>
-        <p:spPr>
-          <a:xfrm>
-            <a:off x="6190059" y="4047827"/>
+          <p:cNvPr id="35" name="Text 29"/>
+          <p:cNvSpPr/>
+          <p:nvPr/>
+        </p:nvSpPr>
+        <p:spPr>
+          <a:xfrm>
+            <a:off x="6190059" y="3492103"/>
             <a:ext cx="2329595" cy="429220"/>
           </a:xfrm>
           <a:prstGeom prst="rect">

--- a/slides/05-mcp-plugins.pptx
+++ b/slides/05-mcp-plugins.pptx
@@ -2034,7 +2034,7 @@
       </p:grpSpPr>
       <p:pic>
         <p:nvPicPr>
-          <p:cNvPr id="2" name="Image 0" descr="/Users/danwahlin/.copilot/session-state/56a7a0da-def8-48d4-b5e8-0ac3878cb8dd/files/slides-build/img/grad-title.jpg">    </p:cNvPr>
+          <p:cNvPr id="2" name="Image 0" descr="/Users/danwahlin/.copilot/session-state/56a7a0da-def8-48d4-b5e8-0ac3878cb8dd/files/slides-build/img/grad-title-pattern.jpg">    </p:cNvPr>
           <p:cNvPicPr>
             <a:picLocks noChangeAspect="1"/>
           </p:cNvPicPr>
@@ -2446,7 +2446,7 @@
       </p:sp>
       <p:pic>
         <p:nvPicPr>
-          <p:cNvPr id="5" name="Image 0" descr="/Users/danwahlin/.copilot/session-state/56a7a0da-def8-48d4-b5e8-0ac3878cb8dd/files/slides-build/img/grad-corner.png">    </p:cNvPr>
+          <p:cNvPr id="5" name="Image 0" descr="/Users/danwahlin/.copilot/session-state/56a7a0da-def8-48d4-b5e8-0ac3878cb8dd/files/slides-build/img/grad-corner-pattern.png">    </p:cNvPr>
           <p:cNvPicPr>
             <a:picLocks noChangeAspect="1"/>
           </p:cNvPicPr>
@@ -2757,7 +2757,7 @@
       </p:grpSpPr>
       <p:pic>
         <p:nvPicPr>
-          <p:cNvPr id="2" name="Image 0" descr="/Users/danwahlin/.copilot/session-state/56a7a0da-def8-48d4-b5e8-0ac3878cb8dd/files/slides-build/img/grad-corner.png">    </p:cNvPr>
+          <p:cNvPr id="2" name="Image 0" descr="/Users/danwahlin/.copilot/session-state/56a7a0da-def8-48d4-b5e8-0ac3878cb8dd/files/slides-build/img/grad-corner-pattern.png">    </p:cNvPr>
           <p:cNvPicPr>
             <a:picLocks noChangeAspect="1"/>
           </p:cNvPicPr>
@@ -4089,7 +4089,7 @@
       </p:grpSpPr>
       <p:pic>
         <p:nvPicPr>
-          <p:cNvPr id="2" name="Image 0" descr="/Users/danwahlin/.copilot/session-state/56a7a0da-def8-48d4-b5e8-0ac3878cb8dd/files/slides-build/img/grad-corner.png">    </p:cNvPr>
+          <p:cNvPr id="2" name="Image 0" descr="/Users/danwahlin/.copilot/session-state/56a7a0da-def8-48d4-b5e8-0ac3878cb8dd/files/slides-build/img/grad-corner-pattern.png">    </p:cNvPr>
           <p:cNvPicPr>
             <a:picLocks noChangeAspect="1"/>
           </p:cNvPicPr>
@@ -5214,7 +5214,7 @@
       </p:grpSpPr>
       <p:pic>
         <p:nvPicPr>
-          <p:cNvPr id="2" name="Image 0" descr="/Users/danwahlin/.copilot/session-state/56a7a0da-def8-48d4-b5e8-0ac3878cb8dd/files/slides-build/img/grad-corner.png">    </p:cNvPr>
+          <p:cNvPr id="2" name="Image 0" descr="/Users/danwahlin/.copilot/session-state/56a7a0da-def8-48d4-b5e8-0ac3878cb8dd/files/slides-build/img/grad-corner-pattern.png">    </p:cNvPr>
           <p:cNvPicPr>
             <a:picLocks noChangeAspect="1"/>
           </p:cNvPicPr>
@@ -6122,7 +6122,7 @@
       </p:grpSpPr>
       <p:pic>
         <p:nvPicPr>
-          <p:cNvPr id="2" name="Image 0" descr="/Users/danwahlin/.copilot/session-state/56a7a0da-def8-48d4-b5e8-0ac3878cb8dd/files/slides-build/img/grad-corner.png">    </p:cNvPr>
+          <p:cNvPr id="2" name="Image 0" descr="/Users/danwahlin/.copilot/session-state/56a7a0da-def8-48d4-b5e8-0ac3878cb8dd/files/slides-build/img/grad-corner-pattern.png">    </p:cNvPr>
           <p:cNvPicPr>
             <a:picLocks noChangeAspect="1"/>
           </p:cNvPicPr>
@@ -7217,7 +7217,7 @@
       </p:grpSpPr>
       <p:pic>
         <p:nvPicPr>
-          <p:cNvPr id="2" name="Image 0" descr="/Users/danwahlin/.copilot/session-state/56a7a0da-def8-48d4-b5e8-0ac3878cb8dd/files/slides-build/img/grad-corner.png">    </p:cNvPr>
+          <p:cNvPr id="2" name="Image 0" descr="/Users/danwahlin/.copilot/session-state/56a7a0da-def8-48d4-b5e8-0ac3878cb8dd/files/slides-build/img/grad-corner-pattern.png">    </p:cNvPr>
           <p:cNvPicPr>
             <a:picLocks noChangeAspect="1"/>
           </p:cNvPicPr>
@@ -7942,7 +7942,7 @@
       </p:grpSpPr>
       <p:pic>
         <p:nvPicPr>
-          <p:cNvPr id="2" name="Image 0" descr="/Users/danwahlin/.copilot/session-state/56a7a0da-def8-48d4-b5e8-0ac3878cb8dd/files/slides-build/img/grad-corner.png">    </p:cNvPr>
+          <p:cNvPr id="2" name="Image 0" descr="/Users/danwahlin/.copilot/session-state/56a7a0da-def8-48d4-b5e8-0ac3878cb8dd/files/slides-build/img/grad-corner-pattern.png">    </p:cNvPr>
           <p:cNvPicPr>
             <a:picLocks noChangeAspect="1"/>
           </p:cNvPicPr>
@@ -8736,7 +8736,7 @@
       </p:grpSpPr>
       <p:pic>
         <p:nvPicPr>
-          <p:cNvPr id="2" name="Image 0" descr="/Users/danwahlin/.copilot/session-state/56a7a0da-def8-48d4-b5e8-0ac3878cb8dd/files/slides-build/img/grad-corner.png">    </p:cNvPr>
+          <p:cNvPr id="2" name="Image 0" descr="/Users/danwahlin/.copilot/session-state/56a7a0da-def8-48d4-b5e8-0ac3878cb8dd/files/slides-build/img/grad-corner-pattern.png">    </p:cNvPr>
           <p:cNvPicPr>
             <a:picLocks noChangeAspect="1"/>
           </p:cNvPicPr>
@@ -9732,7 +9732,7 @@
       </p:grpSpPr>
       <p:pic>
         <p:nvPicPr>
-          <p:cNvPr id="2" name="Image 0" descr="/Users/danwahlin/.copilot/session-state/56a7a0da-def8-48d4-b5e8-0ac3878cb8dd/files/slides-build/img/grad-corner.png">    </p:cNvPr>
+          <p:cNvPr id="2" name="Image 0" descr="/Users/danwahlin/.copilot/session-state/56a7a0da-def8-48d4-b5e8-0ac3878cb8dd/files/slides-build/img/grad-corner-pattern.png">    </p:cNvPr>
           <p:cNvPicPr>
             <a:picLocks noChangeAspect="1"/>
           </p:cNvPicPr>
@@ -10594,7 +10594,7 @@
       </p:sp>
       <p:pic>
         <p:nvPicPr>
-          <p:cNvPr id="5" name="Image 0" descr="/Users/danwahlin/.copilot/session-state/56a7a0da-def8-48d4-b5e8-0ac3878cb8dd/files/slides-build/img/grad-corner.png">    </p:cNvPr>
+          <p:cNvPr id="5" name="Image 0" descr="/Users/danwahlin/.copilot/session-state/56a7a0da-def8-48d4-b5e8-0ac3878cb8dd/files/slides-build/img/grad-corner-pattern.png">    </p:cNvPr>
           <p:cNvPicPr>
             <a:picLocks noChangeAspect="1"/>
           </p:cNvPicPr>
@@ -10905,7 +10905,7 @@
       </p:grpSpPr>
       <p:pic>
         <p:nvPicPr>
-          <p:cNvPr id="2" name="Image 0" descr="/Users/danwahlin/.copilot/session-state/56a7a0da-def8-48d4-b5e8-0ac3878cb8dd/files/slides-build/img/grad-corner.png">    </p:cNvPr>
+          <p:cNvPr id="2" name="Image 0" descr="/Users/danwahlin/.copilot/session-state/56a7a0da-def8-48d4-b5e8-0ac3878cb8dd/files/slides-build/img/grad-corner-pattern.png">    </p:cNvPr>
           <p:cNvPicPr>
             <a:picLocks noChangeAspect="1"/>
           </p:cNvPicPr>
@@ -11665,7 +11665,7 @@
       </p:grpSpPr>
       <p:pic>
         <p:nvPicPr>
-          <p:cNvPr id="2" name="Image 0" descr="/Users/danwahlin/.copilot/session-state/56a7a0da-def8-48d4-b5e8-0ac3878cb8dd/files/slides-build/img/grad-corner.png">    </p:cNvPr>
+          <p:cNvPr id="2" name="Image 0" descr="/Users/danwahlin/.copilot/session-state/56a7a0da-def8-48d4-b5e8-0ac3878cb8dd/files/slides-build/img/grad-corner-pattern.png">    </p:cNvPr>
           <p:cNvPicPr>
             <a:picLocks noChangeAspect="1"/>
           </p:cNvPicPr>
@@ -12672,7 +12672,7 @@
       </p:grpSpPr>
       <p:pic>
         <p:nvPicPr>
-          <p:cNvPr id="2" name="Image 0" descr="/Users/danwahlin/.copilot/session-state/56a7a0da-def8-48d4-b5e8-0ac3878cb8dd/files/slides-build/img/grad-corner.png">    </p:cNvPr>
+          <p:cNvPr id="2" name="Image 0" descr="/Users/danwahlin/.copilot/session-state/56a7a0da-def8-48d4-b5e8-0ac3878cb8dd/files/slides-build/img/grad-corner-pattern.png">    </p:cNvPr>
           <p:cNvPicPr>
             <a:picLocks noChangeAspect="1"/>
           </p:cNvPicPr>

--- a/slides/05-mcp-plugins.pptx
+++ b/slides/05-mcp-plugins.pptx
@@ -2034,7 +2034,13 @@
       </p:grpSpPr>
       <p:pic>
         <p:nvPicPr>
-          <p:cNvPr id="2" name="Image 0" descr="/Users/danwahlin/.copilot/session-state/56a7a0da-def8-48d4-b5e8-0ac3878cb8dd/files/slides-build/img/grad-title-pattern.jpg">    </p:cNvPr>
+          <p:cNvPr id="2" name="Image 0" descr="">
+            <a:extLst>
+              <a:ext uri="{C183D7F6-B498-43B3-948B-1728B52AA6E4}">
+                <adec:decorative xmlns:adec="http://schemas.microsoft.com/office/drawing/2017/decorative" val="1"/>
+              </a:ext>
+            </a:extLst>
+          </p:cNvPr>
           <p:cNvPicPr>
             <a:picLocks noChangeAspect="1"/>
           </p:cNvPicPr>
@@ -2058,7 +2064,7 @@
       </p:pic>
       <p:pic>
         <p:nvPicPr>
-          <p:cNvPr id="3" name="Image 1" descr="/Users/danwahlin/.copilot/session-state/56a7a0da-def8-48d4-b5e8-0ac3878cb8dd/files/slides-build/icons/FaGithub-1F2328.png">
+          <p:cNvPr id="3" name="Image 1" descr="Open this chapter on GitHub">
             <a:hlinkClick r:id="rId3" tooltip="https://github.com/github/copilot-app-for-beginners/tree/main/05-mcp-plugins"/>
           </p:cNvPr>
           <p:cNvPicPr>
@@ -2242,7 +2248,13 @@
       </p:sp>
       <p:pic>
         <p:nvPicPr>
-          <p:cNvPr id="8" name="Image 2" descr="/Users/danwahlin/.copilot/session-state/56a7a0da-def8-48d4-b5e8-0ac3878cb8dd/files/slides-build/icons/FaGithub-0969DA.png">    </p:cNvPr>
+          <p:cNvPr id="8" name="Image 2" descr="">
+            <a:extLst>
+              <a:ext uri="{C183D7F6-B498-43B3-948B-1728B52AA6E4}">
+                <adec:decorative xmlns:adec="http://schemas.microsoft.com/office/drawing/2017/decorative" val="1"/>
+              </a:ext>
+            </a:extLst>
+          </p:cNvPr>
           <p:cNvPicPr>
             <a:picLocks noChangeAspect="1"/>
           </p:cNvPicPr>
@@ -2446,7 +2458,13 @@
       </p:sp>
       <p:pic>
         <p:nvPicPr>
-          <p:cNvPr id="5" name="Image 0" descr="/Users/danwahlin/.copilot/session-state/56a7a0da-def8-48d4-b5e8-0ac3878cb8dd/files/slides-build/img/grad-corner-pattern.png">    </p:cNvPr>
+          <p:cNvPr id="5" name="Image 0" descr="">
+            <a:extLst>
+              <a:ext uri="{C183D7F6-B498-43B3-948B-1728B52AA6E4}">
+                <adec:decorative xmlns:adec="http://schemas.microsoft.com/office/drawing/2017/decorative" val="1"/>
+              </a:ext>
+            </a:extLst>
+          </p:cNvPr>
           <p:cNvPicPr>
             <a:picLocks noChangeAspect="1"/>
           </p:cNvPicPr>
@@ -2541,7 +2559,7 @@
       </p:sp>
       <p:pic>
         <p:nvPicPr>
-          <p:cNvPr id="8" name="Image 1" descr="/Users/danwahlin/.copilot/session-state/56a7a0da-def8-48d4-b5e8-0ac3878cb8dd/files/slides-build/icons/FaGithub-1F2328.png">
+          <p:cNvPr id="8" name="Image 1" descr="Open this chapter on GitHub">
             <a:hlinkClick r:id="rId3" tooltip="https://github.com/github/copilot-app-for-beginners/tree/main/05-mcp-plugins"/>
           </p:cNvPr>
           <p:cNvPicPr>
@@ -2757,7 +2775,13 @@
       </p:grpSpPr>
       <p:pic>
         <p:nvPicPr>
-          <p:cNvPr id="2" name="Image 0" descr="/Users/danwahlin/.copilot/session-state/56a7a0da-def8-48d4-b5e8-0ac3878cb8dd/files/slides-build/img/grad-corner-pattern.png">    </p:cNvPr>
+          <p:cNvPr id="2" name="Image 0" descr="">
+            <a:extLst>
+              <a:ext uri="{C183D7F6-B498-43B3-948B-1728B52AA6E4}">
+                <adec:decorative xmlns:adec="http://schemas.microsoft.com/office/drawing/2017/decorative" val="1"/>
+              </a:ext>
+            </a:extLst>
+          </p:cNvPr>
           <p:cNvPicPr>
             <a:picLocks noChangeAspect="1"/>
           </p:cNvPicPr>
@@ -2852,7 +2876,7 @@
       </p:sp>
       <p:pic>
         <p:nvPicPr>
-          <p:cNvPr id="5" name="Image 1" descr="/Users/danwahlin/.copilot/session-state/56a7a0da-def8-48d4-b5e8-0ac3878cb8dd/files/slides-build/icons/FaGithub-1F2328.png">
+          <p:cNvPr id="5" name="Image 1" descr="Open this chapter on GitHub">
             <a:hlinkClick r:id="rId3" tooltip="https://github.com/github/copilot-app-for-beginners/tree/main/05-mcp-plugins"/>
           </p:cNvPr>
           <p:cNvPicPr>
@@ -3105,7 +3129,13 @@
       </p:sp>
       <p:pic>
         <p:nvPicPr>
-          <p:cNvPr id="12" name="Image 2" descr="/Users/danwahlin/.copilot/session-state/56a7a0da-def8-48d4-b5e8-0ac3878cb8dd/files/slides-build/icons/GoChevronDown-59636E.png">    </p:cNvPr>
+          <p:cNvPr id="12" name="Image 2" descr="">
+            <a:extLst>
+              <a:ext uri="{C183D7F6-B498-43B3-948B-1728B52AA6E4}">
+                <adec:decorative xmlns:adec="http://schemas.microsoft.com/office/drawing/2017/decorative" val="1"/>
+              </a:ext>
+            </a:extLst>
+          </p:cNvPr>
           <p:cNvPicPr>
             <a:picLocks noChangeAspect="1"/>
           </p:cNvPicPr>
@@ -3239,7 +3269,13 @@
       </p:sp>
       <p:pic>
         <p:nvPicPr>
-          <p:cNvPr id="16" name="Image 3" descr="/Users/danwahlin/.copilot/session-state/56a7a0da-def8-48d4-b5e8-0ac3878cb8dd/files/slides-build/icons/GoPlug-8250DF.png">    </p:cNvPr>
+          <p:cNvPr id="16" name="Image 3" descr="">
+            <a:extLst>
+              <a:ext uri="{C183D7F6-B498-43B3-948B-1728B52AA6E4}">
+                <adec:decorative xmlns:adec="http://schemas.microsoft.com/office/drawing/2017/decorative" val="1"/>
+              </a:ext>
+            </a:extLst>
+          </p:cNvPr>
           <p:cNvPicPr>
             <a:picLocks noChangeAspect="1"/>
           </p:cNvPicPr>
@@ -4089,7 +4125,13 @@
       </p:grpSpPr>
       <p:pic>
         <p:nvPicPr>
-          <p:cNvPr id="2" name="Image 0" descr="/Users/danwahlin/.copilot/session-state/56a7a0da-def8-48d4-b5e8-0ac3878cb8dd/files/slides-build/img/grad-corner-pattern.png">    </p:cNvPr>
+          <p:cNvPr id="2" name="Image 0" descr="">
+            <a:extLst>
+              <a:ext uri="{C183D7F6-B498-43B3-948B-1728B52AA6E4}">
+                <adec:decorative xmlns:adec="http://schemas.microsoft.com/office/drawing/2017/decorative" val="1"/>
+              </a:ext>
+            </a:extLst>
+          </p:cNvPr>
           <p:cNvPicPr>
             <a:picLocks noChangeAspect="1"/>
           </p:cNvPicPr>
@@ -4184,7 +4226,7 @@
       </p:sp>
       <p:pic>
         <p:nvPicPr>
-          <p:cNvPr id="5" name="Image 1" descr="/Users/danwahlin/.copilot/session-state/56a7a0da-def8-48d4-b5e8-0ac3878cb8dd/files/slides-build/icons/FaGithub-1F2328.png">
+          <p:cNvPr id="5" name="Image 1" descr="Open this chapter on GitHub">
             <a:hlinkClick r:id="rId3" tooltip="https://github.com/github/copilot-app-for-beginners/tree/main/05-mcp-plugins"/>
           </p:cNvPr>
           <p:cNvPicPr>
@@ -4543,7 +4585,13 @@
       </p:sp>
       <p:pic>
         <p:nvPicPr>
-          <p:cNvPr id="14" name="Image 2" descr="/Users/danwahlin/.copilot/session-state/56a7a0da-def8-48d4-b5e8-0ac3878cb8dd/files/slides-build/icons/GoCopilot-8250DF.png">    </p:cNvPr>
+          <p:cNvPr id="14" name="Image 2" descr="">
+            <a:extLst>
+              <a:ext uri="{C183D7F6-B498-43B3-948B-1728B52AA6E4}">
+                <adec:decorative xmlns:adec="http://schemas.microsoft.com/office/drawing/2017/decorative" val="1"/>
+              </a:ext>
+            </a:extLst>
+          </p:cNvPr>
           <p:cNvPicPr>
             <a:picLocks noChangeAspect="1"/>
           </p:cNvPicPr>
@@ -4758,7 +4806,13 @@
       </p:sp>
       <p:pic>
         <p:nvPicPr>
-          <p:cNvPr id="20" name="Image 3" descr="/Users/danwahlin/.copilot/session-state/56a7a0da-def8-48d4-b5e8-0ac3878cb8dd/files/slides-build/icons/GoCheckCircle-1A7F37.png">    </p:cNvPr>
+          <p:cNvPr id="20" name="Image 3" descr="">
+            <a:extLst>
+              <a:ext uri="{C183D7F6-B498-43B3-948B-1728B52AA6E4}">
+                <adec:decorative xmlns:adec="http://schemas.microsoft.com/office/drawing/2017/decorative" val="1"/>
+              </a:ext>
+            </a:extLst>
+          </p:cNvPr>
           <p:cNvPicPr>
             <a:picLocks noChangeAspect="1"/>
           </p:cNvPicPr>
@@ -5082,7 +5136,13 @@
       </p:sp>
       <p:pic>
         <p:nvPicPr>
-          <p:cNvPr id="29" name="Image 4" descr="/Users/danwahlin/.copilot/session-state/56a7a0da-def8-48d4-b5e8-0ac3878cb8dd/files/slides-build/icons/GoInfo-0969DA.png">    </p:cNvPr>
+          <p:cNvPr id="29" name="Image 4" descr="">
+            <a:extLst>
+              <a:ext uri="{C183D7F6-B498-43B3-948B-1728B52AA6E4}">
+                <adec:decorative xmlns:adec="http://schemas.microsoft.com/office/drawing/2017/decorative" val="1"/>
+              </a:ext>
+            </a:extLst>
+          </p:cNvPr>
           <p:cNvPicPr>
             <a:picLocks noChangeAspect="1"/>
           </p:cNvPicPr>
@@ -5214,7 +5274,13 @@
       </p:grpSpPr>
       <p:pic>
         <p:nvPicPr>
-          <p:cNvPr id="2" name="Image 0" descr="/Users/danwahlin/.copilot/session-state/56a7a0da-def8-48d4-b5e8-0ac3878cb8dd/files/slides-build/img/grad-corner-pattern.png">    </p:cNvPr>
+          <p:cNvPr id="2" name="Image 0" descr="">
+            <a:extLst>
+              <a:ext uri="{C183D7F6-B498-43B3-948B-1728B52AA6E4}">
+                <adec:decorative xmlns:adec="http://schemas.microsoft.com/office/drawing/2017/decorative" val="1"/>
+              </a:ext>
+            </a:extLst>
+          </p:cNvPr>
           <p:cNvPicPr>
             <a:picLocks noChangeAspect="1"/>
           </p:cNvPicPr>
@@ -5309,7 +5375,7 @@
       </p:sp>
       <p:pic>
         <p:nvPicPr>
-          <p:cNvPr id="5" name="Image 1" descr="/Users/danwahlin/.copilot/session-state/56a7a0da-def8-48d4-b5e8-0ac3878cb8dd/files/slides-build/icons/FaGithub-1F2328.png">
+          <p:cNvPr id="5" name="Image 1" descr="Open this chapter on GitHub">
             <a:hlinkClick r:id="rId3" tooltip="https://github.com/github/copilot-app-for-beginners/tree/main/05-mcp-plugins"/>
           </p:cNvPr>
           <p:cNvPicPr>
@@ -5990,7 +6056,13 @@
       </p:sp>
       <p:pic>
         <p:nvPicPr>
-          <p:cNvPr id="23" name="Image 2" descr="/Users/danwahlin/.copilot/session-state/56a7a0da-def8-48d4-b5e8-0ac3878cb8dd/files/slides-build/icons/GoShieldCheck-BC4C00.png">    </p:cNvPr>
+          <p:cNvPr id="23" name="Image 2" descr="">
+            <a:extLst>
+              <a:ext uri="{C183D7F6-B498-43B3-948B-1728B52AA6E4}">
+                <adec:decorative xmlns:adec="http://schemas.microsoft.com/office/drawing/2017/decorative" val="1"/>
+              </a:ext>
+            </a:extLst>
+          </p:cNvPr>
           <p:cNvPicPr>
             <a:picLocks noChangeAspect="1"/>
           </p:cNvPicPr>
@@ -6122,7 +6194,13 @@
       </p:grpSpPr>
       <p:pic>
         <p:nvPicPr>
-          <p:cNvPr id="2" name="Image 0" descr="/Users/danwahlin/.copilot/session-state/56a7a0da-def8-48d4-b5e8-0ac3878cb8dd/files/slides-build/img/grad-corner-pattern.png">    </p:cNvPr>
+          <p:cNvPr id="2" name="Image 0" descr="">
+            <a:extLst>
+              <a:ext uri="{C183D7F6-B498-43B3-948B-1728B52AA6E4}">
+                <adec:decorative xmlns:adec="http://schemas.microsoft.com/office/drawing/2017/decorative" val="1"/>
+              </a:ext>
+            </a:extLst>
+          </p:cNvPr>
           <p:cNvPicPr>
             <a:picLocks noChangeAspect="1"/>
           </p:cNvPicPr>
@@ -6217,7 +6295,7 @@
       </p:sp>
       <p:pic>
         <p:nvPicPr>
-          <p:cNvPr id="5" name="Image 1" descr="/Users/danwahlin/.copilot/session-state/56a7a0da-def8-48d4-b5e8-0ac3878cb8dd/files/slides-build/icons/FaGithub-1F2328.png">
+          <p:cNvPr id="5" name="Image 1" descr="Open this chapter on GitHub">
             <a:hlinkClick r:id="rId3" tooltip="https://github.com/github/copilot-app-for-beginners/tree/main/05-mcp-plugins"/>
           </p:cNvPr>
           <p:cNvPicPr>
@@ -6991,7 +7069,13 @@
       </p:sp>
       <p:pic>
         <p:nvPicPr>
-          <p:cNvPr id="26" name="Image 2" descr="/Users/danwahlin/.copilot/session-state/56a7a0da-def8-48d4-b5e8-0ac3878cb8dd/files/slides-build/icons/FaGithub-0969DA.png">    </p:cNvPr>
+          <p:cNvPr id="26" name="Image 2" descr="">
+            <a:extLst>
+              <a:ext uri="{C183D7F6-B498-43B3-948B-1728B52AA6E4}">
+                <adec:decorative xmlns:adec="http://schemas.microsoft.com/office/drawing/2017/decorative" val="1"/>
+              </a:ext>
+            </a:extLst>
+          </p:cNvPr>
           <p:cNvPicPr>
             <a:picLocks noChangeAspect="1"/>
           </p:cNvPicPr>
@@ -7217,7 +7301,13 @@
       </p:grpSpPr>
       <p:pic>
         <p:nvPicPr>
-          <p:cNvPr id="2" name="Image 0" descr="/Users/danwahlin/.copilot/session-state/56a7a0da-def8-48d4-b5e8-0ac3878cb8dd/files/slides-build/img/grad-corner-pattern.png">    </p:cNvPr>
+          <p:cNvPr id="2" name="Image 0" descr="">
+            <a:extLst>
+              <a:ext uri="{C183D7F6-B498-43B3-948B-1728B52AA6E4}">
+                <adec:decorative xmlns:adec="http://schemas.microsoft.com/office/drawing/2017/decorative" val="1"/>
+              </a:ext>
+            </a:extLst>
+          </p:cNvPr>
           <p:cNvPicPr>
             <a:picLocks noChangeAspect="1"/>
           </p:cNvPicPr>
@@ -7312,7 +7402,7 @@
       </p:sp>
       <p:pic>
         <p:nvPicPr>
-          <p:cNvPr id="5" name="Image 1" descr="/Users/danwahlin/.copilot/session-state/56a7a0da-def8-48d4-b5e8-0ac3878cb8dd/files/slides-build/icons/FaGithub-1F2328.png">
+          <p:cNvPr id="5" name="Image 1" descr="Open this chapter on GitHub">
             <a:hlinkClick r:id="rId3" tooltip="https://github.com/github/copilot-app-for-beginners/tree/main/05-mcp-plugins"/>
           </p:cNvPr>
           <p:cNvPicPr>
@@ -7942,7 +8032,13 @@
       </p:grpSpPr>
       <p:pic>
         <p:nvPicPr>
-          <p:cNvPr id="2" name="Image 0" descr="/Users/danwahlin/.copilot/session-state/56a7a0da-def8-48d4-b5e8-0ac3878cb8dd/files/slides-build/img/grad-corner-pattern.png">    </p:cNvPr>
+          <p:cNvPr id="2" name="Image 0" descr="">
+            <a:extLst>
+              <a:ext uri="{C183D7F6-B498-43B3-948B-1728B52AA6E4}">
+                <adec:decorative xmlns:adec="http://schemas.microsoft.com/office/drawing/2017/decorative" val="1"/>
+              </a:ext>
+            </a:extLst>
+          </p:cNvPr>
           <p:cNvPicPr>
             <a:picLocks noChangeAspect="1"/>
           </p:cNvPicPr>
@@ -8037,7 +8133,7 @@
       </p:sp>
       <p:pic>
         <p:nvPicPr>
-          <p:cNvPr id="5" name="Image 1" descr="/Users/danwahlin/.copilot/session-state/56a7a0da-def8-48d4-b5e8-0ac3878cb8dd/files/slides-build/icons/FaGithub-1F2328.png">
+          <p:cNvPr id="5" name="Image 1" descr="Open this chapter on GitHub">
             <a:hlinkClick r:id="rId3" tooltip="https://github.com/github/copilot-app-for-beginners/tree/main/05-mcp-plugins"/>
           </p:cNvPr>
           <p:cNvPicPr>
@@ -8235,7 +8331,7 @@
       </p:sp>
       <p:pic>
         <p:nvPicPr>
-          <p:cNvPr id="10" name="Image 2" descr="/Users/danwahlin/.copilot/session-state/56a7a0da-def8-48d4-b5e8-0ac3878cb8dd/files/slides-build/img/05-extending-copilot-app.jpg">    </p:cNvPr>
+          <p:cNvPr id="10" name="Image 2" descr="Skills and agents customize the Copilot app's work; MCP servers and plugins extend its capabilities">    </p:cNvPr>
           <p:cNvPicPr>
             <a:picLocks noChangeAspect="1"/>
           </p:cNvPicPr>
@@ -8291,7 +8387,13 @@
       </p:sp>
       <p:pic>
         <p:nvPicPr>
-          <p:cNvPr id="12" name="Image 3" descr="/Users/danwahlin/.copilot/session-state/56a7a0da-def8-48d4-b5e8-0ac3878cb8dd/files/slides-build/icons/GoChecklist-8250DF.png">    </p:cNvPr>
+          <p:cNvPr id="12" name="Image 3" descr="">
+            <a:extLst>
+              <a:ext uri="{C183D7F6-B498-43B3-948B-1728B52AA6E4}">
+                <adec:decorative xmlns:adec="http://schemas.microsoft.com/office/drawing/2017/decorative" val="1"/>
+              </a:ext>
+            </a:extLst>
+          </p:cNvPr>
           <p:cNvPicPr>
             <a:picLocks noChangeAspect="1"/>
           </p:cNvPicPr>
@@ -8462,7 +8564,13 @@
       </p:sp>
       <p:pic>
         <p:nvPicPr>
-          <p:cNvPr id="16" name="Image 4" descr="/Users/danwahlin/.copilot/session-state/56a7a0da-def8-48d4-b5e8-0ac3878cb8dd/files/slides-build/icons/GoPlug-0969DA.png">    </p:cNvPr>
+          <p:cNvPr id="16" name="Image 4" descr="">
+            <a:extLst>
+              <a:ext uri="{C183D7F6-B498-43B3-948B-1728B52AA6E4}">
+                <adec:decorative xmlns:adec="http://schemas.microsoft.com/office/drawing/2017/decorative" val="1"/>
+              </a:ext>
+            </a:extLst>
+          </p:cNvPr>
           <p:cNvPicPr>
             <a:picLocks noChangeAspect="1"/>
           </p:cNvPicPr>
@@ -8599,7 +8707,13 @@
       </p:sp>
       <p:pic>
         <p:nvPicPr>
-          <p:cNvPr id="20" name="Image 5" descr="/Users/danwahlin/.copilot/session-state/56a7a0da-def8-48d4-b5e8-0ac3878cb8dd/files/slides-build/icons/GoPackage-1A7F37.png">    </p:cNvPr>
+          <p:cNvPr id="20" name="Image 5" descr="">
+            <a:extLst>
+              <a:ext uri="{C183D7F6-B498-43B3-948B-1728B52AA6E4}">
+                <adec:decorative xmlns:adec="http://schemas.microsoft.com/office/drawing/2017/decorative" val="1"/>
+              </a:ext>
+            </a:extLst>
+          </p:cNvPr>
           <p:cNvPicPr>
             <a:picLocks noChangeAspect="1"/>
           </p:cNvPicPr>
@@ -8736,7 +8850,13 @@
       </p:grpSpPr>
       <p:pic>
         <p:nvPicPr>
-          <p:cNvPr id="2" name="Image 0" descr="/Users/danwahlin/.copilot/session-state/56a7a0da-def8-48d4-b5e8-0ac3878cb8dd/files/slides-build/img/grad-corner-pattern.png">    </p:cNvPr>
+          <p:cNvPr id="2" name="Image 0" descr="">
+            <a:extLst>
+              <a:ext uri="{C183D7F6-B498-43B3-948B-1728B52AA6E4}">
+                <adec:decorative xmlns:adec="http://schemas.microsoft.com/office/drawing/2017/decorative" val="1"/>
+              </a:ext>
+            </a:extLst>
+          </p:cNvPr>
           <p:cNvPicPr>
             <a:picLocks noChangeAspect="1"/>
           </p:cNvPicPr>
@@ -8831,7 +8951,7 @@
       </p:sp>
       <p:pic>
         <p:nvPicPr>
-          <p:cNvPr id="5" name="Image 1" descr="/Users/danwahlin/.copilot/session-state/56a7a0da-def8-48d4-b5e8-0ac3878cb8dd/files/slides-build/icons/FaGithub-1F2328.png">
+          <p:cNvPr id="5" name="Image 1" descr="Open this chapter on GitHub">
             <a:hlinkClick r:id="rId3" tooltip="https://github.com/github/copilot-app-for-beginners/tree/main/05-mcp-plugins"/>
           </p:cNvPr>
           <p:cNvPicPr>
@@ -9094,7 +9214,13 @@
       </p:sp>
       <p:pic>
         <p:nvPicPr>
-          <p:cNvPr id="11" name="Image 2" descr="/Users/danwahlin/.copilot/session-state/56a7a0da-def8-48d4-b5e8-0ac3878cb8dd/files/slides-build/icons/GoPlug-0969DA.png">    </p:cNvPr>
+          <p:cNvPr id="11" name="Image 2" descr="">
+            <a:extLst>
+              <a:ext uri="{C183D7F6-B498-43B3-948B-1728B52AA6E4}">
+                <adec:decorative xmlns:adec="http://schemas.microsoft.com/office/drawing/2017/decorative" val="1"/>
+              </a:ext>
+            </a:extLst>
+          </p:cNvPr>
           <p:cNvPicPr>
             <a:picLocks noChangeAspect="1"/>
           </p:cNvPicPr>
@@ -9363,7 +9489,13 @@
       </p:sp>
       <p:pic>
         <p:nvPicPr>
-          <p:cNvPr id="17" name="Image 3" descr="/Users/danwahlin/.copilot/session-state/56a7a0da-def8-48d4-b5e8-0ac3878cb8dd/files/slides-build/icons/GoPackage-1A7F37.png">    </p:cNvPr>
+          <p:cNvPr id="17" name="Image 3" descr="">
+            <a:extLst>
+              <a:ext uri="{C183D7F6-B498-43B3-948B-1728B52AA6E4}">
+                <adec:decorative xmlns:adec="http://schemas.microsoft.com/office/drawing/2017/decorative" val="1"/>
+              </a:ext>
+            </a:extLst>
+          </p:cNvPr>
           <p:cNvPicPr>
             <a:picLocks noChangeAspect="1"/>
           </p:cNvPicPr>
@@ -9600,7 +9732,13 @@
       </p:sp>
       <p:pic>
         <p:nvPicPr>
-          <p:cNvPr id="22" name="Image 4" descr="/Users/danwahlin/.copilot/session-state/56a7a0da-def8-48d4-b5e8-0ac3878cb8dd/files/slides-build/icons/GoAlert-9A6700.png">    </p:cNvPr>
+          <p:cNvPr id="22" name="Image 4" descr="">
+            <a:extLst>
+              <a:ext uri="{C183D7F6-B498-43B3-948B-1728B52AA6E4}">
+                <adec:decorative xmlns:adec="http://schemas.microsoft.com/office/drawing/2017/decorative" val="1"/>
+              </a:ext>
+            </a:extLst>
+          </p:cNvPr>
           <p:cNvPicPr>
             <a:picLocks noChangeAspect="1"/>
           </p:cNvPicPr>
@@ -9732,7 +9870,13 @@
       </p:grpSpPr>
       <p:pic>
         <p:nvPicPr>
-          <p:cNvPr id="2" name="Image 0" descr="/Users/danwahlin/.copilot/session-state/56a7a0da-def8-48d4-b5e8-0ac3878cb8dd/files/slides-build/img/grad-corner-pattern.png">    </p:cNvPr>
+          <p:cNvPr id="2" name="Image 0" descr="">
+            <a:extLst>
+              <a:ext uri="{C183D7F6-B498-43B3-948B-1728B52AA6E4}">
+                <adec:decorative xmlns:adec="http://schemas.microsoft.com/office/drawing/2017/decorative" val="1"/>
+              </a:ext>
+            </a:extLst>
+          </p:cNvPr>
           <p:cNvPicPr>
             <a:picLocks noChangeAspect="1"/>
           </p:cNvPicPr>
@@ -9827,7 +9971,7 @@
       </p:sp>
       <p:pic>
         <p:nvPicPr>
-          <p:cNvPr id="5" name="Image 1" descr="/Users/danwahlin/.copilot/session-state/56a7a0da-def8-48d4-b5e8-0ac3878cb8dd/files/slides-build/icons/FaGithub-1F2328.png">
+          <p:cNvPr id="5" name="Image 1" descr="Open this chapter on GitHub">
             <a:hlinkClick r:id="rId3" tooltip="https://github.com/github/copilot-app-for-beginners/tree/main/05-mcp-plugins"/>
           </p:cNvPr>
           <p:cNvPicPr>
@@ -10025,7 +10169,7 @@
       </p:sp>
       <p:pic>
         <p:nvPicPr>
-          <p:cNvPr id="10" name="Image 2" descr="/Users/danwahlin/.copilot/session-state/56a7a0da-def8-48d4-b5e8-0ac3878cb8dd/files/slides-build/img/05-least-tool-principle.jpg">    </p:cNvPr>
+          <p:cNvPr id="10" name="Image 2" descr="A toolbox where only Repo, Docs, and Skill are highlighted: give the agent only what it needs for less noise">    </p:cNvPr>
           <p:cNvPicPr>
             <a:picLocks noChangeAspect="1"/>
           </p:cNvPicPr>
@@ -10081,7 +10225,13 @@
       </p:sp>
       <p:pic>
         <p:nvPicPr>
-          <p:cNvPr id="12" name="Image 3" descr="/Users/danwahlin/.copilot/session-state/56a7a0da-def8-48d4-b5e8-0ac3878cb8dd/files/slides-build/icons/GoTools-1A7F37.png">    </p:cNvPr>
+          <p:cNvPr id="12" name="Image 3" descr="">
+            <a:extLst>
+              <a:ext uri="{C183D7F6-B498-43B3-948B-1728B52AA6E4}">
+                <adec:decorative xmlns:adec="http://schemas.microsoft.com/office/drawing/2017/decorative" val="1"/>
+              </a:ext>
+            </a:extLst>
+          </p:cNvPr>
           <p:cNvPicPr>
             <a:picLocks noChangeAspect="1"/>
           </p:cNvPicPr>
@@ -10218,7 +10368,13 @@
       </p:sp>
       <p:pic>
         <p:nvPicPr>
-          <p:cNvPr id="16" name="Image 4" descr="/Users/danwahlin/.copilot/session-state/56a7a0da-def8-48d4-b5e8-0ac3878cb8dd/files/slides-build/icons/GoPlug-1A7F37.png">    </p:cNvPr>
+          <p:cNvPr id="16" name="Image 4" descr="">
+            <a:extLst>
+              <a:ext uri="{C183D7F6-B498-43B3-948B-1728B52AA6E4}">
+                <adec:decorative xmlns:adec="http://schemas.microsoft.com/office/drawing/2017/decorative" val="1"/>
+              </a:ext>
+            </a:extLst>
+          </p:cNvPr>
           <p:cNvPicPr>
             <a:picLocks noChangeAspect="1"/>
           </p:cNvPicPr>
@@ -10355,7 +10511,13 @@
       </p:sp>
       <p:pic>
         <p:nvPicPr>
-          <p:cNvPr id="20" name="Image 5" descr="/Users/danwahlin/.copilot/session-state/56a7a0da-def8-48d4-b5e8-0ac3878cb8dd/files/slides-build/icons/GoShieldCheck-1A7F37.png">    </p:cNvPr>
+          <p:cNvPr id="20" name="Image 5" descr="">
+            <a:extLst>
+              <a:ext uri="{C183D7F6-B498-43B3-948B-1728B52AA6E4}">
+                <adec:decorative xmlns:adec="http://schemas.microsoft.com/office/drawing/2017/decorative" val="1"/>
+              </a:ext>
+            </a:extLst>
+          </p:cNvPr>
           <p:cNvPicPr>
             <a:picLocks noChangeAspect="1"/>
           </p:cNvPicPr>
@@ -10594,7 +10756,13 @@
       </p:sp>
       <p:pic>
         <p:nvPicPr>
-          <p:cNvPr id="5" name="Image 0" descr="/Users/danwahlin/.copilot/session-state/56a7a0da-def8-48d4-b5e8-0ac3878cb8dd/files/slides-build/img/grad-corner-pattern.png">    </p:cNvPr>
+          <p:cNvPr id="5" name="Image 0" descr="">
+            <a:extLst>
+              <a:ext uri="{C183D7F6-B498-43B3-948B-1728B52AA6E4}">
+                <adec:decorative xmlns:adec="http://schemas.microsoft.com/office/drawing/2017/decorative" val="1"/>
+              </a:ext>
+            </a:extLst>
+          </p:cNvPr>
           <p:cNvPicPr>
             <a:picLocks noChangeAspect="1"/>
           </p:cNvPicPr>
@@ -10689,7 +10857,7 @@
       </p:sp>
       <p:pic>
         <p:nvPicPr>
-          <p:cNvPr id="8" name="Image 1" descr="/Users/danwahlin/.copilot/session-state/56a7a0da-def8-48d4-b5e8-0ac3878cb8dd/files/slides-build/icons/FaGithub-1F2328.png">
+          <p:cNvPr id="8" name="Image 1" descr="Open this chapter on GitHub">
             <a:hlinkClick r:id="rId3" tooltip="https://github.com/github/copilot-app-for-beginners/tree/main/05-mcp-plugins"/>
           </p:cNvPr>
           <p:cNvPicPr>
@@ -10905,7 +11073,13 @@
       </p:grpSpPr>
       <p:pic>
         <p:nvPicPr>
-          <p:cNvPr id="2" name="Image 0" descr="/Users/danwahlin/.copilot/session-state/56a7a0da-def8-48d4-b5e8-0ac3878cb8dd/files/slides-build/img/grad-corner-pattern.png">    </p:cNvPr>
+          <p:cNvPr id="2" name="Image 0" descr="">
+            <a:extLst>
+              <a:ext uri="{C183D7F6-B498-43B3-948B-1728B52AA6E4}">
+                <adec:decorative xmlns:adec="http://schemas.microsoft.com/office/drawing/2017/decorative" val="1"/>
+              </a:ext>
+            </a:extLst>
+          </p:cNvPr>
           <p:cNvPicPr>
             <a:picLocks noChangeAspect="1"/>
           </p:cNvPicPr>
@@ -11000,7 +11174,7 @@
       </p:sp>
       <p:pic>
         <p:nvPicPr>
-          <p:cNvPr id="5" name="Image 1" descr="/Users/danwahlin/.copilot/session-state/56a7a0da-def8-48d4-b5e8-0ac3878cb8dd/files/slides-build/icons/FaGithub-1F2328.png">
+          <p:cNvPr id="5" name="Image 1" descr="Open this chapter on GitHub">
             <a:hlinkClick r:id="rId3" tooltip="https://github.com/github/copilot-app-for-beginners/tree/main/05-mcp-plugins"/>
           </p:cNvPr>
           <p:cNvPicPr>
@@ -11198,7 +11372,7 @@
       </p:sp>
       <p:pic>
         <p:nvPicPr>
-          <p:cNvPr id="10" name="Image 2" descr="/Users/danwahlin/.copilot/session-state/56a7a0da-def8-48d4-b5e8-0ac3878cb8dd/files/slides-build/img/05-browser-extensions-analogy.jpg">    </p:cNvPr>
+          <p:cNvPr id="10" name="Image 2" descr="Browser extensions connect a browser to services, just as MCP servers connect the Copilot app to GitHub, files, and Context7 documentation">    </p:cNvPr>
           <p:cNvPicPr>
             <a:picLocks noChangeAspect="1"/>
           </p:cNvPicPr>
@@ -11254,7 +11428,13 @@
       </p:sp>
       <p:pic>
         <p:nvPicPr>
-          <p:cNvPr id="12" name="Image 3" descr="/Users/danwahlin/.copilot/session-state/56a7a0da-def8-48d4-b5e8-0ac3878cb8dd/files/slides-build/icons/GoPlug-0969DA.png">    </p:cNvPr>
+          <p:cNvPr id="12" name="Image 3" descr="">
+            <a:extLst>
+              <a:ext uri="{C183D7F6-B498-43B3-948B-1728B52AA6E4}">
+                <adec:decorative xmlns:adec="http://schemas.microsoft.com/office/drawing/2017/decorative" val="1"/>
+              </a:ext>
+            </a:extLst>
+          </p:cNvPr>
           <p:cNvPicPr>
             <a:picLocks noChangeAspect="1"/>
           </p:cNvPicPr>
@@ -11391,7 +11571,13 @@
       </p:sp>
       <p:pic>
         <p:nvPicPr>
-          <p:cNvPr id="16" name="Image 4" descr="/Users/danwahlin/.copilot/session-state/56a7a0da-def8-48d4-b5e8-0ac3878cb8dd/files/slides-build/icons/GoBook-0969DA.png">    </p:cNvPr>
+          <p:cNvPr id="16" name="Image 4" descr="">
+            <a:extLst>
+              <a:ext uri="{C183D7F6-B498-43B3-948B-1728B52AA6E4}">
+                <adec:decorative xmlns:adec="http://schemas.microsoft.com/office/drawing/2017/decorative" val="1"/>
+              </a:ext>
+            </a:extLst>
+          </p:cNvPr>
           <p:cNvPicPr>
             <a:picLocks noChangeAspect="1"/>
           </p:cNvPicPr>
@@ -11528,7 +11714,13 @@
       </p:sp>
       <p:pic>
         <p:nvPicPr>
-          <p:cNvPr id="20" name="Image 5" descr="/Users/danwahlin/.copilot/session-state/56a7a0da-def8-48d4-b5e8-0ac3878cb8dd/files/slides-build/icons/GoPackage-0969DA.png">    </p:cNvPr>
+          <p:cNvPr id="20" name="Image 5" descr="">
+            <a:extLst>
+              <a:ext uri="{C183D7F6-B498-43B3-948B-1728B52AA6E4}">
+                <adec:decorative xmlns:adec="http://schemas.microsoft.com/office/drawing/2017/decorative" val="1"/>
+              </a:ext>
+            </a:extLst>
+          </p:cNvPr>
           <p:cNvPicPr>
             <a:picLocks noChangeAspect="1"/>
           </p:cNvPicPr>
@@ -11665,7 +11857,13 @@
       </p:grpSpPr>
       <p:pic>
         <p:nvPicPr>
-          <p:cNvPr id="2" name="Image 0" descr="/Users/danwahlin/.copilot/session-state/56a7a0da-def8-48d4-b5e8-0ac3878cb8dd/files/slides-build/img/grad-corner-pattern.png">    </p:cNvPr>
+          <p:cNvPr id="2" name="Image 0" descr="">
+            <a:extLst>
+              <a:ext uri="{C183D7F6-B498-43B3-948B-1728B52AA6E4}">
+                <adec:decorative xmlns:adec="http://schemas.microsoft.com/office/drawing/2017/decorative" val="1"/>
+              </a:ext>
+            </a:extLst>
+          </p:cNvPr>
           <p:cNvPicPr>
             <a:picLocks noChangeAspect="1"/>
           </p:cNvPicPr>
@@ -11760,7 +11958,7 @@
       </p:sp>
       <p:pic>
         <p:nvPicPr>
-          <p:cNvPr id="5" name="Image 1" descr="/Users/danwahlin/.copilot/session-state/56a7a0da-def8-48d4-b5e8-0ac3878cb8dd/files/slides-build/icons/FaGithub-1F2328.png">
+          <p:cNvPr id="5" name="Image 1" descr="Open this chapter on GitHub">
             <a:hlinkClick r:id="rId3" tooltip="https://github.com/github/copilot-app-for-beginners/tree/main/05-mcp-plugins"/>
           </p:cNvPr>
           <p:cNvPicPr>
@@ -11958,7 +12156,7 @@
       </p:sp>
       <p:pic>
         <p:nvPicPr>
-          <p:cNvPr id="10" name="Image 2" descr="/Users/danwahlin/.copilot/session-state/56a7a0da-def8-48d4-b5e8-0ac3878cb8dd/files/slides-build/img/05-context7-crop.png">    </p:cNvPr>
+          <p:cNvPr id="10" name="Image 2" descr="Context7 MCP server dialog with server name context7, HTTP selected, and URL https://mcp.context7.com/mcp">    </p:cNvPr>
           <p:cNvPicPr>
             <a:picLocks noChangeAspect="1"/>
           </p:cNvPicPr>
@@ -12672,7 +12870,13 @@
       </p:grpSpPr>
       <p:pic>
         <p:nvPicPr>
-          <p:cNvPr id="2" name="Image 0" descr="/Users/danwahlin/.copilot/session-state/56a7a0da-def8-48d4-b5e8-0ac3878cb8dd/files/slides-build/img/grad-corner-pattern.png">    </p:cNvPr>
+          <p:cNvPr id="2" name="Image 0" descr="">
+            <a:extLst>
+              <a:ext uri="{C183D7F6-B498-43B3-948B-1728B52AA6E4}">
+                <adec:decorative xmlns:adec="http://schemas.microsoft.com/office/drawing/2017/decorative" val="1"/>
+              </a:ext>
+            </a:extLst>
+          </p:cNvPr>
           <p:cNvPicPr>
             <a:picLocks noChangeAspect="1"/>
           </p:cNvPicPr>
@@ -12767,7 +12971,7 @@
       </p:sp>
       <p:pic>
         <p:nvPicPr>
-          <p:cNvPr id="5" name="Image 1" descr="/Users/danwahlin/.copilot/session-state/56a7a0da-def8-48d4-b5e8-0ac3878cb8dd/files/slides-build/icons/FaGithub-1F2328.png">
+          <p:cNvPr id="5" name="Image 1" descr="Open this chapter on GitHub">
             <a:hlinkClick r:id="rId3" tooltip="https://github.com/github/copilot-app-for-beginners/tree/main/05-mcp-plugins"/>
           </p:cNvPr>
           <p:cNvPicPr>
@@ -12954,7 +13158,13 @@
       </p:sp>
       <p:pic>
         <p:nvPicPr>
-          <p:cNvPr id="10" name="Image 2" descr="/Users/danwahlin/.copilot/session-state/56a7a0da-def8-48d4-b5e8-0ac3878cb8dd/files/slides-build/icons/GoGlobe-0969DA.png">    </p:cNvPr>
+          <p:cNvPr id="10" name="Image 2" descr="">
+            <a:extLst>
+              <a:ext uri="{C183D7F6-B498-43B3-948B-1728B52AA6E4}">
+                <adec:decorative xmlns:adec="http://schemas.microsoft.com/office/drawing/2017/decorative" val="1"/>
+              </a:ext>
+            </a:extLst>
+          </p:cNvPr>
           <p:cNvPicPr>
             <a:picLocks noChangeAspect="1"/>
           </p:cNvPicPr>
@@ -13141,7 +13351,13 @@
       </p:sp>
       <p:pic>
         <p:nvPicPr>
-          <p:cNvPr id="17" name="Image 3" descr="/Users/danwahlin/.copilot/session-state/56a7a0da-def8-48d4-b5e8-0ac3878cb8dd/files/slides-build/icons/GoCopilot-0969DA.png">    </p:cNvPr>
+          <p:cNvPr id="17" name="Image 3" descr="">
+            <a:extLst>
+              <a:ext uri="{C183D7F6-B498-43B3-948B-1728B52AA6E4}">
+                <adec:decorative xmlns:adec="http://schemas.microsoft.com/office/drawing/2017/decorative" val="1"/>
+              </a:ext>
+            </a:extLst>
+          </p:cNvPr>
           <p:cNvPicPr>
             <a:picLocks noChangeAspect="1"/>
           </p:cNvPicPr>
@@ -13278,7 +13494,13 @@
       </p:sp>
       <p:pic>
         <p:nvPicPr>
-          <p:cNvPr id="21" name="Image 4" descr="/Users/danwahlin/.copilot/session-state/56a7a0da-def8-48d4-b5e8-0ac3878cb8dd/files/slides-build/icons/GoLock-1A7F37.png">    </p:cNvPr>
+          <p:cNvPr id="21" name="Image 4" descr="">
+            <a:extLst>
+              <a:ext uri="{C183D7F6-B498-43B3-948B-1728B52AA6E4}">
+                <adec:decorative xmlns:adec="http://schemas.microsoft.com/office/drawing/2017/decorative" val="1"/>
+              </a:ext>
+            </a:extLst>
+          </p:cNvPr>
           <p:cNvPicPr>
             <a:picLocks noChangeAspect="1"/>
           </p:cNvPicPr>
@@ -13465,7 +13687,13 @@
       </p:sp>
       <p:pic>
         <p:nvPicPr>
-          <p:cNvPr id="28" name="Image 5" descr="/Users/danwahlin/.copilot/session-state/56a7a0da-def8-48d4-b5e8-0ac3878cb8dd/files/slides-build/icons/GoCopilot-1A7F37.png">    </p:cNvPr>
+          <p:cNvPr id="28" name="Image 5" descr="">
+            <a:extLst>
+              <a:ext uri="{C183D7F6-B498-43B3-948B-1728B52AA6E4}">
+                <adec:decorative xmlns:adec="http://schemas.microsoft.com/office/drawing/2017/decorative" val="1"/>
+              </a:ext>
+            </a:extLst>
+          </p:cNvPr>
           <p:cNvPicPr>
             <a:picLocks noChangeAspect="1"/>
           </p:cNvPicPr>
@@ -13606,7 +13834,13 @@
       </p:sp>
       <p:pic>
         <p:nvPicPr>
-          <p:cNvPr id="32" name="Image 6" descr="/Users/danwahlin/.copilot/session-state/56a7a0da-def8-48d4-b5e8-0ac3878cb8dd/files/slides-build/icons/GoCheckCircle-1A7F37.png">    </p:cNvPr>
+          <p:cNvPr id="32" name="Image 6" descr="">
+            <a:extLst>
+              <a:ext uri="{C183D7F6-B498-43B3-948B-1728B52AA6E4}">
+                <adec:decorative xmlns:adec="http://schemas.microsoft.com/office/drawing/2017/decorative" val="1"/>
+              </a:ext>
+            </a:extLst>
+          </p:cNvPr>
           <p:cNvPicPr>
             <a:picLocks noChangeAspect="1"/>
           </p:cNvPicPr>
